--- a/slides/slam_comparison.pptx
+++ b/slides/slam_comparison.pptx
@@ -5,10 +5,10 @@
     <p:sldMasterId id="2147483648" r:id="rId1"/>
   </p:sldMasterIdLst>
   <p:notesMasterIdLst>
-    <p:notesMasterId r:id="rId17"/>
+    <p:notesMasterId r:id="rId16"/>
   </p:notesMasterIdLst>
   <p:handoutMasterIdLst>
-    <p:handoutMasterId r:id="rId18"/>
+    <p:handoutMasterId r:id="rId17"/>
   </p:handoutMasterIdLst>
   <p:sldIdLst>
     <p:sldId id="256" r:id="rId2"/>
@@ -25,7 +25,6 @@
     <p:sldId id="267" r:id="rId13"/>
     <p:sldId id="268" r:id="rId14"/>
     <p:sldId id="269" r:id="rId15"/>
-    <p:sldId id="270" r:id="rId16"/>
   </p:sldIdLst>
   <p:sldSz cx="9144000" cy="5143500" type="screen16x9"/>
   <p:notesSz cx="6858000" cy="9144000"/>
@@ -727,7 +726,7 @@
     </p:spTree>
     <p:extLst>
       <p:ext uri="{BB962C8B-B14F-4D97-AF65-F5344CB8AC3E}">
-        <p14:creationId xmlns:p14="http://schemas.microsoft.com/office/powerpoint/2010/main" val="2205058539"/>
+        <p14:creationId xmlns:p14="http://schemas.microsoft.com/office/powerpoint/2010/main" val="3319200145"/>
       </p:ext>
     </p:extLst>
   </p:cSld>
@@ -783,7 +782,7 @@
           <a:p>
             <a:r>
               <a:rPr lang="en-US"/>
-              <a:t>Every SLAM system starts in its own coordinate frame, so before comparing we must align it to the ground truth with the Umeyama method. For metric sensors, LiDAR and RGB-D, we only allow rotation and translation, that is SE(3). A monocular camera like mine cannot know the true size of the world, so we additionally allow one scale factor, Sim(3). This follows Zhang and Scaramuzza 2018. We report the scale factor, and as a fairness check we evaluate every system with Sim(3) too. Robustness: SLAM sometimes loses tracking or crashes. We never drop such runs. We report how many of the N runs succeeded and what fraction of the trajectory was tracked, like the ORB-SLAM3 paper does.</a:t>
+              <a:t>These are example outputs of evo, the standard open-source tool we use for the metrics. Not our results, just to show the type of figure. Left: the trajectory coloured by its absolute error, so you see where the system was good or bad. Right: the absolute error over time for two systems on the same sequence. In our paper we will show an overlay of all four systems on the same ground truth, box plots over the repeated runs, and a results table.</a:t>
             </a:r>
             <a:endParaRPr lang="de-DE"/>
           </a:p>
@@ -815,7 +814,7 @@
     </p:spTree>
     <p:extLst>
       <p:ext uri="{BB962C8B-B14F-4D97-AF65-F5344CB8AC3E}">
-        <p14:creationId xmlns:p14="http://schemas.microsoft.com/office/powerpoint/2010/main" val="2982133090"/>
+        <p14:creationId xmlns:p14="http://schemas.microsoft.com/office/powerpoint/2010/main" val="2241709049"/>
       </p:ext>
     </p:extLst>
   </p:cSld>
@@ -871,7 +870,7 @@
           <a:p>
             <a:r>
               <a:rPr lang="en-US"/>
-              <a:t>These are example outputs of evo, the standard open-source tool we use for the metrics. Not our results, just to show the type of figure. Left: the trajectory coloured by its absolute error, so you see where the system was good or bad. Right: the absolute error over time for two systems on the same sequence. In our paper we will show an overlay of all four systems on the same ground truth, box plots over the repeated runs, and a results table.</a:t>
+              <a:t>SLAM is not deterministic: multithreading and GPU scheduling change the result slightly every run. So one run is not enough. We do five runs per system and sequence and report the median and the interquartile range. We process offline, every frame, so a slower laptop does not lose frames and get a worse score. Resources like CPU, RAM, GPU memory and runtime are reported, but always together with the hardware, and we do not rank by them, because the systems run on different machines. Everything is versioned, so every number can be reproduced.</a:t>
             </a:r>
             <a:endParaRPr lang="de-DE"/>
           </a:p>
@@ -903,7 +902,7 @@
     </p:spTree>
     <p:extLst>
       <p:ext uri="{BB962C8B-B14F-4D97-AF65-F5344CB8AC3E}">
-        <p14:creationId xmlns:p14="http://schemas.microsoft.com/office/powerpoint/2010/main" val="1226171708"/>
+        <p14:creationId xmlns:p14="http://schemas.microsoft.com/office/powerpoint/2010/main" val="4107541349"/>
       </p:ext>
     </p:extLst>
   </p:cSld>
@@ -959,7 +958,7 @@
           <a:p>
             <a:r>
               <a:rPr lang="en-US"/>
-              <a:t>SLAM is not deterministic: multithreading and GPU scheduling change the result slightly every run. So one run is not enough. We do five runs per system and sequence and report the median and the interquartile range. We process offline, every frame, so a slower laptop does not lose frames and get a worse score. Resources like CPU, RAM, GPU memory and runtime are reported, but always together with the hardware, and we do not rank by them, because the systems run on different machines. Everything is versioned, so every number can be reproduced.</a:t>
+              <a:t>This is how the code is organised. The shared data is prepared once. Each member writes one small runner for their system; it can run anywhere: pip package, Docker, ROS, CPU or GPU. Every runner must write the same files: trajectory in TUM format, map, resource log and metadata. Then one central evaluation script computes all metrics with evo, and Jupyter notebooks create the paper figures and tables. Because the evaluation code is shared, it is guaranteed to be identical for all systems.</a:t>
             </a:r>
             <a:endParaRPr lang="de-DE"/>
           </a:p>
@@ -991,7 +990,7 @@
     </p:spTree>
     <p:extLst>
       <p:ext uri="{BB962C8B-B14F-4D97-AF65-F5344CB8AC3E}">
-        <p14:creationId xmlns:p14="http://schemas.microsoft.com/office/powerpoint/2010/main" val="628525826"/>
+        <p14:creationId xmlns:p14="http://schemas.microsoft.com/office/powerpoint/2010/main" val="3544032588"/>
       </p:ext>
     </p:extLst>
   </p:cSld>
@@ -1047,7 +1046,7 @@
           <a:p>
             <a:r>
               <a:rPr lang="en-US"/>
-              <a:t>This is how the code is organised. The shared data is prepared once. Each member writes one small runner for their system; it can run anywhere: pip package, Docker, ROS, CPU or GPU. Every runner must write the same files: trajectory in TUM format, map, resource log and metadata. Then one central evaluation script computes all metrics with evo, and Jupyter notebooks create the paper figures and tables. Because the evaluation code is shared, it is guaranteed to be identical for all systems.</a:t>
+              <a:t>Before we have results, theory already tells us what to look for, and this is what the discussion in the paper will be about. Cameras need light and texture, so the dark sequence should hurt visual systems, and a single camera cannot observe scale. LiDAR needs geometry, so long featureless corridors are hard. Wheel odometry assumes no slip. Systems without loop closure accumulate drift. Limitations of our study: sensors are only software-synchronised and the cameras have rolling shutter, we use default parameters only, five runs is a small number, and the systems run on different hardware.</a:t>
             </a:r>
             <a:endParaRPr lang="de-DE"/>
           </a:p>
@@ -1079,95 +1078,7 @@
     </p:spTree>
     <p:extLst>
       <p:ext uri="{BB962C8B-B14F-4D97-AF65-F5344CB8AC3E}">
-        <p14:creationId xmlns:p14="http://schemas.microsoft.com/office/powerpoint/2010/main" val="1106574995"/>
-      </p:ext>
-    </p:extLst>
-  </p:cSld>
-  <p:clrMapOvr>
-    <a:masterClrMapping/>
-  </p:clrMapOvr>
-</p:notes>
-</file>
-
-<file path=ppt/notesSlides/notesSlide14.xml><?xml version="1.0" encoding="utf-8"?>
-<p:notes xmlns:a="http://schemas.openxmlformats.org/drawingml/2006/main" xmlns:r="http://schemas.openxmlformats.org/officeDocument/2006/relationships" xmlns:p="http://schemas.openxmlformats.org/presentationml/2006/main">
-  <p:cSld>
-    <p:spTree>
-      <p:nvGrpSpPr>
-        <p:cNvPr id="1" name=""/>
-        <p:cNvGrpSpPr/>
-        <p:nvPr/>
-      </p:nvGrpSpPr>
-      <p:grpSpPr>
-        <a:xfrm>
-          <a:off x="0" y="0"/>
-          <a:ext cx="0" cy="0"/>
-          <a:chOff x="0" y="0"/>
-          <a:chExt cx="0" cy="0"/>
-        </a:xfrm>
-      </p:grpSpPr>
-      <p:sp>
-        <p:nvSpPr>
-          <p:cNvPr id="2" name="Folienbildplatzhalter 1"/>
-          <p:cNvSpPr>
-            <a:spLocks noGrp="1" noRot="1" noChangeAspect="1"/>
-          </p:cNvSpPr>
-          <p:nvPr>
-            <p:ph type="sldImg"/>
-          </p:nvPr>
-        </p:nvSpPr>
-        <p:spPr/>
-      </p:sp>
-      <p:sp>
-        <p:nvSpPr>
-          <p:cNvPr id="3" name="Notizenplatzhalter 2"/>
-          <p:cNvSpPr>
-            <a:spLocks noGrp="1"/>
-          </p:cNvSpPr>
-          <p:nvPr>
-            <p:ph type="body" idx="1"/>
-          </p:nvPr>
-        </p:nvSpPr>
-        <p:spPr/>
-        <p:txBody>
-          <a:bodyPr/>
-          <a:lstStyle/>
-          <a:p>
-            <a:r>
-              <a:rPr lang="en-US"/>
-              <a:t>Before we have results, theory already tells us what to look for, and this is what the discussion in the paper will be about. Cameras need light and texture, so the dark sequence should hurt visual systems, and a single camera cannot observe scale. LiDAR needs geometry, so long featureless corridors are hard. Wheel odometry assumes no slip. Systems without loop closure accumulate drift. Limitations of our study: sensors are only software-synchronised and the cameras have rolling shutter, we use default parameters only, five runs is a small number, and the systems run on different hardware.</a:t>
-            </a:r>
-            <a:endParaRPr lang="de-DE"/>
-          </a:p>
-        </p:txBody>
-      </p:sp>
-      <p:sp>
-        <p:nvSpPr>
-          <p:cNvPr id="4" name="Foliennummernplatzhalter 3"/>
-          <p:cNvSpPr>
-            <a:spLocks noGrp="1"/>
-          </p:cNvSpPr>
-          <p:nvPr>
-            <p:ph type="sldNum" sz="quarter" idx="5"/>
-          </p:nvPr>
-        </p:nvSpPr>
-        <p:spPr/>
-        <p:txBody>
-          <a:bodyPr/>
-          <a:lstStyle/>
-          <a:p>
-            <a:fld id="{2FFE4289-A74F-4222-9B90-D9BDCFD3E13B}" type="slidenum">
-              <a:rPr lang="en-US" smtClean="0"/>
-              <a:t>14</a:t>
-            </a:fld>
-            <a:endParaRPr lang="en-US"/>
-          </a:p>
-        </p:txBody>
-      </p:sp>
-    </p:spTree>
-    <p:extLst>
-      <p:ext uri="{BB962C8B-B14F-4D97-AF65-F5344CB8AC3E}">
-        <p14:creationId xmlns:p14="http://schemas.microsoft.com/office/powerpoint/2010/main" val="1999470921"/>
+        <p14:creationId xmlns:p14="http://schemas.microsoft.com/office/powerpoint/2010/main" val="1381621500"/>
       </p:ext>
     </p:extLst>
   </p:cSld>
@@ -1255,7 +1166,7 @@
     </p:spTree>
     <p:extLst>
       <p:ext uri="{BB962C8B-B14F-4D97-AF65-F5344CB8AC3E}">
-        <p14:creationId xmlns:p14="http://schemas.microsoft.com/office/powerpoint/2010/main" val="2192801342"/>
+        <p14:creationId xmlns:p14="http://schemas.microsoft.com/office/powerpoint/2010/main" val="2933073603"/>
       </p:ext>
     </p:extLst>
   </p:cSld>
@@ -1343,7 +1254,7 @@
     </p:spTree>
     <p:extLst>
       <p:ext uri="{BB962C8B-B14F-4D97-AF65-F5344CB8AC3E}">
-        <p14:creationId xmlns:p14="http://schemas.microsoft.com/office/powerpoint/2010/main" val="622757992"/>
+        <p14:creationId xmlns:p14="http://schemas.microsoft.com/office/powerpoint/2010/main" val="1907445871"/>
       </p:ext>
     </p:extLst>
   </p:cSld>
@@ -1431,7 +1342,7 @@
     </p:spTree>
     <p:extLst>
       <p:ext uri="{BB962C8B-B14F-4D97-AF65-F5344CB8AC3E}">
-        <p14:creationId xmlns:p14="http://schemas.microsoft.com/office/powerpoint/2010/main" val="1398453692"/>
+        <p14:creationId xmlns:p14="http://schemas.microsoft.com/office/powerpoint/2010/main" val="4249643816"/>
       </p:ext>
     </p:extLst>
   </p:cSld>
@@ -1519,7 +1430,7 @@
     </p:spTree>
     <p:extLst>
       <p:ext uri="{BB962C8B-B14F-4D97-AF65-F5344CB8AC3E}">
-        <p14:creationId xmlns:p14="http://schemas.microsoft.com/office/powerpoint/2010/main" val="2600942639"/>
+        <p14:creationId xmlns:p14="http://schemas.microsoft.com/office/powerpoint/2010/main" val="1081170236"/>
       </p:ext>
     </p:extLst>
   </p:cSld>
@@ -1607,7 +1518,7 @@
     </p:spTree>
     <p:extLst>
       <p:ext uri="{BB962C8B-B14F-4D97-AF65-F5344CB8AC3E}">
-        <p14:creationId xmlns:p14="http://schemas.microsoft.com/office/powerpoint/2010/main" val="221772939"/>
+        <p14:creationId xmlns:p14="http://schemas.microsoft.com/office/powerpoint/2010/main" val="4288755398"/>
       </p:ext>
     </p:extLst>
   </p:cSld>
@@ -1695,7 +1606,7 @@
     </p:spTree>
     <p:extLst>
       <p:ext uri="{BB962C8B-B14F-4D97-AF65-F5344CB8AC3E}">
-        <p14:creationId xmlns:p14="http://schemas.microsoft.com/office/powerpoint/2010/main" val="1599728571"/>
+        <p14:creationId xmlns:p14="http://schemas.microsoft.com/office/powerpoint/2010/main" val="3017668808"/>
       </p:ext>
     </p:extLst>
   </p:cSld>
@@ -1751,7 +1662,7 @@
           <a:p>
             <a:r>
               <a:rPr lang="en-US"/>
-              <a:t>ATE answers: how far is the estimated trajectory from the true one, overall? Steps: first align the estimated trajectory to the ground truth, because SLAM starts in its own coordinate frame. Then, for every time step, take the distance between estimated and true position, the orange lines. Report the root mean square of these distances in metres. Low ATE means globally consistent. It was defined by Sturm et al. 2012 for the TUM RGB-D benchmark and is the most widely used SLAM metric. Weakness: one early error shifts everything after it, so ATE over-weights early mistakes. That is why we also report RPE.</a:t>
+              <a:t>ATE answers: how far is the estimated trajectory from the true one, overall? Steps: first align the estimated trajectory to the ground truth, because SLAM starts in its own coordinate frame. Then, for every time step, take the distance between estimated and true position, the orange lines. Report the root mean square of these distances in metres. Low ATE means globally consistent. It was defined by Sturm et al. 2012 for the TUM RGB-D benchmark and is the most widely used SLAM metric. Known limitation, discussed by Kuemmerle et al. 2009: one early error shifts everything after it, so ATE over-weights early mistakes. We mention this in the discussion.</a:t>
             </a:r>
             <a:endParaRPr lang="de-DE"/>
           </a:p>
@@ -1783,7 +1694,7 @@
     </p:spTree>
     <p:extLst>
       <p:ext uri="{BB962C8B-B14F-4D97-AF65-F5344CB8AC3E}">
-        <p14:creationId xmlns:p14="http://schemas.microsoft.com/office/powerpoint/2010/main" val="2199541085"/>
+        <p14:creationId xmlns:p14="http://schemas.microsoft.com/office/powerpoint/2010/main" val="1180608495"/>
       </p:ext>
     </p:extLst>
   </p:cSld>
@@ -1839,7 +1750,7 @@
           <a:p>
             <a:r>
               <a:rPr lang="en-US"/>
-              <a:t>RPE answers: how accurate is the local motion, i.e. how much drift per metre? Instead of comparing absolute positions, RPE compares relative motions: how did the robot move over one metre according to SLAM, versus according to ground truth. In the figure the estimate drifts away, so the absolute error at the end is big, but over each single metre the motion is still almost right, so RPE stays small. We report RPE in metres for translation and degrees for rotation, per one metre travelled. Kuemmerle et al. 2009 argue that relative metrics are fairer because a single early error does not dominate.</a:t>
+              <a:t>Every SLAM system starts in its own coordinate frame, so before comparing we must align it to the ground truth with the Umeyama method. For metric sensors, LiDAR and RGB-D, we only allow rotation and translation, that is SE(3). A monocular camera like mine cannot know the true size of the world, so we additionally allow one scale factor, Sim(3). This follows Zhang and Scaramuzza 2018. We report the scale factor, and as a fairness check we evaluate every system with Sim(3) too. Robustness: SLAM sometimes loses tracking or crashes. We never drop such runs. We report how many of the N runs succeeded and what fraction of the trajectory was tracked, like the ORB-SLAM3 paper does.</a:t>
             </a:r>
             <a:endParaRPr lang="de-DE"/>
           </a:p>
@@ -1871,7 +1782,7 @@
     </p:spTree>
     <p:extLst>
       <p:ext uri="{BB962C8B-B14F-4D97-AF65-F5344CB8AC3E}">
-        <p14:creationId xmlns:p14="http://schemas.microsoft.com/office/powerpoint/2010/main" val="2268294281"/>
+        <p14:creationId xmlns:p14="http://schemas.microsoft.com/office/powerpoint/2010/main" val="1871451249"/>
       </p:ext>
     </p:extLst>
   </p:cSld>
@@ -6727,7 +6638,7 @@
           <p:cNvPr id="2" name="Titel 1">
             <a:extLst>
               <a:ext uri="{FF2B5EF4-FFF2-40B4-BE49-F238E27FC236}">
-                <a16:creationId xmlns:a16="http://schemas.microsoft.com/office/drawing/2014/main" id="{20FDF463-A317-3CCE-6A88-3AC7A3521D4D}"/>
+                <a16:creationId xmlns:a16="http://schemas.microsoft.com/office/drawing/2014/main" id="{4619777A-C7CF-F60E-0C86-A95C29DB5537}"/>
               </a:ext>
             </a:extLst>
           </p:cNvPr>
@@ -6756,7 +6667,7 @@
           <p:cNvPr id="3" name="Textplatzhalter 2">
             <a:extLst>
               <a:ext uri="{FF2B5EF4-FFF2-40B4-BE49-F238E27FC236}">
-                <a16:creationId xmlns:a16="http://schemas.microsoft.com/office/drawing/2014/main" id="{3FC43042-74ED-2FA9-F0CD-43DEDEEE245D}"/>
+                <a16:creationId xmlns:a16="http://schemas.microsoft.com/office/drawing/2014/main" id="{54D1576D-DA04-51A8-753C-E00A191C430D}"/>
               </a:ext>
             </a:extLst>
           </p:cNvPr>
@@ -6790,7 +6701,7 @@
     </p:spTree>
     <p:extLst>
       <p:ext uri="{BB962C8B-B14F-4D97-AF65-F5344CB8AC3E}">
-        <p14:creationId xmlns:p14="http://schemas.microsoft.com/office/powerpoint/2010/main" val="1773619547"/>
+        <p14:creationId xmlns:p14="http://schemas.microsoft.com/office/powerpoint/2010/main" val="1900031333"/>
       </p:ext>
     </p:extLst>
   </p:cSld>
@@ -6822,7 +6733,7 @@
           <p:cNvPr id="2" name="Titel 1">
             <a:extLst>
               <a:ext uri="{FF2B5EF4-FFF2-40B4-BE49-F238E27FC236}">
-                <a16:creationId xmlns:a16="http://schemas.microsoft.com/office/drawing/2014/main" id="{24813610-4D48-7207-BBDD-B0BAAAE35486}"/>
+                <a16:creationId xmlns:a16="http://schemas.microsoft.com/office/drawing/2014/main" id="{59924734-5C4B-7E1E-CDA1-8C0AF44DAF17}"/>
               </a:ext>
             </a:extLst>
           </p:cNvPr>
@@ -6839,9 +6750,10 @@
           <a:lstStyle/>
           <a:p>
             <a:r>
-              <a:rPr lang="de-DE"/>
-              <a:t>Alignment and robustness</a:t>
-            </a:r>
+              <a:rPr lang="en-US"/>
+              <a:t>What the evaluation looks like</a:t>
+            </a:r>
+            <a:endParaRPr lang="de-DE"/>
           </a:p>
         </p:txBody>
       </p:sp>
@@ -6850,7 +6762,7 @@
           <p:cNvPr id="4" name="Fußzeilenplatzhalter 3">
             <a:extLst>
               <a:ext uri="{FF2B5EF4-FFF2-40B4-BE49-F238E27FC236}">
-                <a16:creationId xmlns:a16="http://schemas.microsoft.com/office/drawing/2014/main" id="{13460470-E817-8F76-59F7-2FD8E5D602D9}"/>
+                <a16:creationId xmlns:a16="http://schemas.microsoft.com/office/drawing/2014/main" id="{554D151D-9930-535B-CF57-43164FA6AE1C}"/>
               </a:ext>
             </a:extLst>
           </p:cNvPr>
@@ -6879,7 +6791,7 @@
           <p:cNvPr id="5" name="Foliennummernplatzhalter 4">
             <a:extLst>
               <a:ext uri="{FF2B5EF4-FFF2-40B4-BE49-F238E27FC236}">
-                <a16:creationId xmlns:a16="http://schemas.microsoft.com/office/drawing/2014/main" id="{E839DF09-C2A3-AB2B-14D1-CA484F868A10}"/>
+                <a16:creationId xmlns:a16="http://schemas.microsoft.com/office/drawing/2014/main" id="{BF651662-BC75-4591-5AEF-15E2E773DFB0}"/>
               </a:ext>
             </a:extLst>
           </p:cNvPr>
@@ -6906,10 +6818,10 @@
       </p:sp>
       <p:pic>
         <p:nvPicPr>
-          <p:cNvPr id="7" name="Grafik 6" descr="Raw estimate, SE(3) aligned estimate and Sim(3) aligned estimate">
-            <a:extLst>
-              <a:ext uri="{FF2B5EF4-FFF2-40B4-BE49-F238E27FC236}">
-                <a16:creationId xmlns:a16="http://schemas.microsoft.com/office/drawing/2014/main" id="{09B19CDC-2572-8FB6-A0BD-B904F1B8CDBF}"/>
+          <p:cNvPr id="7" name="Grafik 6" descr="Example: absolute error colour-coded along a trajectory">
+            <a:extLst>
+              <a:ext uri="{FF2B5EF4-FFF2-40B4-BE49-F238E27FC236}">
+                <a16:creationId xmlns:a16="http://schemas.microsoft.com/office/drawing/2014/main" id="{6412528A-38C7-48DD-54A0-451EDAF68AB3}"/>
               </a:ext>
             </a:extLst>
           </p:cNvPr>
@@ -6932,35 +6844,71 @@
         </p:blipFill>
         <p:spPr>
           <a:xfrm>
-            <a:off x="177800" y="681362"/>
-            <a:ext cx="8775700" cy="2574275"/>
+            <a:off x="203481" y="635000"/>
+            <a:ext cx="4139638" cy="3429000"/>
           </a:xfrm>
           <a:prstGeom prst="rect">
             <a:avLst/>
           </a:prstGeom>
         </p:spPr>
       </p:pic>
-      <p:sp>
-        <p:nvSpPr>
-          <p:cNvPr id="8" name="Textfeld 7">
-            <a:extLst>
-              <a:ext uri="{FF2B5EF4-FFF2-40B4-BE49-F238E27FC236}">
-                <a16:creationId xmlns:a16="http://schemas.microsoft.com/office/drawing/2014/main" id="{F69BF8A4-6831-701C-45F3-1D412A03B578}"/>
-              </a:ext>
-            </a:extLst>
-          </p:cNvPr>
-          <p:cNvSpPr txBox="1"/>
+      <p:pic>
+        <p:nvPicPr>
+          <p:cNvPr id="9" name="Grafik 8" descr="Example: absolute error over time for two SLAM systems">
+            <a:extLst>
+              <a:ext uri="{FF2B5EF4-FFF2-40B4-BE49-F238E27FC236}">
+                <a16:creationId xmlns:a16="http://schemas.microsoft.com/office/drawing/2014/main" id="{730E3AA7-F9A0-C1ED-F66D-38BB579C5DDC}"/>
+              </a:ext>
+            </a:extLst>
+          </p:cNvPr>
+          <p:cNvPicPr>
+            <a:picLocks noChangeAspect="1"/>
+          </p:cNvPicPr>
           <p:nvPr/>
-        </p:nvSpPr>
-        <p:spPr>
-          <a:xfrm>
-            <a:off x="177800" y="3403600"/>
-            <a:ext cx="4318000" cy="279400"/>
+        </p:nvPicPr>
+        <p:blipFill>
+          <a:blip r:embed="rId4">
+            <a:extLst>
+              <a:ext uri="{28A0092B-C50C-407E-A947-70E740481C1C}">
+                <a14:useLocalDpi xmlns:a14="http://schemas.microsoft.com/office/drawing/2010/main" val="0"/>
+              </a:ext>
+            </a:extLst>
+          </a:blip>
+          <a:stretch>
+            <a:fillRect/>
+          </a:stretch>
+        </p:blipFill>
+        <p:spPr>
+          <a:xfrm>
+            <a:off x="5156200" y="635000"/>
+            <a:ext cx="3429000" cy="3429000"/>
           </a:xfrm>
           <a:prstGeom prst="rect">
             <a:avLst/>
           </a:prstGeom>
         </p:spPr>
+      </p:pic>
+      <p:sp>
+        <p:nvSpPr>
+          <p:cNvPr id="10" name="Textfeld 9">
+            <a:extLst>
+              <a:ext uri="{FF2B5EF4-FFF2-40B4-BE49-F238E27FC236}">
+                <a16:creationId xmlns:a16="http://schemas.microsoft.com/office/drawing/2014/main" id="{646DD365-0962-59FA-255F-44A3C979CAFE}"/>
+              </a:ext>
+            </a:extLst>
+          </p:cNvPr>
+          <p:cNvSpPr txBox="1"/>
+          <p:nvPr/>
+        </p:nvSpPr>
+        <p:spPr>
+          <a:xfrm>
+            <a:off x="177800" y="4114800"/>
+            <a:ext cx="8775700" cy="177800"/>
+          </a:xfrm>
+          <a:prstGeom prst="rect">
+            <a:avLst/>
+          </a:prstGeom>
+        </p:spPr>
         <p:txBody>
           <a:bodyPr vert="horz" wrap="square" lIns="0" tIns="45720" rIns="0" bIns="45720" rtlCol="0" anchor="t">
             <a:noAutofit/>
@@ -6969,16 +6917,16 @@
           <a:p>
             <a:pPr algn="l"/>
             <a:r>
-              <a:rPr lang="en-US" sz="1600" b="1">
-                <a:solidFill>
-                  <a:srgbClr val="0063A6"/>
+              <a:rPr lang="de-DE" sz="900" i="1">
+                <a:solidFill>
+                  <a:srgbClr val="595959"/>
                 </a:solidFill>
               </a:rPr>
-              <a:t>Alignment (Zhang and Scaramuzza 2018)</a:t>
-            </a:r>
-            <a:endParaRPr lang="de-DE" sz="1600" b="1" dirty="0">
+              <a:t>Example plots from evo (Grupp 2017, github.com/MichaelGrupp/evo) on KITTI 00, unmodified. Not our results.</a:t>
+            </a:r>
+            <a:endParaRPr lang="de-DE" sz="900" i="1" dirty="0">
               <a:solidFill>
-                <a:srgbClr val="0063A6"/>
+                <a:srgbClr val="595959"/>
               </a:solidFill>
             </a:endParaRPr>
           </a:p>
@@ -6986,10 +6934,10 @@
       </p:sp>
       <p:sp>
         <p:nvSpPr>
-          <p:cNvPr id="9" name="Textfeld 8">
-            <a:extLst>
-              <a:ext uri="{FF2B5EF4-FFF2-40B4-BE49-F238E27FC236}">
-                <a16:creationId xmlns:a16="http://schemas.microsoft.com/office/drawing/2014/main" id="{2CDCB051-0624-8E25-F56F-60E9050E9129}"/>
+          <p:cNvPr id="11" name="Textfeld 10">
+            <a:extLst>
+              <a:ext uri="{FF2B5EF4-FFF2-40B4-BE49-F238E27FC236}">
+                <a16:creationId xmlns:a16="http://schemas.microsoft.com/office/drawing/2014/main" id="{0E23F134-6C1D-4C1B-5A6C-2039C0D00539}"/>
               </a:ext>
             </a:extLst>
           </p:cNvPr>
@@ -6998,52 +6946,29 @@
         </p:nvSpPr>
         <p:spPr>
           <a:xfrm>
-            <a:off x="177800" y="3708400"/>
-            <a:ext cx="4318000" cy="762000"/>
+            <a:off x="177800" y="4318000"/>
+            <a:ext cx="8775700" cy="279400"/>
           </a:xfrm>
           <a:prstGeom prst="rect">
             <a:avLst/>
           </a:prstGeom>
         </p:spPr>
         <p:txBody>
-          <a:bodyPr vert="horz" wrap="square" lIns="0" tIns="45720" rIns="91440" bIns="45720" rtlCol="0" anchor="t">
-            <a:normAutofit/>
+          <a:bodyPr vert="horz" wrap="square" lIns="0" tIns="45720" rIns="0" bIns="45720" rtlCol="0" anchor="t">
+            <a:noAutofit/>
           </a:bodyPr>
           <a:lstStyle/>
           <a:p>
-            <a:pPr marL="177800" indent="-177800" algn="l">
-              <a:spcAft>
-                <a:spcPts val="400"/>
-              </a:spcAft>
-              <a:buFont typeface="+mj-lt"/>
-              <a:buChar char="•"/>
-            </a:pPr>
-            <a:r>
-              <a:rPr lang="pt-BR" sz="1300">
+            <a:pPr algn="l"/>
+            <a:r>
+              <a:rPr lang="en-US" sz="1300" b="1">
                 <a:solidFill>
                   <a:srgbClr val="262626"/>
                 </a:solidFill>
               </a:rPr>
-              <a:t>Metric sensors (LiDAR, RGB-D): SE(3)</a:t>
-            </a:r>
-          </a:p>
-          <a:p>
-            <a:pPr marL="177800" indent="-177800" algn="l">
-              <a:spcAft>
-                <a:spcPts val="400"/>
-              </a:spcAft>
-              <a:buFont typeface="+mj-lt"/>
-              <a:buChar char="•"/>
-            </a:pPr>
-            <a:r>
-              <a:rPr lang="pt-BR" sz="1300">
-                <a:solidFill>
-                  <a:srgbClr val="262626"/>
-                </a:solidFill>
-              </a:rPr>
-              <a:t>Monocular camera: Sim(3), scale factor reported</a:t>
-            </a:r>
-            <a:endParaRPr lang="de-DE" sz="1300" dirty="0">
+              <a:t>Our figures: trajectory overlay of all systems, box plots over N runs, results table.</a:t>
+            </a:r>
+            <a:endParaRPr lang="de-DE" sz="1300" b="1" dirty="0">
               <a:solidFill>
                 <a:srgbClr val="262626"/>
               </a:solidFill>
@@ -7051,121 +6976,10 @@
           </a:p>
         </p:txBody>
       </p:sp>
-      <p:sp>
-        <p:nvSpPr>
-          <p:cNvPr id="10" name="Textfeld 9">
-            <a:extLst>
-              <a:ext uri="{FF2B5EF4-FFF2-40B4-BE49-F238E27FC236}">
-                <a16:creationId xmlns:a16="http://schemas.microsoft.com/office/drawing/2014/main" id="{695131C4-D6BC-9326-232A-AE04B2D1D992}"/>
-              </a:ext>
-            </a:extLst>
-          </p:cNvPr>
-          <p:cNvSpPr txBox="1"/>
-          <p:nvPr/>
-        </p:nvSpPr>
-        <p:spPr>
-          <a:xfrm>
-            <a:off x="4648200" y="3403600"/>
-            <a:ext cx="4318000" cy="279400"/>
-          </a:xfrm>
-          <a:prstGeom prst="rect">
-            <a:avLst/>
-          </a:prstGeom>
-        </p:spPr>
-        <p:txBody>
-          <a:bodyPr vert="horz" wrap="square" lIns="0" tIns="45720" rIns="0" bIns="45720" rtlCol="0" anchor="t">
-            <a:noAutofit/>
-          </a:bodyPr>
-          <a:lstStyle/>
-          <a:p>
-            <a:pPr algn="l"/>
-            <a:r>
-              <a:rPr lang="de-DE" sz="1600" b="1">
-                <a:solidFill>
-                  <a:srgbClr val="0063A6"/>
-                </a:solidFill>
-              </a:rPr>
-              <a:t>Robustness (as in ORB-SLAM3)</a:t>
-            </a:r>
-            <a:endParaRPr lang="de-DE" sz="1600" b="1" dirty="0">
-              <a:solidFill>
-                <a:srgbClr val="0063A6"/>
-              </a:solidFill>
-            </a:endParaRPr>
-          </a:p>
-        </p:txBody>
-      </p:sp>
-      <p:sp>
-        <p:nvSpPr>
-          <p:cNvPr id="11" name="Textfeld 10">
-            <a:extLst>
-              <a:ext uri="{FF2B5EF4-FFF2-40B4-BE49-F238E27FC236}">
-                <a16:creationId xmlns:a16="http://schemas.microsoft.com/office/drawing/2014/main" id="{C5878694-6337-12C0-63E4-2231BA2ADD3A}"/>
-              </a:ext>
-            </a:extLst>
-          </p:cNvPr>
-          <p:cNvSpPr txBox="1"/>
-          <p:nvPr/>
-        </p:nvSpPr>
-        <p:spPr>
-          <a:xfrm>
-            <a:off x="4648200" y="3708400"/>
-            <a:ext cx="4318000" cy="762000"/>
-          </a:xfrm>
-          <a:prstGeom prst="rect">
-            <a:avLst/>
-          </a:prstGeom>
-        </p:spPr>
-        <p:txBody>
-          <a:bodyPr vert="horz" wrap="square" lIns="0" tIns="45720" rIns="91440" bIns="45720" rtlCol="0" anchor="t">
-            <a:normAutofit/>
-          </a:bodyPr>
-          <a:lstStyle/>
-          <a:p>
-            <a:pPr marL="177800" indent="-177800" algn="l">
-              <a:spcAft>
-                <a:spcPts val="400"/>
-              </a:spcAft>
-              <a:buFont typeface="+mj-lt"/>
-              <a:buChar char="•"/>
-            </a:pPr>
-            <a:r>
-              <a:rPr lang="en-US" sz="1300">
-                <a:solidFill>
-                  <a:srgbClr val="262626"/>
-                </a:solidFill>
-              </a:rPr>
-              <a:t>Success rate k of N runs, failures never dropped</a:t>
-            </a:r>
-          </a:p>
-          <a:p>
-            <a:pPr marL="177800" indent="-177800" algn="l">
-              <a:spcAft>
-                <a:spcPts val="400"/>
-              </a:spcAft>
-              <a:buFont typeface="+mj-lt"/>
-              <a:buChar char="•"/>
-            </a:pPr>
-            <a:r>
-              <a:rPr lang="en-US" sz="1300">
-                <a:solidFill>
-                  <a:srgbClr val="262626"/>
-                </a:solidFill>
-              </a:rPr>
-              <a:t>Fraction of the trajectory that was tracked</a:t>
-            </a:r>
-            <a:endParaRPr lang="de-DE" sz="1300" dirty="0">
-              <a:solidFill>
-                <a:srgbClr val="262626"/>
-              </a:solidFill>
-            </a:endParaRPr>
-          </a:p>
-        </p:txBody>
-      </p:sp>
     </p:spTree>
     <p:extLst>
       <p:ext uri="{BB962C8B-B14F-4D97-AF65-F5344CB8AC3E}">
-        <p14:creationId xmlns:p14="http://schemas.microsoft.com/office/powerpoint/2010/main" val="1105580483"/>
+        <p14:creationId xmlns:p14="http://schemas.microsoft.com/office/powerpoint/2010/main" val="2348246100"/>
       </p:ext>
     </p:extLst>
   </p:cSld>
@@ -7197,7 +7011,7 @@
           <p:cNvPr id="2" name="Titel 1">
             <a:extLst>
               <a:ext uri="{FF2B5EF4-FFF2-40B4-BE49-F238E27FC236}">
-                <a16:creationId xmlns:a16="http://schemas.microsoft.com/office/drawing/2014/main" id="{AE8233E1-CA18-FE00-5699-909EAAF9AB71}"/>
+                <a16:creationId xmlns:a16="http://schemas.microsoft.com/office/drawing/2014/main" id="{D2E43C69-80CD-A3D6-0C24-D006495B3A87}"/>
               </a:ext>
             </a:extLst>
           </p:cNvPr>
@@ -7214,19 +7028,18 @@
           <a:lstStyle/>
           <a:p>
             <a:r>
-              <a:rPr lang="en-US"/>
-              <a:t>What the evaluation looks like</a:t>
-            </a:r>
-            <a:endParaRPr lang="de-DE"/>
-          </a:p>
-        </p:txBody>
-      </p:sp>
-      <p:sp>
-        <p:nvSpPr>
-          <p:cNvPr id="4" name="Fußzeilenplatzhalter 3">
-            <a:extLst>
-              <a:ext uri="{FF2B5EF4-FFF2-40B4-BE49-F238E27FC236}">
-                <a16:creationId xmlns:a16="http://schemas.microsoft.com/office/drawing/2014/main" id="{0CC7FAF9-F1EC-BE78-D28F-01776ADF2D50}"/>
+              <a:rPr lang="de-DE"/>
+              <a:t>Evaluation protocol</a:t>
+            </a:r>
+          </a:p>
+        </p:txBody>
+      </p:sp>
+      <p:sp>
+        <p:nvSpPr>
+          <p:cNvPr id="5" name="Fußzeilenplatzhalter 4">
+            <a:extLst>
+              <a:ext uri="{FF2B5EF4-FFF2-40B4-BE49-F238E27FC236}">
+                <a16:creationId xmlns:a16="http://schemas.microsoft.com/office/drawing/2014/main" id="{3F2E70FF-2D0B-CB72-B632-E9F8730CFAC2}"/>
               </a:ext>
             </a:extLst>
           </p:cNvPr>
@@ -7234,7 +7047,7 @@
             <a:spLocks noGrp="1"/>
           </p:cNvSpPr>
           <p:nvPr>
-            <p:ph type="ftr" sz="quarter" idx="12"/>
+            <p:ph type="ftr" sz="quarter" idx="13"/>
           </p:nvPr>
         </p:nvSpPr>
         <p:spPr/>
@@ -7252,10 +7065,10 @@
       </p:sp>
       <p:sp>
         <p:nvSpPr>
-          <p:cNvPr id="5" name="Foliennummernplatzhalter 4">
-            <a:extLst>
-              <a:ext uri="{FF2B5EF4-FFF2-40B4-BE49-F238E27FC236}">
-                <a16:creationId xmlns:a16="http://schemas.microsoft.com/office/drawing/2014/main" id="{32BB5FF3-9B9B-4FD6-0084-E3CECE3DD642}"/>
+          <p:cNvPr id="6" name="Foliennummernplatzhalter 5">
+            <a:extLst>
+              <a:ext uri="{FF2B5EF4-FFF2-40B4-BE49-F238E27FC236}">
+                <a16:creationId xmlns:a16="http://schemas.microsoft.com/office/drawing/2014/main" id="{799B2A67-1A18-1B6A-29E2-57DA6617985D}"/>
               </a:ext>
             </a:extLst>
           </p:cNvPr>
@@ -7263,7 +7076,7 @@
             <a:spLocks noGrp="1"/>
           </p:cNvSpPr>
           <p:nvPr>
-            <p:ph type="sldNum" sz="quarter" idx="13"/>
+            <p:ph type="sldNum" sz="quarter" idx="14"/>
           </p:nvPr>
         </p:nvSpPr>
         <p:spPr/>
@@ -7280,159 +7093,127 @@
           </a:p>
         </p:txBody>
       </p:sp>
-      <p:pic>
-        <p:nvPicPr>
-          <p:cNvPr id="7" name="Grafik 6" descr="Example: absolute error colour-coded along a trajectory">
-            <a:extLst>
-              <a:ext uri="{FF2B5EF4-FFF2-40B4-BE49-F238E27FC236}">
-                <a16:creationId xmlns:a16="http://schemas.microsoft.com/office/drawing/2014/main" id="{989001EC-A212-981E-C1C8-D424331F48F6}"/>
-              </a:ext>
-            </a:extLst>
-          </p:cNvPr>
-          <p:cNvPicPr>
-            <a:picLocks noChangeAspect="1"/>
-          </p:cNvPicPr>
+      <p:sp>
+        <p:nvSpPr>
+          <p:cNvPr id="7" name="Textfeld 6">
+            <a:extLst>
+              <a:ext uri="{FF2B5EF4-FFF2-40B4-BE49-F238E27FC236}">
+                <a16:creationId xmlns:a16="http://schemas.microsoft.com/office/drawing/2014/main" id="{93FD3C0D-6BDA-C680-4848-4EC8FB8BE5AD}"/>
+              </a:ext>
+            </a:extLst>
+          </p:cNvPr>
+          <p:cNvSpPr txBox="1"/>
           <p:nvPr/>
-        </p:nvPicPr>
-        <p:blipFill>
-          <a:blip r:embed="rId3">
-            <a:extLst>
-              <a:ext uri="{28A0092B-C50C-407E-A947-70E740481C1C}">
-                <a14:useLocalDpi xmlns:a14="http://schemas.microsoft.com/office/drawing/2010/main" val="0"/>
-              </a:ext>
-            </a:extLst>
-          </a:blip>
-          <a:stretch>
-            <a:fillRect/>
-          </a:stretch>
-        </p:blipFill>
-        <p:spPr>
-          <a:xfrm>
-            <a:off x="203481" y="635000"/>
-            <a:ext cx="4139638" cy="3429000"/>
+        </p:nvSpPr>
+        <p:spPr>
+          <a:xfrm>
+            <a:off x="177800" y="660400"/>
+            <a:ext cx="4191000" cy="279400"/>
           </a:xfrm>
           <a:prstGeom prst="rect">
             <a:avLst/>
           </a:prstGeom>
         </p:spPr>
-      </p:pic>
-      <p:pic>
-        <p:nvPicPr>
-          <p:cNvPr id="9" name="Grafik 8" descr="Example: absolute error over time for two SLAM systems">
-            <a:extLst>
-              <a:ext uri="{FF2B5EF4-FFF2-40B4-BE49-F238E27FC236}">
-                <a16:creationId xmlns:a16="http://schemas.microsoft.com/office/drawing/2014/main" id="{80BEA63A-5848-9F06-7680-4A3A94D38E8F}"/>
-              </a:ext>
-            </a:extLst>
-          </p:cNvPr>
-          <p:cNvPicPr>
-            <a:picLocks noChangeAspect="1"/>
-          </p:cNvPicPr>
+        <p:txBody>
+          <a:bodyPr vert="horz" wrap="square" lIns="0" tIns="45720" rIns="0" bIns="45720" rtlCol="0" anchor="t">
+            <a:noAutofit/>
+          </a:bodyPr>
+          <a:lstStyle/>
+          <a:p>
+            <a:pPr algn="l"/>
+            <a:r>
+              <a:rPr lang="de-DE" sz="1600" b="1">
+                <a:solidFill>
+                  <a:srgbClr val="0063A6"/>
+                </a:solidFill>
+              </a:rPr>
+              <a:t>Repeated runs</a:t>
+            </a:r>
+            <a:endParaRPr lang="de-DE" sz="1600" b="1" dirty="0">
+              <a:solidFill>
+                <a:srgbClr val="0063A6"/>
+              </a:solidFill>
+            </a:endParaRPr>
+          </a:p>
+        </p:txBody>
+      </p:sp>
+      <p:sp>
+        <p:nvSpPr>
+          <p:cNvPr id="8" name="Textfeld 7">
+            <a:extLst>
+              <a:ext uri="{FF2B5EF4-FFF2-40B4-BE49-F238E27FC236}">
+                <a16:creationId xmlns:a16="http://schemas.microsoft.com/office/drawing/2014/main" id="{020E7878-4CDE-5E90-B0D5-FBE168D40492}"/>
+              </a:ext>
+            </a:extLst>
+          </p:cNvPr>
+          <p:cNvSpPr txBox="1"/>
           <p:nvPr/>
-        </p:nvPicPr>
-        <p:blipFill>
-          <a:blip r:embed="rId4">
-            <a:extLst>
-              <a:ext uri="{28A0092B-C50C-407E-A947-70E740481C1C}">
-                <a14:useLocalDpi xmlns:a14="http://schemas.microsoft.com/office/drawing/2010/main" val="0"/>
-              </a:ext>
-            </a:extLst>
-          </a:blip>
-          <a:stretch>
-            <a:fillRect/>
-          </a:stretch>
-        </p:blipFill>
-        <p:spPr>
-          <a:xfrm>
-            <a:off x="5156200" y="635000"/>
-            <a:ext cx="3429000" cy="3429000"/>
+        </p:nvSpPr>
+        <p:spPr>
+          <a:xfrm>
+            <a:off x="177800" y="1016000"/>
+            <a:ext cx="4191000" cy="1524000"/>
           </a:xfrm>
           <a:prstGeom prst="rect">
             <a:avLst/>
           </a:prstGeom>
         </p:spPr>
-      </p:pic>
-      <p:sp>
-        <p:nvSpPr>
-          <p:cNvPr id="10" name="Textfeld 9">
-            <a:extLst>
-              <a:ext uri="{FF2B5EF4-FFF2-40B4-BE49-F238E27FC236}">
-                <a16:creationId xmlns:a16="http://schemas.microsoft.com/office/drawing/2014/main" id="{C8B2EFD2-FA80-E744-35DE-D0E84F444981}"/>
-              </a:ext>
-            </a:extLst>
-          </p:cNvPr>
-          <p:cNvSpPr txBox="1"/>
-          <p:nvPr/>
-        </p:nvSpPr>
-        <p:spPr>
-          <a:xfrm>
-            <a:off x="177800" y="4114800"/>
-            <a:ext cx="8775700" cy="177800"/>
-          </a:xfrm>
-          <a:prstGeom prst="rect">
-            <a:avLst/>
-          </a:prstGeom>
-        </p:spPr>
-        <p:txBody>
-          <a:bodyPr vert="horz" wrap="square" lIns="0" tIns="45720" rIns="0" bIns="45720" rtlCol="0" anchor="t">
-            <a:noAutofit/>
+        <p:txBody>
+          <a:bodyPr vert="horz" wrap="square" lIns="0" tIns="45720" rIns="91440" bIns="45720" rtlCol="0" anchor="t">
+            <a:normAutofit/>
           </a:bodyPr>
           <a:lstStyle/>
           <a:p>
-            <a:pPr algn="l"/>
-            <a:r>
-              <a:rPr lang="de-DE" sz="900" i="1">
-                <a:solidFill>
-                  <a:srgbClr val="595959"/>
+            <a:pPr marL="177800" indent="-177800" algn="l">
+              <a:spcAft>
+                <a:spcPts val="400"/>
+              </a:spcAft>
+              <a:buFont typeface="+mj-lt"/>
+              <a:buChar char="•"/>
+            </a:pPr>
+            <a:r>
+              <a:rPr lang="en-US" sz="1400">
+                <a:solidFill>
+                  <a:srgbClr val="262626"/>
                 </a:solidFill>
               </a:rPr>
-              <a:t>Example plots from evo (Grupp 2017, github.com/MichaelGrupp/evo) on KITTI 00, unmodified. Not our results.</a:t>
-            </a:r>
-            <a:endParaRPr lang="de-DE" sz="900" i="1" dirty="0">
-              <a:solidFill>
-                <a:srgbClr val="595959"/>
-              </a:solidFill>
-            </a:endParaRPr>
-          </a:p>
-        </p:txBody>
-      </p:sp>
-      <p:sp>
-        <p:nvSpPr>
-          <p:cNvPr id="11" name="Textfeld 10">
-            <a:extLst>
-              <a:ext uri="{FF2B5EF4-FFF2-40B4-BE49-F238E27FC236}">
-                <a16:creationId xmlns:a16="http://schemas.microsoft.com/office/drawing/2014/main" id="{E8818ED0-AA86-A742-D6A9-36731C1F7F8A}"/>
-              </a:ext>
-            </a:extLst>
-          </p:cNvPr>
-          <p:cNvSpPr txBox="1"/>
-          <p:nvPr/>
-        </p:nvSpPr>
-        <p:spPr>
-          <a:xfrm>
-            <a:off x="177800" y="4318000"/>
-            <a:ext cx="8775700" cy="279400"/>
-          </a:xfrm>
-          <a:prstGeom prst="rect">
-            <a:avLst/>
-          </a:prstGeom>
-        </p:spPr>
-        <p:txBody>
-          <a:bodyPr vert="horz" wrap="square" lIns="0" tIns="45720" rIns="0" bIns="45720" rtlCol="0" anchor="t">
-            <a:noAutofit/>
-          </a:bodyPr>
-          <a:lstStyle/>
-          <a:p>
-            <a:pPr algn="l"/>
-            <a:r>
-              <a:rPr lang="en-US" sz="1300" b="1">
+              <a:t>N = 5 runs per system and sequence</a:t>
+            </a:r>
+          </a:p>
+          <a:p>
+            <a:pPr marL="177800" indent="-177800" algn="l">
+              <a:spcAft>
+                <a:spcPts val="400"/>
+              </a:spcAft>
+              <a:buFont typeface="+mj-lt"/>
+              <a:buChar char="•"/>
+            </a:pPr>
+            <a:r>
+              <a:rPr lang="en-US" sz="1400">
                 <a:solidFill>
                   <a:srgbClr val="262626"/>
                 </a:solidFill>
               </a:rPr>
-              <a:t>Our figures: trajectory overlay of all systems, box plots over N runs, results table.</a:t>
-            </a:r>
-            <a:endParaRPr lang="de-DE" sz="1300" b="1" dirty="0">
+              <a:t>SLAM is non-deterministic (threads, GPU)</a:t>
+            </a:r>
+          </a:p>
+          <a:p>
+            <a:pPr marL="177800" indent="-177800" algn="l">
+              <a:spcAft>
+                <a:spcPts val="400"/>
+              </a:spcAft>
+              <a:buFont typeface="+mj-lt"/>
+              <a:buChar char="•"/>
+            </a:pPr>
+            <a:r>
+              <a:rPr lang="en-US" sz="1400">
+                <a:solidFill>
+                  <a:srgbClr val="262626"/>
+                </a:solidFill>
+              </a:rPr>
+              <a:t>Report median and IQR, not a single run</a:t>
+            </a:r>
+            <a:endParaRPr lang="de-DE" sz="1400" dirty="0">
               <a:solidFill>
                 <a:srgbClr val="262626"/>
               </a:solidFill>
@@ -7440,10 +7221,360 @@
           </a:p>
         </p:txBody>
       </p:sp>
+      <p:sp>
+        <p:nvSpPr>
+          <p:cNvPr id="9" name="Textfeld 8">
+            <a:extLst>
+              <a:ext uri="{FF2B5EF4-FFF2-40B4-BE49-F238E27FC236}">
+                <a16:creationId xmlns:a16="http://schemas.microsoft.com/office/drawing/2014/main" id="{A88E260F-8561-DCDF-6563-3B16F4DECA67}"/>
+              </a:ext>
+            </a:extLst>
+          </p:cNvPr>
+          <p:cNvSpPr txBox="1"/>
+          <p:nvPr/>
+        </p:nvSpPr>
+        <p:spPr>
+          <a:xfrm>
+            <a:off x="177800" y="2540000"/>
+            <a:ext cx="4191000" cy="279400"/>
+          </a:xfrm>
+          <a:prstGeom prst="rect">
+            <a:avLst/>
+          </a:prstGeom>
+        </p:spPr>
+        <p:txBody>
+          <a:bodyPr vert="horz" wrap="square" lIns="0" tIns="45720" rIns="0" bIns="45720" rtlCol="0" anchor="t">
+            <a:noAutofit/>
+          </a:bodyPr>
+          <a:lstStyle/>
+          <a:p>
+            <a:pPr algn="l"/>
+            <a:r>
+              <a:rPr lang="de-DE" sz="1600" b="1">
+                <a:solidFill>
+                  <a:srgbClr val="0063A6"/>
+                </a:solidFill>
+              </a:rPr>
+              <a:t>Offline processing</a:t>
+            </a:r>
+            <a:endParaRPr lang="de-DE" sz="1600" b="1" dirty="0">
+              <a:solidFill>
+                <a:srgbClr val="0063A6"/>
+              </a:solidFill>
+            </a:endParaRPr>
+          </a:p>
+        </p:txBody>
+      </p:sp>
+      <p:sp>
+        <p:nvSpPr>
+          <p:cNvPr id="10" name="Textfeld 9">
+            <a:extLst>
+              <a:ext uri="{FF2B5EF4-FFF2-40B4-BE49-F238E27FC236}">
+                <a16:creationId xmlns:a16="http://schemas.microsoft.com/office/drawing/2014/main" id="{E50FD3A8-6CE4-147F-A781-4B7FE8CB22CA}"/>
+              </a:ext>
+            </a:extLst>
+          </p:cNvPr>
+          <p:cNvSpPr txBox="1"/>
+          <p:nvPr/>
+        </p:nvSpPr>
+        <p:spPr>
+          <a:xfrm>
+            <a:off x="177800" y="2895600"/>
+            <a:ext cx="4191000" cy="1524000"/>
+          </a:xfrm>
+          <a:prstGeom prst="rect">
+            <a:avLst/>
+          </a:prstGeom>
+        </p:spPr>
+        <p:txBody>
+          <a:bodyPr vert="horz" wrap="square" lIns="0" tIns="45720" rIns="91440" bIns="45720" rtlCol="0" anchor="t">
+            <a:normAutofit/>
+          </a:bodyPr>
+          <a:lstStyle/>
+          <a:p>
+            <a:pPr marL="177800" indent="-177800" algn="l">
+              <a:spcAft>
+                <a:spcPts val="400"/>
+              </a:spcAft>
+              <a:buFont typeface="+mj-lt"/>
+              <a:buChar char="•"/>
+            </a:pPr>
+            <a:r>
+              <a:rPr lang="en-US" sz="1400">
+                <a:solidFill>
+                  <a:srgbClr val="262626"/>
+                </a:solidFill>
+              </a:rPr>
+              <a:t>Every frame is processed</a:t>
+            </a:r>
+          </a:p>
+          <a:p>
+            <a:pPr marL="177800" indent="-177800" algn="l">
+              <a:spcAft>
+                <a:spcPts val="400"/>
+              </a:spcAft>
+              <a:buFont typeface="+mj-lt"/>
+              <a:buChar char="•"/>
+            </a:pPr>
+            <a:r>
+              <a:rPr lang="en-US" sz="1400">
+                <a:solidFill>
+                  <a:srgbClr val="262626"/>
+                </a:solidFill>
+              </a:rPr>
+              <a:t>Accuracy does not depend on laptop speed</a:t>
+            </a:r>
+            <a:endParaRPr lang="de-DE" sz="1400" dirty="0">
+              <a:solidFill>
+                <a:srgbClr val="262626"/>
+              </a:solidFill>
+            </a:endParaRPr>
+          </a:p>
+        </p:txBody>
+      </p:sp>
+      <p:sp>
+        <p:nvSpPr>
+          <p:cNvPr id="11" name="Textfeld 10">
+            <a:extLst>
+              <a:ext uri="{FF2B5EF4-FFF2-40B4-BE49-F238E27FC236}">
+                <a16:creationId xmlns:a16="http://schemas.microsoft.com/office/drawing/2014/main" id="{D242300A-E088-EA63-7A15-5AE18D924471}"/>
+              </a:ext>
+            </a:extLst>
+          </p:cNvPr>
+          <p:cNvSpPr txBox="1"/>
+          <p:nvPr/>
+        </p:nvSpPr>
+        <p:spPr>
+          <a:xfrm>
+            <a:off x="4775200" y="660400"/>
+            <a:ext cx="4191000" cy="279400"/>
+          </a:xfrm>
+          <a:prstGeom prst="rect">
+            <a:avLst/>
+          </a:prstGeom>
+        </p:spPr>
+        <p:txBody>
+          <a:bodyPr vert="horz" wrap="square" lIns="0" tIns="45720" rIns="0" bIns="45720" rtlCol="0" anchor="t">
+            <a:noAutofit/>
+          </a:bodyPr>
+          <a:lstStyle/>
+          <a:p>
+            <a:pPr algn="l"/>
+            <a:r>
+              <a:rPr lang="de-DE" sz="1600" b="1">
+                <a:solidFill>
+                  <a:srgbClr val="0063A6"/>
+                </a:solidFill>
+              </a:rPr>
+              <a:t>Resources as context only</a:t>
+            </a:r>
+            <a:endParaRPr lang="de-DE" sz="1600" b="1" dirty="0">
+              <a:solidFill>
+                <a:srgbClr val="0063A6"/>
+              </a:solidFill>
+            </a:endParaRPr>
+          </a:p>
+        </p:txBody>
+      </p:sp>
+      <p:sp>
+        <p:nvSpPr>
+          <p:cNvPr id="12" name="Textfeld 11">
+            <a:extLst>
+              <a:ext uri="{FF2B5EF4-FFF2-40B4-BE49-F238E27FC236}">
+                <a16:creationId xmlns:a16="http://schemas.microsoft.com/office/drawing/2014/main" id="{E064193B-17EB-D48B-9FF0-63B2C3D0CAEC}"/>
+              </a:ext>
+            </a:extLst>
+          </p:cNvPr>
+          <p:cNvSpPr txBox="1"/>
+          <p:nvPr/>
+        </p:nvSpPr>
+        <p:spPr>
+          <a:xfrm>
+            <a:off x="4775200" y="1016000"/>
+            <a:ext cx="4191000" cy="1524000"/>
+          </a:xfrm>
+          <a:prstGeom prst="rect">
+            <a:avLst/>
+          </a:prstGeom>
+        </p:spPr>
+        <p:txBody>
+          <a:bodyPr vert="horz" wrap="square" lIns="0" tIns="45720" rIns="91440" bIns="45720" rtlCol="0" anchor="t">
+            <a:normAutofit/>
+          </a:bodyPr>
+          <a:lstStyle/>
+          <a:p>
+            <a:pPr marL="177800" indent="-177800" algn="l">
+              <a:spcAft>
+                <a:spcPts val="400"/>
+              </a:spcAft>
+              <a:buFont typeface="+mj-lt"/>
+              <a:buChar char="•"/>
+            </a:pPr>
+            <a:r>
+              <a:rPr lang="en-US" sz="1400">
+                <a:solidFill>
+                  <a:srgbClr val="262626"/>
+                </a:solidFill>
+              </a:rPr>
+              <a:t>CPU, RAM, GPU memory, runtime</a:t>
+            </a:r>
+          </a:p>
+          <a:p>
+            <a:pPr marL="177800" indent="-177800" algn="l">
+              <a:spcAft>
+                <a:spcPts val="400"/>
+              </a:spcAft>
+              <a:buFont typeface="+mj-lt"/>
+              <a:buChar char="•"/>
+            </a:pPr>
+            <a:r>
+              <a:rPr lang="en-US" sz="1400">
+                <a:solidFill>
+                  <a:srgbClr val="262626"/>
+                </a:solidFill>
+              </a:rPr>
+              <a:t>Always stated together with the hardware</a:t>
+            </a:r>
+          </a:p>
+          <a:p>
+            <a:pPr marL="177800" indent="-177800" algn="l">
+              <a:spcAft>
+                <a:spcPts val="400"/>
+              </a:spcAft>
+              <a:buFont typeface="+mj-lt"/>
+              <a:buChar char="•"/>
+            </a:pPr>
+            <a:r>
+              <a:rPr lang="en-US" sz="1400">
+                <a:solidFill>
+                  <a:srgbClr val="262626"/>
+                </a:solidFill>
+              </a:rPr>
+              <a:t>Not used for ranking</a:t>
+            </a:r>
+            <a:endParaRPr lang="de-DE" sz="1400" dirty="0">
+              <a:solidFill>
+                <a:srgbClr val="262626"/>
+              </a:solidFill>
+            </a:endParaRPr>
+          </a:p>
+        </p:txBody>
+      </p:sp>
+      <p:sp>
+        <p:nvSpPr>
+          <p:cNvPr id="13" name="Textfeld 12">
+            <a:extLst>
+              <a:ext uri="{FF2B5EF4-FFF2-40B4-BE49-F238E27FC236}">
+                <a16:creationId xmlns:a16="http://schemas.microsoft.com/office/drawing/2014/main" id="{4A17E13F-B25D-068B-18EE-54F5456C980E}"/>
+              </a:ext>
+            </a:extLst>
+          </p:cNvPr>
+          <p:cNvSpPr txBox="1"/>
+          <p:nvPr/>
+        </p:nvSpPr>
+        <p:spPr>
+          <a:xfrm>
+            <a:off x="4775200" y="2540000"/>
+            <a:ext cx="4191000" cy="279400"/>
+          </a:xfrm>
+          <a:prstGeom prst="rect">
+            <a:avLst/>
+          </a:prstGeom>
+        </p:spPr>
+        <p:txBody>
+          <a:bodyPr vert="horz" wrap="square" lIns="0" tIns="45720" rIns="0" bIns="45720" rtlCol="0" anchor="t">
+            <a:noAutofit/>
+          </a:bodyPr>
+          <a:lstStyle/>
+          <a:p>
+            <a:pPr algn="l"/>
+            <a:r>
+              <a:rPr lang="de-DE" sz="1600" b="1">
+                <a:solidFill>
+                  <a:srgbClr val="0063A6"/>
+                </a:solidFill>
+              </a:rPr>
+              <a:t>Reproducibility</a:t>
+            </a:r>
+            <a:endParaRPr lang="de-DE" sz="1600" b="1" dirty="0">
+              <a:solidFill>
+                <a:srgbClr val="0063A6"/>
+              </a:solidFill>
+            </a:endParaRPr>
+          </a:p>
+        </p:txBody>
+      </p:sp>
+      <p:sp>
+        <p:nvSpPr>
+          <p:cNvPr id="14" name="Textfeld 13">
+            <a:extLst>
+              <a:ext uri="{FF2B5EF4-FFF2-40B4-BE49-F238E27FC236}">
+                <a16:creationId xmlns:a16="http://schemas.microsoft.com/office/drawing/2014/main" id="{1E34E476-41CD-D9D8-F43F-0854C60C43E5}"/>
+              </a:ext>
+            </a:extLst>
+          </p:cNvPr>
+          <p:cNvSpPr txBox="1"/>
+          <p:nvPr/>
+        </p:nvSpPr>
+        <p:spPr>
+          <a:xfrm>
+            <a:off x="4775200" y="2895600"/>
+            <a:ext cx="4191000" cy="1524000"/>
+          </a:xfrm>
+          <a:prstGeom prst="rect">
+            <a:avLst/>
+          </a:prstGeom>
+        </p:spPr>
+        <p:txBody>
+          <a:bodyPr vert="horz" wrap="square" lIns="0" tIns="45720" rIns="91440" bIns="45720" rtlCol="0" anchor="t">
+            <a:normAutofit/>
+          </a:bodyPr>
+          <a:lstStyle/>
+          <a:p>
+            <a:pPr marL="177800" indent="-177800" algn="l">
+              <a:spcAft>
+                <a:spcPts val="400"/>
+              </a:spcAft>
+              <a:buFont typeface="+mj-lt"/>
+              <a:buChar char="•"/>
+            </a:pPr>
+            <a:r>
+              <a:rPr lang="en-US" sz="1400">
+                <a:solidFill>
+                  <a:srgbClr val="262626"/>
+                </a:solidFill>
+              </a:rPr>
+              <a:t>Versions, parameters, hardware logged per run</a:t>
+            </a:r>
+          </a:p>
+          <a:p>
+            <a:pPr marL="177800" indent="-177800" algn="l">
+              <a:spcAft>
+                <a:spcPts val="400"/>
+              </a:spcAft>
+              <a:buFont typeface="+mj-lt"/>
+              <a:buChar char="•"/>
+            </a:pPr>
+            <a:r>
+              <a:rPr lang="en-US" sz="1400">
+                <a:solidFill>
+                  <a:srgbClr val="262626"/>
+                </a:solidFill>
+              </a:rPr>
+              <a:t>One command recreates all figures</a:t>
+            </a:r>
+            <a:endParaRPr lang="de-DE" sz="1400" dirty="0">
+              <a:solidFill>
+                <a:srgbClr val="262626"/>
+              </a:solidFill>
+            </a:endParaRPr>
+          </a:p>
+        </p:txBody>
+      </p:sp>
     </p:spTree>
     <p:extLst>
       <p:ext uri="{BB962C8B-B14F-4D97-AF65-F5344CB8AC3E}">
-        <p14:creationId xmlns:p14="http://schemas.microsoft.com/office/powerpoint/2010/main" val="2903701705"/>
+        <p14:creationId xmlns:p14="http://schemas.microsoft.com/office/powerpoint/2010/main" val="1181187397"/>
       </p:ext>
     </p:extLst>
   </p:cSld>
@@ -7475,7 +7606,7 @@
           <p:cNvPr id="2" name="Titel 1">
             <a:extLst>
               <a:ext uri="{FF2B5EF4-FFF2-40B4-BE49-F238E27FC236}">
-                <a16:creationId xmlns:a16="http://schemas.microsoft.com/office/drawing/2014/main" id="{F3FF5E83-3C76-F00F-4BCD-7E613C24E293}"/>
+                <a16:creationId xmlns:a16="http://schemas.microsoft.com/office/drawing/2014/main" id="{55D7A47A-8D6B-4563-5DC3-9A42933D2315}"/>
               </a:ext>
             </a:extLst>
           </p:cNvPr>
@@ -7493,17 +7624,17 @@
           <a:p>
             <a:r>
               <a:rPr lang="de-DE"/>
-              <a:t>Evaluation protocol</a:t>
-            </a:r>
-          </a:p>
-        </p:txBody>
-      </p:sp>
-      <p:sp>
-        <p:nvSpPr>
-          <p:cNvPr id="5" name="Fußzeilenplatzhalter 4">
-            <a:extLst>
-              <a:ext uri="{FF2B5EF4-FFF2-40B4-BE49-F238E27FC236}">
-                <a16:creationId xmlns:a16="http://schemas.microsoft.com/office/drawing/2014/main" id="{DE8DC0EA-E60A-CBAC-2866-B6E1385E9CBD}"/>
+              <a:t>Automated evaluation pipeline</a:t>
+            </a:r>
+          </a:p>
+        </p:txBody>
+      </p:sp>
+      <p:sp>
+        <p:nvSpPr>
+          <p:cNvPr id="4" name="Fußzeilenplatzhalter 3">
+            <a:extLst>
+              <a:ext uri="{FF2B5EF4-FFF2-40B4-BE49-F238E27FC236}">
+                <a16:creationId xmlns:a16="http://schemas.microsoft.com/office/drawing/2014/main" id="{3BF7D394-2E89-9DA4-3877-E3393135F5CF}"/>
               </a:ext>
             </a:extLst>
           </p:cNvPr>
@@ -7511,7 +7642,7 @@
             <a:spLocks noGrp="1"/>
           </p:cNvSpPr>
           <p:nvPr>
-            <p:ph type="ftr" sz="quarter" idx="13"/>
+            <p:ph type="ftr" sz="quarter" idx="12"/>
           </p:nvPr>
         </p:nvSpPr>
         <p:spPr/>
@@ -7529,10 +7660,10 @@
       </p:sp>
       <p:sp>
         <p:nvSpPr>
-          <p:cNvPr id="6" name="Foliennummernplatzhalter 5">
-            <a:extLst>
-              <a:ext uri="{FF2B5EF4-FFF2-40B4-BE49-F238E27FC236}">
-                <a16:creationId xmlns:a16="http://schemas.microsoft.com/office/drawing/2014/main" id="{3E147642-B354-FADC-A6BD-4DA4FFBB119E}"/>
+          <p:cNvPr id="5" name="Foliennummernplatzhalter 4">
+            <a:extLst>
+              <a:ext uri="{FF2B5EF4-FFF2-40B4-BE49-F238E27FC236}">
+                <a16:creationId xmlns:a16="http://schemas.microsoft.com/office/drawing/2014/main" id="{4D1D4222-DBD2-4387-F705-ABF6AA5F46EF}"/>
               </a:ext>
             </a:extLst>
           </p:cNvPr>
@@ -7540,7 +7671,7 @@
             <a:spLocks noGrp="1"/>
           </p:cNvSpPr>
           <p:nvPr>
-            <p:ph type="sldNum" sz="quarter" idx="14"/>
+            <p:ph type="sldNum" sz="quarter" idx="13"/>
           </p:nvPr>
         </p:nvSpPr>
         <p:spPr/>
@@ -7559,10 +7690,87 @@
       </p:sp>
       <p:sp>
         <p:nvSpPr>
+          <p:cNvPr id="6" name="Pfeil: Fünfeck 5">
+            <a:extLst>
+              <a:ext uri="{FF2B5EF4-FFF2-40B4-BE49-F238E27FC236}">
+                <a16:creationId xmlns:a16="http://schemas.microsoft.com/office/drawing/2014/main" id="{2D475774-D7CE-D38C-DB76-7D1F13BAE9D9}"/>
+              </a:ext>
+            </a:extLst>
+          </p:cNvPr>
+          <p:cNvSpPr/>
+          <p:nvPr/>
+        </p:nvSpPr>
+        <p:spPr>
+          <a:xfrm>
+            <a:off x="177800" y="1143000"/>
+            <a:ext cx="1625600" cy="762000"/>
+          </a:xfrm>
+          <a:prstGeom prst="homePlate">
+            <a:avLst>
+              <a:gd name="adj" fmla="val 35000"/>
+            </a:avLst>
+          </a:prstGeom>
+          <a:solidFill>
+            <a:srgbClr val="0063A6"/>
+          </a:solidFill>
+          <a:ln w="12700" cap="flat" cmpd="sng" algn="ctr">
+            <a:noFill/>
+            <a:prstDash val="solid"/>
+            <a:miter lim="800000"/>
+          </a:ln>
+          <a:effectLst/>
+          <a:extLst>
+            <a:ext uri="{91240B29-F687-4F45-9708-019B960494DF}">
+              <a14:hiddenLine xmlns:a14="http://schemas.microsoft.com/office/drawing/2010/main" w="12700" cap="flat" cmpd="sng" algn="ctr">
+                <a:solidFill>
+                  <a:schemeClr val="accent1">
+                    <a:shade val="15000"/>
+                  </a:schemeClr>
+                </a:solidFill>
+                <a:prstDash val="solid"/>
+                <a:miter lim="800000"/>
+              </a14:hiddenLine>
+            </a:ext>
+          </a:extLst>
+        </p:spPr>
+        <p:style>
+          <a:lnRef idx="2">
+            <a:schemeClr val="accent1">
+              <a:shade val="15000"/>
+            </a:schemeClr>
+          </a:lnRef>
+          <a:fillRef idx="1">
+            <a:schemeClr val="accent1"/>
+          </a:fillRef>
+          <a:effectRef idx="0">
+            <a:schemeClr val="accent1"/>
+          </a:effectRef>
+          <a:fontRef idx="minor">
+            <a:schemeClr val="lt1"/>
+          </a:fontRef>
+        </p:style>
+        <p:txBody>
+          <a:bodyPr wrap="none" lIns="25400" rIns="25400" rtlCol="0" anchor="ctr"/>
+          <a:lstStyle/>
+          <a:p>
+            <a:pPr algn="ctr"/>
+            <a:r>
+              <a:rPr lang="de-DE" sz="1500" b="1">
+                <a:solidFill>
+                  <a:srgbClr val="FFFFFF"/>
+                </a:solidFill>
+              </a:rPr>
+              <a:t>Data</a:t>
+            </a:r>
+          </a:p>
+        </p:txBody>
+      </p:sp>
+      <p:sp>
+        <p:nvSpPr>
           <p:cNvPr id="7" name="Textfeld 6">
             <a:extLst>
               <a:ext uri="{FF2B5EF4-FFF2-40B4-BE49-F238E27FC236}">
-                <a16:creationId xmlns:a16="http://schemas.microsoft.com/office/drawing/2014/main" id="{A1506000-9800-6FBB-C370-29621AB4B4C7}"/>
+                <a16:creationId xmlns:a16="http://schemas.microsoft.com/office/drawing/2014/main" id="{9B3230E9-88EA-23FF-E136-53E9B4DB0D29}"/>
               </a:ext>
             </a:extLst>
           </p:cNvPr>
@@ -7571,8 +7779,8 @@
         </p:nvSpPr>
         <p:spPr>
           <a:xfrm>
-            <a:off x="177800" y="660400"/>
-            <a:ext cx="4191000" cy="279400"/>
+            <a:off x="177800" y="2057400"/>
+            <a:ext cx="1625600" cy="762000"/>
           </a:xfrm>
           <a:prstGeom prst="rect">
             <a:avLst/>
@@ -7580,22 +7788,22 @@
         </p:spPr>
         <p:txBody>
           <a:bodyPr vert="horz" wrap="square" lIns="0" tIns="45720" rIns="0" bIns="45720" rtlCol="0" anchor="t">
-            <a:noAutofit/>
+            <a:normAutofit/>
           </a:bodyPr>
           <a:lstStyle/>
           <a:p>
             <a:pPr algn="l"/>
             <a:r>
-              <a:rPr lang="de-DE" sz="1600" b="1">
-                <a:solidFill>
-                  <a:srgbClr val="0063A6"/>
+              <a:rPr lang="en-US" sz="1200">
+                <a:solidFill>
+                  <a:srgbClr val="262626"/>
                 </a:solidFill>
               </a:rPr>
-              <a:t>Repeated runs</a:t>
-            </a:r>
-            <a:endParaRPr lang="de-DE" sz="1600" b="1" dirty="0">
+              <a:t>M3DGR sequences, ground truth in TUM format</a:t>
+            </a:r>
+            <a:endParaRPr lang="de-DE" sz="1200" dirty="0">
               <a:solidFill>
-                <a:srgbClr val="0063A6"/>
+                <a:srgbClr val="262626"/>
               </a:solidFill>
             </a:endParaRPr>
           </a:p>
@@ -7603,10 +7811,87 @@
       </p:sp>
       <p:sp>
         <p:nvSpPr>
-          <p:cNvPr id="8" name="Textfeld 7">
-            <a:extLst>
-              <a:ext uri="{FF2B5EF4-FFF2-40B4-BE49-F238E27FC236}">
-                <a16:creationId xmlns:a16="http://schemas.microsoft.com/office/drawing/2014/main" id="{6CA198F4-4EC4-8A98-7A71-C0FB95F6A929}"/>
+          <p:cNvPr id="8" name="Pfeil: Chevron 7">
+            <a:extLst>
+              <a:ext uri="{FF2B5EF4-FFF2-40B4-BE49-F238E27FC236}">
+                <a16:creationId xmlns:a16="http://schemas.microsoft.com/office/drawing/2014/main" id="{AF2CAF76-C8D6-7C35-6410-E7CE20B560F9}"/>
+              </a:ext>
+            </a:extLst>
+          </p:cNvPr>
+          <p:cNvSpPr/>
+          <p:nvPr/>
+        </p:nvSpPr>
+        <p:spPr>
+          <a:xfrm>
+            <a:off x="1965325" y="1143000"/>
+            <a:ext cx="1625600" cy="762000"/>
+          </a:xfrm>
+          <a:prstGeom prst="chevron">
+            <a:avLst>
+              <a:gd name="adj" fmla="val 35000"/>
+            </a:avLst>
+          </a:prstGeom>
+          <a:solidFill>
+            <a:srgbClr val="0063A6"/>
+          </a:solidFill>
+          <a:ln w="12700" cap="flat" cmpd="sng" algn="ctr">
+            <a:noFill/>
+            <a:prstDash val="solid"/>
+            <a:miter lim="800000"/>
+          </a:ln>
+          <a:effectLst/>
+          <a:extLst>
+            <a:ext uri="{91240B29-F687-4F45-9708-019B960494DF}">
+              <a14:hiddenLine xmlns:a14="http://schemas.microsoft.com/office/drawing/2010/main" w="12700" cap="flat" cmpd="sng" algn="ctr">
+                <a:solidFill>
+                  <a:schemeClr val="accent1">
+                    <a:shade val="15000"/>
+                  </a:schemeClr>
+                </a:solidFill>
+                <a:prstDash val="solid"/>
+                <a:miter lim="800000"/>
+              </a14:hiddenLine>
+            </a:ext>
+          </a:extLst>
+        </p:spPr>
+        <p:style>
+          <a:lnRef idx="2">
+            <a:schemeClr val="accent1">
+              <a:shade val="15000"/>
+            </a:schemeClr>
+          </a:lnRef>
+          <a:fillRef idx="1">
+            <a:schemeClr val="accent1"/>
+          </a:fillRef>
+          <a:effectRef idx="0">
+            <a:schemeClr val="accent1"/>
+          </a:effectRef>
+          <a:fontRef idx="minor">
+            <a:schemeClr val="lt1"/>
+          </a:fontRef>
+        </p:style>
+        <p:txBody>
+          <a:bodyPr wrap="none" lIns="25400" rIns="25400" rtlCol="0" anchor="ctr"/>
+          <a:lstStyle/>
+          <a:p>
+            <a:pPr algn="ctr"/>
+            <a:r>
+              <a:rPr lang="de-DE" sz="1500" b="1">
+                <a:solidFill>
+                  <a:srgbClr val="FFFFFF"/>
+                </a:solidFill>
+              </a:rPr>
+              <a:t>Runners</a:t>
+            </a:r>
+          </a:p>
+        </p:txBody>
+      </p:sp>
+      <p:sp>
+        <p:nvSpPr>
+          <p:cNvPr id="9" name="Textfeld 8">
+            <a:extLst>
+              <a:ext uri="{FF2B5EF4-FFF2-40B4-BE49-F238E27FC236}">
+                <a16:creationId xmlns:a16="http://schemas.microsoft.com/office/drawing/2014/main" id="{A6C4075D-4726-02CF-CC43-C609FC942FAC}"/>
               </a:ext>
             </a:extLst>
           </p:cNvPr>
@@ -7615,67 +7900,515 @@
         </p:nvSpPr>
         <p:spPr>
           <a:xfrm>
-            <a:off x="177800" y="1016000"/>
-            <a:ext cx="4191000" cy="1524000"/>
+            <a:off x="1965325" y="2057400"/>
+            <a:ext cx="1625600" cy="762000"/>
           </a:xfrm>
           <a:prstGeom prst="rect">
             <a:avLst/>
           </a:prstGeom>
         </p:spPr>
         <p:txBody>
-          <a:bodyPr vert="horz" wrap="square" lIns="0" tIns="45720" rIns="91440" bIns="45720" rtlCol="0" anchor="t">
+          <a:bodyPr vert="horz" wrap="square" lIns="0" tIns="45720" rIns="0" bIns="45720" rtlCol="0" anchor="t">
             <a:normAutofit/>
           </a:bodyPr>
           <a:lstStyle/>
           <a:p>
-            <a:pPr marL="177800" indent="-177800" algn="l">
-              <a:spcAft>
-                <a:spcPts val="400"/>
-              </a:spcAft>
-              <a:buFont typeface="+mj-lt"/>
-              <a:buChar char="•"/>
-            </a:pPr>
+            <a:pPr algn="l"/>
+            <a:r>
+              <a:rPr lang="en-US" sz="1200">
+                <a:solidFill>
+                  <a:srgbClr val="262626"/>
+                </a:solidFill>
+              </a:rPr>
+              <a:t>one per system, any machine, container or ROS</a:t>
+            </a:r>
+            <a:endParaRPr lang="de-DE" sz="1200" dirty="0">
+              <a:solidFill>
+                <a:srgbClr val="262626"/>
+              </a:solidFill>
+            </a:endParaRPr>
+          </a:p>
+        </p:txBody>
+      </p:sp>
+      <p:sp>
+        <p:nvSpPr>
+          <p:cNvPr id="10" name="Pfeil: Chevron 9">
+            <a:extLst>
+              <a:ext uri="{FF2B5EF4-FFF2-40B4-BE49-F238E27FC236}">
+                <a16:creationId xmlns:a16="http://schemas.microsoft.com/office/drawing/2014/main" id="{087EFFB0-487A-BA23-F64E-49069B086D18}"/>
+              </a:ext>
+            </a:extLst>
+          </p:cNvPr>
+          <p:cNvSpPr/>
+          <p:nvPr/>
+        </p:nvSpPr>
+        <p:spPr>
+          <a:xfrm>
+            <a:off x="3752850" y="1143000"/>
+            <a:ext cx="1625600" cy="762000"/>
+          </a:xfrm>
+          <a:prstGeom prst="chevron">
+            <a:avLst>
+              <a:gd name="adj" fmla="val 35000"/>
+            </a:avLst>
+          </a:prstGeom>
+          <a:solidFill>
+            <a:srgbClr val="0063A6"/>
+          </a:solidFill>
+          <a:ln w="12700" cap="flat" cmpd="sng" algn="ctr">
+            <a:noFill/>
+            <a:prstDash val="solid"/>
+            <a:miter lim="800000"/>
+          </a:ln>
+          <a:effectLst/>
+          <a:extLst>
+            <a:ext uri="{91240B29-F687-4F45-9708-019B960494DF}">
+              <a14:hiddenLine xmlns:a14="http://schemas.microsoft.com/office/drawing/2010/main" w="12700" cap="flat" cmpd="sng" algn="ctr">
+                <a:solidFill>
+                  <a:schemeClr val="accent1">
+                    <a:shade val="15000"/>
+                  </a:schemeClr>
+                </a:solidFill>
+                <a:prstDash val="solid"/>
+                <a:miter lim="800000"/>
+              </a14:hiddenLine>
+            </a:ext>
+          </a:extLst>
+        </p:spPr>
+        <p:style>
+          <a:lnRef idx="2">
+            <a:schemeClr val="accent1">
+              <a:shade val="15000"/>
+            </a:schemeClr>
+          </a:lnRef>
+          <a:fillRef idx="1">
+            <a:schemeClr val="accent1"/>
+          </a:fillRef>
+          <a:effectRef idx="0">
+            <a:schemeClr val="accent1"/>
+          </a:effectRef>
+          <a:fontRef idx="minor">
+            <a:schemeClr val="lt1"/>
+          </a:fontRef>
+        </p:style>
+        <p:txBody>
+          <a:bodyPr wrap="none" lIns="25400" rIns="25400" rtlCol="0" anchor="ctr"/>
+          <a:lstStyle/>
+          <a:p>
+            <a:pPr algn="ctr"/>
+            <a:r>
+              <a:rPr lang="de-DE" sz="1500" b="1">
+                <a:solidFill>
+                  <a:srgbClr val="FFFFFF"/>
+                </a:solidFill>
+              </a:rPr>
+              <a:t>Results</a:t>
+            </a:r>
+          </a:p>
+        </p:txBody>
+      </p:sp>
+      <p:sp>
+        <p:nvSpPr>
+          <p:cNvPr id="11" name="Textfeld 10">
+            <a:extLst>
+              <a:ext uri="{FF2B5EF4-FFF2-40B4-BE49-F238E27FC236}">
+                <a16:creationId xmlns:a16="http://schemas.microsoft.com/office/drawing/2014/main" id="{22A09A64-5C7A-C29C-8DD6-91B177CFE683}"/>
+              </a:ext>
+            </a:extLst>
+          </p:cNvPr>
+          <p:cNvSpPr txBox="1"/>
+          <p:nvPr/>
+        </p:nvSpPr>
+        <p:spPr>
+          <a:xfrm>
+            <a:off x="3752850" y="2057400"/>
+            <a:ext cx="1625600" cy="762000"/>
+          </a:xfrm>
+          <a:prstGeom prst="rect">
+            <a:avLst/>
+          </a:prstGeom>
+        </p:spPr>
+        <p:txBody>
+          <a:bodyPr vert="horz" wrap="square" lIns="0" tIns="45720" rIns="0" bIns="45720" rtlCol="0" anchor="t">
+            <a:normAutofit/>
+          </a:bodyPr>
+          <a:lstStyle/>
+          <a:p>
+            <a:pPr algn="l"/>
+            <a:r>
+              <a:rPr lang="en-US" sz="1200">
+                <a:solidFill>
+                  <a:srgbClr val="262626"/>
+                </a:solidFill>
+              </a:rPr>
+              <a:t>trajectory, map, resources and metadata per run</a:t>
+            </a:r>
+            <a:endParaRPr lang="de-DE" sz="1200" dirty="0">
+              <a:solidFill>
+                <a:srgbClr val="262626"/>
+              </a:solidFill>
+            </a:endParaRPr>
+          </a:p>
+        </p:txBody>
+      </p:sp>
+      <p:sp>
+        <p:nvSpPr>
+          <p:cNvPr id="12" name="Pfeil: Chevron 11">
+            <a:extLst>
+              <a:ext uri="{FF2B5EF4-FFF2-40B4-BE49-F238E27FC236}">
+                <a16:creationId xmlns:a16="http://schemas.microsoft.com/office/drawing/2014/main" id="{B9D01BE6-357D-8C5C-B649-F71B24502D15}"/>
+              </a:ext>
+            </a:extLst>
+          </p:cNvPr>
+          <p:cNvSpPr/>
+          <p:nvPr/>
+        </p:nvSpPr>
+        <p:spPr>
+          <a:xfrm>
+            <a:off x="5540375" y="1143000"/>
+            <a:ext cx="1625600" cy="762000"/>
+          </a:xfrm>
+          <a:prstGeom prst="chevron">
+            <a:avLst>
+              <a:gd name="adj" fmla="val 35000"/>
+            </a:avLst>
+          </a:prstGeom>
+          <a:solidFill>
+            <a:srgbClr val="0063A6"/>
+          </a:solidFill>
+          <a:ln w="12700" cap="flat" cmpd="sng" algn="ctr">
+            <a:noFill/>
+            <a:prstDash val="solid"/>
+            <a:miter lim="800000"/>
+          </a:ln>
+          <a:effectLst/>
+          <a:extLst>
+            <a:ext uri="{91240B29-F687-4F45-9708-019B960494DF}">
+              <a14:hiddenLine xmlns:a14="http://schemas.microsoft.com/office/drawing/2010/main" w="12700" cap="flat" cmpd="sng" algn="ctr">
+                <a:solidFill>
+                  <a:schemeClr val="accent1">
+                    <a:shade val="15000"/>
+                  </a:schemeClr>
+                </a:solidFill>
+                <a:prstDash val="solid"/>
+                <a:miter lim="800000"/>
+              </a14:hiddenLine>
+            </a:ext>
+          </a:extLst>
+        </p:spPr>
+        <p:style>
+          <a:lnRef idx="2">
+            <a:schemeClr val="accent1">
+              <a:shade val="15000"/>
+            </a:schemeClr>
+          </a:lnRef>
+          <a:fillRef idx="1">
+            <a:schemeClr val="accent1"/>
+          </a:fillRef>
+          <a:effectRef idx="0">
+            <a:schemeClr val="accent1"/>
+          </a:effectRef>
+          <a:fontRef idx="minor">
+            <a:schemeClr val="lt1"/>
+          </a:fontRef>
+        </p:style>
+        <p:txBody>
+          <a:bodyPr wrap="none" lIns="25400" rIns="25400" rtlCol="0" anchor="ctr"/>
+          <a:lstStyle/>
+          <a:p>
+            <a:pPr algn="ctr"/>
+            <a:r>
+              <a:rPr lang="de-DE" sz="1500" b="1">
+                <a:solidFill>
+                  <a:srgbClr val="FFFFFF"/>
+                </a:solidFill>
+              </a:rPr>
+              <a:t>Evaluation</a:t>
+            </a:r>
+          </a:p>
+        </p:txBody>
+      </p:sp>
+      <p:sp>
+        <p:nvSpPr>
+          <p:cNvPr id="13" name="Textfeld 12">
+            <a:extLst>
+              <a:ext uri="{FF2B5EF4-FFF2-40B4-BE49-F238E27FC236}">
+                <a16:creationId xmlns:a16="http://schemas.microsoft.com/office/drawing/2014/main" id="{D8AA7EDA-FD20-59E1-F18C-EA86A4C04F69}"/>
+              </a:ext>
+            </a:extLst>
+          </p:cNvPr>
+          <p:cNvSpPr txBox="1"/>
+          <p:nvPr/>
+        </p:nvSpPr>
+        <p:spPr>
+          <a:xfrm>
+            <a:off x="5540375" y="2057400"/>
+            <a:ext cx="1625600" cy="762000"/>
+          </a:xfrm>
+          <a:prstGeom prst="rect">
+            <a:avLst/>
+          </a:prstGeom>
+        </p:spPr>
+        <p:txBody>
+          <a:bodyPr vert="horz" wrap="square" lIns="0" tIns="45720" rIns="0" bIns="45720" rtlCol="0" anchor="t">
+            <a:normAutofit/>
+          </a:bodyPr>
+          <a:lstStyle/>
+          <a:p>
+            <a:pPr algn="l"/>
+            <a:r>
+              <a:rPr lang="en-US" sz="1200">
+                <a:solidFill>
+                  <a:srgbClr val="262626"/>
+                </a:solidFill>
+              </a:rPr>
+              <a:t>evaluate.py with evo: ATE and robustness</a:t>
+            </a:r>
+            <a:endParaRPr lang="de-DE" sz="1200" dirty="0">
+              <a:solidFill>
+                <a:srgbClr val="262626"/>
+              </a:solidFill>
+            </a:endParaRPr>
+          </a:p>
+        </p:txBody>
+      </p:sp>
+      <p:sp>
+        <p:nvSpPr>
+          <p:cNvPr id="14" name="Pfeil: Chevron 13">
+            <a:extLst>
+              <a:ext uri="{FF2B5EF4-FFF2-40B4-BE49-F238E27FC236}">
+                <a16:creationId xmlns:a16="http://schemas.microsoft.com/office/drawing/2014/main" id="{A62B5617-ACB1-1947-4179-714B0A6AACF3}"/>
+              </a:ext>
+            </a:extLst>
+          </p:cNvPr>
+          <p:cNvSpPr/>
+          <p:nvPr/>
+        </p:nvSpPr>
+        <p:spPr>
+          <a:xfrm>
+            <a:off x="7327900" y="1143000"/>
+            <a:ext cx="1625600" cy="762000"/>
+          </a:xfrm>
+          <a:prstGeom prst="chevron">
+            <a:avLst>
+              <a:gd name="adj" fmla="val 35000"/>
+            </a:avLst>
+          </a:prstGeom>
+          <a:solidFill>
+            <a:srgbClr val="0063A6"/>
+          </a:solidFill>
+          <a:ln w="12700" cap="flat" cmpd="sng" algn="ctr">
+            <a:noFill/>
+            <a:prstDash val="solid"/>
+            <a:miter lim="800000"/>
+          </a:ln>
+          <a:effectLst/>
+          <a:extLst>
+            <a:ext uri="{91240B29-F687-4F45-9708-019B960494DF}">
+              <a14:hiddenLine xmlns:a14="http://schemas.microsoft.com/office/drawing/2010/main" w="12700" cap="flat" cmpd="sng" algn="ctr">
+                <a:solidFill>
+                  <a:schemeClr val="accent1">
+                    <a:shade val="15000"/>
+                  </a:schemeClr>
+                </a:solidFill>
+                <a:prstDash val="solid"/>
+                <a:miter lim="800000"/>
+              </a14:hiddenLine>
+            </a:ext>
+          </a:extLst>
+        </p:spPr>
+        <p:style>
+          <a:lnRef idx="2">
+            <a:schemeClr val="accent1">
+              <a:shade val="15000"/>
+            </a:schemeClr>
+          </a:lnRef>
+          <a:fillRef idx="1">
+            <a:schemeClr val="accent1"/>
+          </a:fillRef>
+          <a:effectRef idx="0">
+            <a:schemeClr val="accent1"/>
+          </a:effectRef>
+          <a:fontRef idx="minor">
+            <a:schemeClr val="lt1"/>
+          </a:fontRef>
+        </p:style>
+        <p:txBody>
+          <a:bodyPr wrap="none" lIns="25400" rIns="25400" rtlCol="0" anchor="ctr"/>
+          <a:lstStyle/>
+          <a:p>
+            <a:pPr algn="ctr"/>
+            <a:r>
+              <a:rPr lang="de-DE" sz="1500" b="1">
+                <a:solidFill>
+                  <a:srgbClr val="FFFFFF"/>
+                </a:solidFill>
+              </a:rPr>
+              <a:t>Figures</a:t>
+            </a:r>
+          </a:p>
+        </p:txBody>
+      </p:sp>
+      <p:sp>
+        <p:nvSpPr>
+          <p:cNvPr id="15" name="Textfeld 14">
+            <a:extLst>
+              <a:ext uri="{FF2B5EF4-FFF2-40B4-BE49-F238E27FC236}">
+                <a16:creationId xmlns:a16="http://schemas.microsoft.com/office/drawing/2014/main" id="{F5E1F61A-6427-50BD-83B1-8800CC1359A7}"/>
+              </a:ext>
+            </a:extLst>
+          </p:cNvPr>
+          <p:cNvSpPr txBox="1"/>
+          <p:nvPr/>
+        </p:nvSpPr>
+        <p:spPr>
+          <a:xfrm>
+            <a:off x="7327900" y="2057400"/>
+            <a:ext cx="1625600" cy="762000"/>
+          </a:xfrm>
+          <a:prstGeom prst="rect">
+            <a:avLst/>
+          </a:prstGeom>
+        </p:spPr>
+        <p:txBody>
+          <a:bodyPr vert="horz" wrap="square" lIns="0" tIns="45720" rIns="0" bIns="45720" rtlCol="0" anchor="t">
+            <a:normAutofit/>
+          </a:bodyPr>
+          <a:lstStyle/>
+          <a:p>
+            <a:pPr algn="l"/>
+            <a:r>
+              <a:rPr lang="en-US" sz="1200">
+                <a:solidFill>
+                  <a:srgbClr val="262626"/>
+                </a:solidFill>
+              </a:rPr>
+              <a:t>notebooks create the paper figures and tables</a:t>
+            </a:r>
+            <a:endParaRPr lang="de-DE" sz="1200" dirty="0">
+              <a:solidFill>
+                <a:srgbClr val="262626"/>
+              </a:solidFill>
+            </a:endParaRPr>
+          </a:p>
+        </p:txBody>
+      </p:sp>
+      <p:sp>
+        <p:nvSpPr>
+          <p:cNvPr id="16" name="Rechteck: abgerundete Ecken 15">
+            <a:extLst>
+              <a:ext uri="{FF2B5EF4-FFF2-40B4-BE49-F238E27FC236}">
+                <a16:creationId xmlns:a16="http://schemas.microsoft.com/office/drawing/2014/main" id="{59D61BC5-2B75-571F-8C8D-EDB1B9FE6B3D}"/>
+              </a:ext>
+            </a:extLst>
+          </p:cNvPr>
+          <p:cNvSpPr/>
+          <p:nvPr/>
+        </p:nvSpPr>
+        <p:spPr>
+          <a:xfrm>
+            <a:off x="177800" y="3327400"/>
+            <a:ext cx="8775700" cy="812800"/>
+          </a:xfrm>
+          <a:prstGeom prst="roundRect">
+            <a:avLst>
+              <a:gd name="adj" fmla="val 6000"/>
+            </a:avLst>
+          </a:prstGeom>
+          <a:solidFill>
+            <a:srgbClr val="E6EFF7"/>
+          </a:solidFill>
+          <a:ln w="12700" cap="flat" cmpd="sng" algn="ctr">
+            <a:noFill/>
+            <a:prstDash val="solid"/>
+            <a:miter lim="800000"/>
+          </a:ln>
+          <a:effectLst/>
+          <a:extLst>
+            <a:ext uri="{91240B29-F687-4F45-9708-019B960494DF}">
+              <a14:hiddenLine xmlns:a14="http://schemas.microsoft.com/office/drawing/2010/main" w="12700" cap="flat" cmpd="sng" algn="ctr">
+                <a:solidFill>
+                  <a:schemeClr val="accent1">
+                    <a:shade val="15000"/>
+                  </a:schemeClr>
+                </a:solidFill>
+                <a:prstDash val="solid"/>
+                <a:miter lim="800000"/>
+              </a14:hiddenLine>
+            </a:ext>
+          </a:extLst>
+        </p:spPr>
+        <p:style>
+          <a:lnRef idx="2">
+            <a:schemeClr val="accent1">
+              <a:shade val="15000"/>
+            </a:schemeClr>
+          </a:lnRef>
+          <a:fillRef idx="1">
+            <a:schemeClr val="accent1"/>
+          </a:fillRef>
+          <a:effectRef idx="0">
+            <a:schemeClr val="accent1"/>
+          </a:effectRef>
+          <a:fontRef idx="minor">
+            <a:schemeClr val="lt1"/>
+          </a:fontRef>
+        </p:style>
+        <p:txBody>
+          <a:bodyPr rtlCol="0" anchor="ctr"/>
+          <a:lstStyle/>
+          <a:p>
+            <a:pPr algn="ctr"/>
+            <a:endParaRPr lang="de-DE"/>
+          </a:p>
+        </p:txBody>
+      </p:sp>
+      <p:sp>
+        <p:nvSpPr>
+          <p:cNvPr id="17" name="Textfeld 16">
+            <a:extLst>
+              <a:ext uri="{FF2B5EF4-FFF2-40B4-BE49-F238E27FC236}">
+                <a16:creationId xmlns:a16="http://schemas.microsoft.com/office/drawing/2014/main" id="{2D28BD54-985D-8898-FF22-F63727043031}"/>
+              </a:ext>
+            </a:extLst>
+          </p:cNvPr>
+          <p:cNvSpPr txBox="1"/>
+          <p:nvPr/>
+        </p:nvSpPr>
+        <p:spPr>
+          <a:xfrm>
+            <a:off x="355600" y="3454400"/>
+            <a:ext cx="8420100" cy="635000"/>
+          </a:xfrm>
+          <a:prstGeom prst="rect">
+            <a:avLst/>
+          </a:prstGeom>
+        </p:spPr>
+        <p:txBody>
+          <a:bodyPr vert="horz" wrap="square" lIns="0" tIns="45720" rIns="0" bIns="45720" rtlCol="0" anchor="t">
+            <a:normAutofit/>
+          </a:bodyPr>
+          <a:lstStyle/>
+          <a:p>
+            <a:pPr algn="l"/>
             <a:r>
               <a:rPr lang="en-US" sz="1400">
                 <a:solidFill>
                   <a:srgbClr val="262626"/>
                 </a:solidFill>
               </a:rPr>
-              <a:t>N = 5 runs per system and sequence</a:t>
-            </a:r>
-          </a:p>
-          <a:p>
-            <a:pPr marL="177800" indent="-177800" algn="l">
-              <a:spcAft>
-                <a:spcPts val="400"/>
-              </a:spcAft>
-              <a:buFont typeface="+mj-lt"/>
-              <a:buChar char="•"/>
-            </a:pPr>
+              <a:t>One command reproduces all figures from the raw results.</a:t>
+            </a:r>
+          </a:p>
+          <a:p>
+            <a:pPr algn="l"/>
             <a:r>
               <a:rPr lang="en-US" sz="1400">
                 <a:solidFill>
                   <a:srgbClr val="262626"/>
                 </a:solidFill>
               </a:rPr>
-              <a:t>SLAM is non-deterministic (threads, GPU)</a:t>
-            </a:r>
-          </a:p>
-          <a:p>
-            <a:pPr marL="177800" indent="-177800" algn="l">
-              <a:spcAft>
-                <a:spcPts val="400"/>
-              </a:spcAft>
-              <a:buFont typeface="+mj-lt"/>
-              <a:buChar char="•"/>
-            </a:pPr>
-            <a:r>
-              <a:rPr lang="en-US" sz="1400">
-                <a:solidFill>
-                  <a:srgbClr val="262626"/>
-                </a:solidFill>
-              </a:rPr>
-              <a:t>Report median and IQR, not a single run</a:t>
+              <a:t>Code and results: github.com/eliasbitsch/bEARL</a:t>
             </a:r>
             <a:endParaRPr lang="de-DE" sz="1400" dirty="0">
               <a:solidFill>
@@ -7685,360 +8418,10 @@
           </a:p>
         </p:txBody>
       </p:sp>
-      <p:sp>
-        <p:nvSpPr>
-          <p:cNvPr id="9" name="Textfeld 8">
-            <a:extLst>
-              <a:ext uri="{FF2B5EF4-FFF2-40B4-BE49-F238E27FC236}">
-                <a16:creationId xmlns:a16="http://schemas.microsoft.com/office/drawing/2014/main" id="{C615AF7E-534B-3B2D-20C6-6B187118F080}"/>
-              </a:ext>
-            </a:extLst>
-          </p:cNvPr>
-          <p:cNvSpPr txBox="1"/>
-          <p:nvPr/>
-        </p:nvSpPr>
-        <p:spPr>
-          <a:xfrm>
-            <a:off x="177800" y="2540000"/>
-            <a:ext cx="4191000" cy="279400"/>
-          </a:xfrm>
-          <a:prstGeom prst="rect">
-            <a:avLst/>
-          </a:prstGeom>
-        </p:spPr>
-        <p:txBody>
-          <a:bodyPr vert="horz" wrap="square" lIns="0" tIns="45720" rIns="0" bIns="45720" rtlCol="0" anchor="t">
-            <a:noAutofit/>
-          </a:bodyPr>
-          <a:lstStyle/>
-          <a:p>
-            <a:pPr algn="l"/>
-            <a:r>
-              <a:rPr lang="de-DE" sz="1600" b="1">
-                <a:solidFill>
-                  <a:srgbClr val="0063A6"/>
-                </a:solidFill>
-              </a:rPr>
-              <a:t>Offline processing</a:t>
-            </a:r>
-            <a:endParaRPr lang="de-DE" sz="1600" b="1" dirty="0">
-              <a:solidFill>
-                <a:srgbClr val="0063A6"/>
-              </a:solidFill>
-            </a:endParaRPr>
-          </a:p>
-        </p:txBody>
-      </p:sp>
-      <p:sp>
-        <p:nvSpPr>
-          <p:cNvPr id="10" name="Textfeld 9">
-            <a:extLst>
-              <a:ext uri="{FF2B5EF4-FFF2-40B4-BE49-F238E27FC236}">
-                <a16:creationId xmlns:a16="http://schemas.microsoft.com/office/drawing/2014/main" id="{3AC817C1-25BE-3A7C-B3EA-255649A52946}"/>
-              </a:ext>
-            </a:extLst>
-          </p:cNvPr>
-          <p:cNvSpPr txBox="1"/>
-          <p:nvPr/>
-        </p:nvSpPr>
-        <p:spPr>
-          <a:xfrm>
-            <a:off x="177800" y="2895600"/>
-            <a:ext cx="4191000" cy="1524000"/>
-          </a:xfrm>
-          <a:prstGeom prst="rect">
-            <a:avLst/>
-          </a:prstGeom>
-        </p:spPr>
-        <p:txBody>
-          <a:bodyPr vert="horz" wrap="square" lIns="0" tIns="45720" rIns="91440" bIns="45720" rtlCol="0" anchor="t">
-            <a:normAutofit/>
-          </a:bodyPr>
-          <a:lstStyle/>
-          <a:p>
-            <a:pPr marL="177800" indent="-177800" algn="l">
-              <a:spcAft>
-                <a:spcPts val="400"/>
-              </a:spcAft>
-              <a:buFont typeface="+mj-lt"/>
-              <a:buChar char="•"/>
-            </a:pPr>
-            <a:r>
-              <a:rPr lang="en-US" sz="1400">
-                <a:solidFill>
-                  <a:srgbClr val="262626"/>
-                </a:solidFill>
-              </a:rPr>
-              <a:t>Every frame is processed</a:t>
-            </a:r>
-          </a:p>
-          <a:p>
-            <a:pPr marL="177800" indent="-177800" algn="l">
-              <a:spcAft>
-                <a:spcPts val="400"/>
-              </a:spcAft>
-              <a:buFont typeface="+mj-lt"/>
-              <a:buChar char="•"/>
-            </a:pPr>
-            <a:r>
-              <a:rPr lang="en-US" sz="1400">
-                <a:solidFill>
-                  <a:srgbClr val="262626"/>
-                </a:solidFill>
-              </a:rPr>
-              <a:t>Accuracy does not depend on laptop speed</a:t>
-            </a:r>
-            <a:endParaRPr lang="de-DE" sz="1400" dirty="0">
-              <a:solidFill>
-                <a:srgbClr val="262626"/>
-              </a:solidFill>
-            </a:endParaRPr>
-          </a:p>
-        </p:txBody>
-      </p:sp>
-      <p:sp>
-        <p:nvSpPr>
-          <p:cNvPr id="11" name="Textfeld 10">
-            <a:extLst>
-              <a:ext uri="{FF2B5EF4-FFF2-40B4-BE49-F238E27FC236}">
-                <a16:creationId xmlns:a16="http://schemas.microsoft.com/office/drawing/2014/main" id="{28EFD806-9BB9-1EEC-DD3B-608FDB94E79B}"/>
-              </a:ext>
-            </a:extLst>
-          </p:cNvPr>
-          <p:cNvSpPr txBox="1"/>
-          <p:nvPr/>
-        </p:nvSpPr>
-        <p:spPr>
-          <a:xfrm>
-            <a:off x="4775200" y="660400"/>
-            <a:ext cx="4191000" cy="279400"/>
-          </a:xfrm>
-          <a:prstGeom prst="rect">
-            <a:avLst/>
-          </a:prstGeom>
-        </p:spPr>
-        <p:txBody>
-          <a:bodyPr vert="horz" wrap="square" lIns="0" tIns="45720" rIns="0" bIns="45720" rtlCol="0" anchor="t">
-            <a:noAutofit/>
-          </a:bodyPr>
-          <a:lstStyle/>
-          <a:p>
-            <a:pPr algn="l"/>
-            <a:r>
-              <a:rPr lang="de-DE" sz="1600" b="1">
-                <a:solidFill>
-                  <a:srgbClr val="0063A6"/>
-                </a:solidFill>
-              </a:rPr>
-              <a:t>Resources as context only</a:t>
-            </a:r>
-            <a:endParaRPr lang="de-DE" sz="1600" b="1" dirty="0">
-              <a:solidFill>
-                <a:srgbClr val="0063A6"/>
-              </a:solidFill>
-            </a:endParaRPr>
-          </a:p>
-        </p:txBody>
-      </p:sp>
-      <p:sp>
-        <p:nvSpPr>
-          <p:cNvPr id="12" name="Textfeld 11">
-            <a:extLst>
-              <a:ext uri="{FF2B5EF4-FFF2-40B4-BE49-F238E27FC236}">
-                <a16:creationId xmlns:a16="http://schemas.microsoft.com/office/drawing/2014/main" id="{6928A925-CC77-EB4A-99ED-4420E3EA8E00}"/>
-              </a:ext>
-            </a:extLst>
-          </p:cNvPr>
-          <p:cNvSpPr txBox="1"/>
-          <p:nvPr/>
-        </p:nvSpPr>
-        <p:spPr>
-          <a:xfrm>
-            <a:off x="4775200" y="1016000"/>
-            <a:ext cx="4191000" cy="1524000"/>
-          </a:xfrm>
-          <a:prstGeom prst="rect">
-            <a:avLst/>
-          </a:prstGeom>
-        </p:spPr>
-        <p:txBody>
-          <a:bodyPr vert="horz" wrap="square" lIns="0" tIns="45720" rIns="91440" bIns="45720" rtlCol="0" anchor="t">
-            <a:normAutofit/>
-          </a:bodyPr>
-          <a:lstStyle/>
-          <a:p>
-            <a:pPr marL="177800" indent="-177800" algn="l">
-              <a:spcAft>
-                <a:spcPts val="400"/>
-              </a:spcAft>
-              <a:buFont typeface="+mj-lt"/>
-              <a:buChar char="•"/>
-            </a:pPr>
-            <a:r>
-              <a:rPr lang="en-US" sz="1400">
-                <a:solidFill>
-                  <a:srgbClr val="262626"/>
-                </a:solidFill>
-              </a:rPr>
-              <a:t>CPU, RAM, GPU memory, runtime</a:t>
-            </a:r>
-          </a:p>
-          <a:p>
-            <a:pPr marL="177800" indent="-177800" algn="l">
-              <a:spcAft>
-                <a:spcPts val="400"/>
-              </a:spcAft>
-              <a:buFont typeface="+mj-lt"/>
-              <a:buChar char="•"/>
-            </a:pPr>
-            <a:r>
-              <a:rPr lang="en-US" sz="1400">
-                <a:solidFill>
-                  <a:srgbClr val="262626"/>
-                </a:solidFill>
-              </a:rPr>
-              <a:t>Always stated together with the hardware</a:t>
-            </a:r>
-          </a:p>
-          <a:p>
-            <a:pPr marL="177800" indent="-177800" algn="l">
-              <a:spcAft>
-                <a:spcPts val="400"/>
-              </a:spcAft>
-              <a:buFont typeface="+mj-lt"/>
-              <a:buChar char="•"/>
-            </a:pPr>
-            <a:r>
-              <a:rPr lang="en-US" sz="1400">
-                <a:solidFill>
-                  <a:srgbClr val="262626"/>
-                </a:solidFill>
-              </a:rPr>
-              <a:t>Not used for ranking</a:t>
-            </a:r>
-            <a:endParaRPr lang="de-DE" sz="1400" dirty="0">
-              <a:solidFill>
-                <a:srgbClr val="262626"/>
-              </a:solidFill>
-            </a:endParaRPr>
-          </a:p>
-        </p:txBody>
-      </p:sp>
-      <p:sp>
-        <p:nvSpPr>
-          <p:cNvPr id="13" name="Textfeld 12">
-            <a:extLst>
-              <a:ext uri="{FF2B5EF4-FFF2-40B4-BE49-F238E27FC236}">
-                <a16:creationId xmlns:a16="http://schemas.microsoft.com/office/drawing/2014/main" id="{71B5259B-B4D4-4817-4A77-DB991CDD0DD8}"/>
-              </a:ext>
-            </a:extLst>
-          </p:cNvPr>
-          <p:cNvSpPr txBox="1"/>
-          <p:nvPr/>
-        </p:nvSpPr>
-        <p:spPr>
-          <a:xfrm>
-            <a:off x="4775200" y="2540000"/>
-            <a:ext cx="4191000" cy="279400"/>
-          </a:xfrm>
-          <a:prstGeom prst="rect">
-            <a:avLst/>
-          </a:prstGeom>
-        </p:spPr>
-        <p:txBody>
-          <a:bodyPr vert="horz" wrap="square" lIns="0" tIns="45720" rIns="0" bIns="45720" rtlCol="0" anchor="t">
-            <a:noAutofit/>
-          </a:bodyPr>
-          <a:lstStyle/>
-          <a:p>
-            <a:pPr algn="l"/>
-            <a:r>
-              <a:rPr lang="de-DE" sz="1600" b="1">
-                <a:solidFill>
-                  <a:srgbClr val="0063A6"/>
-                </a:solidFill>
-              </a:rPr>
-              <a:t>Reproducibility</a:t>
-            </a:r>
-            <a:endParaRPr lang="de-DE" sz="1600" b="1" dirty="0">
-              <a:solidFill>
-                <a:srgbClr val="0063A6"/>
-              </a:solidFill>
-            </a:endParaRPr>
-          </a:p>
-        </p:txBody>
-      </p:sp>
-      <p:sp>
-        <p:nvSpPr>
-          <p:cNvPr id="14" name="Textfeld 13">
-            <a:extLst>
-              <a:ext uri="{FF2B5EF4-FFF2-40B4-BE49-F238E27FC236}">
-                <a16:creationId xmlns:a16="http://schemas.microsoft.com/office/drawing/2014/main" id="{20DBD60B-D9AF-6E7D-92A5-B5E401C90E77}"/>
-              </a:ext>
-            </a:extLst>
-          </p:cNvPr>
-          <p:cNvSpPr txBox="1"/>
-          <p:nvPr/>
-        </p:nvSpPr>
-        <p:spPr>
-          <a:xfrm>
-            <a:off x="4775200" y="2895600"/>
-            <a:ext cx="4191000" cy="1524000"/>
-          </a:xfrm>
-          <a:prstGeom prst="rect">
-            <a:avLst/>
-          </a:prstGeom>
-        </p:spPr>
-        <p:txBody>
-          <a:bodyPr vert="horz" wrap="square" lIns="0" tIns="45720" rIns="91440" bIns="45720" rtlCol="0" anchor="t">
-            <a:normAutofit/>
-          </a:bodyPr>
-          <a:lstStyle/>
-          <a:p>
-            <a:pPr marL="177800" indent="-177800" algn="l">
-              <a:spcAft>
-                <a:spcPts val="400"/>
-              </a:spcAft>
-              <a:buFont typeface="+mj-lt"/>
-              <a:buChar char="•"/>
-            </a:pPr>
-            <a:r>
-              <a:rPr lang="en-US" sz="1400">
-                <a:solidFill>
-                  <a:srgbClr val="262626"/>
-                </a:solidFill>
-              </a:rPr>
-              <a:t>Versions, parameters, hardware logged per run</a:t>
-            </a:r>
-          </a:p>
-          <a:p>
-            <a:pPr marL="177800" indent="-177800" algn="l">
-              <a:spcAft>
-                <a:spcPts val="400"/>
-              </a:spcAft>
-              <a:buFont typeface="+mj-lt"/>
-              <a:buChar char="•"/>
-            </a:pPr>
-            <a:r>
-              <a:rPr lang="en-US" sz="1400">
-                <a:solidFill>
-                  <a:srgbClr val="262626"/>
-                </a:solidFill>
-              </a:rPr>
-              <a:t>One command recreates all figures</a:t>
-            </a:r>
-            <a:endParaRPr lang="de-DE" sz="1400" dirty="0">
-              <a:solidFill>
-                <a:srgbClr val="262626"/>
-              </a:solidFill>
-            </a:endParaRPr>
-          </a:p>
-        </p:txBody>
-      </p:sp>
     </p:spTree>
     <p:extLst>
       <p:ext uri="{BB962C8B-B14F-4D97-AF65-F5344CB8AC3E}">
-        <p14:creationId xmlns:p14="http://schemas.microsoft.com/office/powerpoint/2010/main" val="1783137735"/>
+        <p14:creationId xmlns:p14="http://schemas.microsoft.com/office/powerpoint/2010/main" val="652900544"/>
       </p:ext>
     </p:extLst>
   </p:cSld>
@@ -8070,7 +8453,7 @@
           <p:cNvPr id="2" name="Titel 1">
             <a:extLst>
               <a:ext uri="{FF2B5EF4-FFF2-40B4-BE49-F238E27FC236}">
-                <a16:creationId xmlns:a16="http://schemas.microsoft.com/office/drawing/2014/main" id="{344D006E-AD4D-A45F-C58B-E7857E286680}"/>
+                <a16:creationId xmlns:a16="http://schemas.microsoft.com/office/drawing/2014/main" id="{B6ECCF19-1549-29CE-59B7-F447371C612E}"/>
               </a:ext>
             </a:extLst>
           </p:cNvPr>
@@ -8088,17 +8471,17 @@
           <a:p>
             <a:r>
               <a:rPr lang="de-DE"/>
-              <a:t>Automated evaluation pipeline</a:t>
-            </a:r>
-          </a:p>
-        </p:txBody>
-      </p:sp>
-      <p:sp>
-        <p:nvSpPr>
-          <p:cNvPr id="4" name="Fußzeilenplatzhalter 3">
-            <a:extLst>
-              <a:ext uri="{FF2B5EF4-FFF2-40B4-BE49-F238E27FC236}">
-                <a16:creationId xmlns:a16="http://schemas.microsoft.com/office/drawing/2014/main" id="{FCC69D6B-1D4B-9BA9-D23B-E83434095EE0}"/>
+              <a:t>Expected challenges and limitations</a:t>
+            </a:r>
+          </a:p>
+        </p:txBody>
+      </p:sp>
+      <p:sp>
+        <p:nvSpPr>
+          <p:cNvPr id="5" name="Fußzeilenplatzhalter 4">
+            <a:extLst>
+              <a:ext uri="{FF2B5EF4-FFF2-40B4-BE49-F238E27FC236}">
+                <a16:creationId xmlns:a16="http://schemas.microsoft.com/office/drawing/2014/main" id="{C9B592A6-4F51-20B6-A5E4-3B785A0AED9E}"/>
               </a:ext>
             </a:extLst>
           </p:cNvPr>
@@ -8106,7 +8489,7 @@
             <a:spLocks noGrp="1"/>
           </p:cNvSpPr>
           <p:nvPr>
-            <p:ph type="ftr" sz="quarter" idx="12"/>
+            <p:ph type="ftr" sz="quarter" idx="13"/>
           </p:nvPr>
         </p:nvSpPr>
         <p:spPr/>
@@ -8124,10 +8507,10 @@
       </p:sp>
       <p:sp>
         <p:nvSpPr>
-          <p:cNvPr id="5" name="Foliennummernplatzhalter 4">
-            <a:extLst>
-              <a:ext uri="{FF2B5EF4-FFF2-40B4-BE49-F238E27FC236}">
-                <a16:creationId xmlns:a16="http://schemas.microsoft.com/office/drawing/2014/main" id="{7393BAA4-06DB-B1BE-A997-D27735BE09EF}"/>
+          <p:cNvPr id="6" name="Foliennummernplatzhalter 5">
+            <a:extLst>
+              <a:ext uri="{FF2B5EF4-FFF2-40B4-BE49-F238E27FC236}">
+                <a16:creationId xmlns:a16="http://schemas.microsoft.com/office/drawing/2014/main" id="{94761074-92D0-62A6-156C-F9EADDFBEA2D}"/>
               </a:ext>
             </a:extLst>
           </p:cNvPr>
@@ -8135,7 +8518,7 @@
             <a:spLocks noGrp="1"/>
           </p:cNvSpPr>
           <p:nvPr>
-            <p:ph type="sldNum" sz="quarter" idx="13"/>
+            <p:ph type="sldNum" sz="quarter" idx="14"/>
           </p:nvPr>
         </p:nvSpPr>
         <p:spPr/>
@@ -8154,87 +8537,10 @@
       </p:sp>
       <p:sp>
         <p:nvSpPr>
-          <p:cNvPr id="6" name="Pfeil: Fünfeck 5">
-            <a:extLst>
-              <a:ext uri="{FF2B5EF4-FFF2-40B4-BE49-F238E27FC236}">
-                <a16:creationId xmlns:a16="http://schemas.microsoft.com/office/drawing/2014/main" id="{A28AC7DD-3BE6-CFBF-097C-7BDA53183E2B}"/>
-              </a:ext>
-            </a:extLst>
-          </p:cNvPr>
-          <p:cNvSpPr/>
-          <p:nvPr/>
-        </p:nvSpPr>
-        <p:spPr>
-          <a:xfrm>
-            <a:off x="177800" y="1143000"/>
-            <a:ext cx="1625600" cy="762000"/>
-          </a:xfrm>
-          <a:prstGeom prst="homePlate">
-            <a:avLst>
-              <a:gd name="adj" fmla="val 35000"/>
-            </a:avLst>
-          </a:prstGeom>
-          <a:solidFill>
-            <a:srgbClr val="0063A6"/>
-          </a:solidFill>
-          <a:ln w="12700" cap="flat" cmpd="sng" algn="ctr">
-            <a:noFill/>
-            <a:prstDash val="solid"/>
-            <a:miter lim="800000"/>
-          </a:ln>
-          <a:effectLst/>
-          <a:extLst>
-            <a:ext uri="{91240B29-F687-4F45-9708-019B960494DF}">
-              <a14:hiddenLine xmlns:a14="http://schemas.microsoft.com/office/drawing/2010/main" w="12700" cap="flat" cmpd="sng" algn="ctr">
-                <a:solidFill>
-                  <a:schemeClr val="accent1">
-                    <a:shade val="15000"/>
-                  </a:schemeClr>
-                </a:solidFill>
-                <a:prstDash val="solid"/>
-                <a:miter lim="800000"/>
-              </a14:hiddenLine>
-            </a:ext>
-          </a:extLst>
-        </p:spPr>
-        <p:style>
-          <a:lnRef idx="2">
-            <a:schemeClr val="accent1">
-              <a:shade val="15000"/>
-            </a:schemeClr>
-          </a:lnRef>
-          <a:fillRef idx="1">
-            <a:schemeClr val="accent1"/>
-          </a:fillRef>
-          <a:effectRef idx="0">
-            <a:schemeClr val="accent1"/>
-          </a:effectRef>
-          <a:fontRef idx="minor">
-            <a:schemeClr val="lt1"/>
-          </a:fontRef>
-        </p:style>
-        <p:txBody>
-          <a:bodyPr wrap="none" lIns="25400" rIns="25400" rtlCol="0" anchor="ctr"/>
-          <a:lstStyle/>
-          <a:p>
-            <a:pPr algn="ctr"/>
-            <a:r>
-              <a:rPr lang="de-DE" sz="1500" b="1">
-                <a:solidFill>
-                  <a:srgbClr val="FFFFFF"/>
-                </a:solidFill>
-              </a:rPr>
-              <a:t>Data</a:t>
-            </a:r>
-          </a:p>
-        </p:txBody>
-      </p:sp>
-      <p:sp>
-        <p:nvSpPr>
           <p:cNvPr id="7" name="Textfeld 6">
             <a:extLst>
               <a:ext uri="{FF2B5EF4-FFF2-40B4-BE49-F238E27FC236}">
-                <a16:creationId xmlns:a16="http://schemas.microsoft.com/office/drawing/2014/main" id="{6076D5C9-29D8-B695-925E-748F89405527}"/>
+                <a16:creationId xmlns:a16="http://schemas.microsoft.com/office/drawing/2014/main" id="{3F5C9B2E-425C-6991-07CE-D671C5D5AD22}"/>
               </a:ext>
             </a:extLst>
           </p:cNvPr>
@@ -8243,8 +8549,8 @@
         </p:nvSpPr>
         <p:spPr>
           <a:xfrm>
-            <a:off x="177800" y="2057400"/>
-            <a:ext cx="1625600" cy="762000"/>
+            <a:off x="177800" y="660400"/>
+            <a:ext cx="4191000" cy="279400"/>
           </a:xfrm>
           <a:prstGeom prst="rect">
             <a:avLst/>
@@ -8252,20 +8558,138 @@
         </p:spPr>
         <p:txBody>
           <a:bodyPr vert="horz" wrap="square" lIns="0" tIns="45720" rIns="0" bIns="45720" rtlCol="0" anchor="t">
+            <a:noAutofit/>
+          </a:bodyPr>
+          <a:lstStyle/>
+          <a:p>
+            <a:pPr algn="l"/>
+            <a:r>
+              <a:rPr lang="en-US" sz="1600" b="1">
+                <a:solidFill>
+                  <a:srgbClr val="0063A6"/>
+                </a:solidFill>
+              </a:rPr>
+              <a:t>Failure modes predicted by theory</a:t>
+            </a:r>
+            <a:endParaRPr lang="de-DE" sz="1600" b="1" dirty="0">
+              <a:solidFill>
+                <a:srgbClr val="0063A6"/>
+              </a:solidFill>
+            </a:endParaRPr>
+          </a:p>
+        </p:txBody>
+      </p:sp>
+      <p:sp>
+        <p:nvSpPr>
+          <p:cNvPr id="8" name="Textfeld 7">
+            <a:extLst>
+              <a:ext uri="{FF2B5EF4-FFF2-40B4-BE49-F238E27FC236}">
+                <a16:creationId xmlns:a16="http://schemas.microsoft.com/office/drawing/2014/main" id="{FFD57014-85F2-145C-4789-6780B5B05418}"/>
+              </a:ext>
+            </a:extLst>
+          </p:cNvPr>
+          <p:cNvSpPr txBox="1"/>
+          <p:nvPr/>
+        </p:nvSpPr>
+        <p:spPr>
+          <a:xfrm>
+            <a:off x="177800" y="1016000"/>
+            <a:ext cx="4191000" cy="2286000"/>
+          </a:xfrm>
+          <a:prstGeom prst="rect">
+            <a:avLst/>
+          </a:prstGeom>
+        </p:spPr>
+        <p:txBody>
+          <a:bodyPr vert="horz" wrap="square" lIns="0" tIns="45720" rIns="91440" bIns="45720" rtlCol="0" anchor="t">
             <a:normAutofit/>
           </a:bodyPr>
           <a:lstStyle/>
           <a:p>
-            <a:pPr algn="l"/>
-            <a:r>
-              <a:rPr lang="en-US" sz="1200">
+            <a:pPr marL="177800" indent="-177800" algn="l">
+              <a:spcAft>
+                <a:spcPts val="400"/>
+              </a:spcAft>
+              <a:buFont typeface="+mj-lt"/>
+              <a:buChar char="•"/>
+            </a:pPr>
+            <a:r>
+              <a:rPr lang="de-DE" sz="1400">
                 <a:solidFill>
                   <a:srgbClr val="262626"/>
                 </a:solidFill>
               </a:rPr>
-              <a:t>M3DGR sequences, ground truth in TUM format</a:t>
-            </a:r>
-            <a:endParaRPr lang="de-DE" sz="1200" dirty="0">
+              <a:t>Camera: needs light and texture (Dark03)</a:t>
+            </a:r>
+          </a:p>
+          <a:p>
+            <a:pPr marL="177800" indent="-177800" algn="l">
+              <a:spcAft>
+                <a:spcPts val="400"/>
+              </a:spcAft>
+              <a:buFont typeface="+mj-lt"/>
+              <a:buChar char="•"/>
+            </a:pPr>
+            <a:r>
+              <a:rPr lang="de-DE" sz="1400">
+                <a:solidFill>
+                  <a:srgbClr val="262626"/>
+                </a:solidFill>
+              </a:rPr>
+              <a:t>Monocular: metric scale is unobservable</a:t>
+            </a:r>
+          </a:p>
+          <a:p>
+            <a:pPr marL="177800" indent="-177800" algn="l">
+              <a:spcAft>
+                <a:spcPts val="400"/>
+              </a:spcAft>
+              <a:buFont typeface="+mj-lt"/>
+              <a:buChar char="•"/>
+            </a:pPr>
+            <a:r>
+              <a:rPr lang="de-DE" sz="1400">
+                <a:solidFill>
+                  <a:srgbClr val="262626"/>
+                </a:solidFill>
+              </a:rPr>
+              <a:t>LiDAR: degenerates in featureless geometry</a:t>
+            </a:r>
+          </a:p>
+          <a:p>
+            <a:pPr marL="177800" indent="-177800" algn="l">
+              <a:spcAft>
+                <a:spcPts val="400"/>
+              </a:spcAft>
+              <a:buFont typeface="+mj-lt"/>
+              <a:buChar char="•"/>
+            </a:pPr>
+            <a:r>
+              <a:rPr lang="de-DE" sz="1400">
+                <a:solidFill>
+                  <a:srgbClr val="262626"/>
+                </a:solidFill>
+              </a:rPr>
+              <a:t>Wheel odometry: assumes no wheel slip</a:t>
+            </a:r>
+          </a:p>
+          <a:p>
+            <a:pPr marL="177800" indent="-177800" algn="l">
+              <a:spcAft>
+                <a:spcPts val="400"/>
+              </a:spcAft>
+              <a:buFont typeface="+mj-lt"/>
+              <a:buChar char="•"/>
+            </a:pPr>
+            <a:r>
+              <a:rPr lang="de-DE" sz="1400">
+                <a:solidFill>
+                  <a:srgbClr val="262626"/>
+                </a:solidFill>
+              </a:rPr>
+              <a:t>No loop closure: drift accumulates</a:t>
+            </a:r>
+            <a:endParaRPr lang="de-DE" sz="1400" dirty="0">
               <a:solidFill>
                 <a:srgbClr val="262626"/>
               </a:solidFill>
@@ -8273,104 +8697,63 @@
           </a:p>
         </p:txBody>
       </p:sp>
-      <p:sp>
-        <p:nvSpPr>
-          <p:cNvPr id="8" name="Pfeil: Chevron 7">
-            <a:extLst>
-              <a:ext uri="{FF2B5EF4-FFF2-40B4-BE49-F238E27FC236}">
-                <a16:creationId xmlns:a16="http://schemas.microsoft.com/office/drawing/2014/main" id="{34DE7EB2-D2D4-F1F0-630B-61AC86C1633A}"/>
-              </a:ext>
-            </a:extLst>
-          </p:cNvPr>
-          <p:cNvSpPr/>
+      <p:pic>
+        <p:nvPicPr>
+          <p:cNvPr id="10" name="Grafik 9" descr="Long featureless corridor from M3DGR">
+            <a:extLst>
+              <a:ext uri="{FF2B5EF4-FFF2-40B4-BE49-F238E27FC236}">
+                <a16:creationId xmlns:a16="http://schemas.microsoft.com/office/drawing/2014/main" id="{D782E505-EED8-6239-78AA-F68CF755A5A0}"/>
+              </a:ext>
+            </a:extLst>
+          </p:cNvPr>
+          <p:cNvPicPr>
+            <a:picLocks noChangeAspect="1"/>
+          </p:cNvPicPr>
           <p:nvPr/>
-        </p:nvSpPr>
-        <p:spPr>
-          <a:xfrm>
-            <a:off x="1965325" y="1143000"/>
-            <a:ext cx="1625600" cy="762000"/>
-          </a:xfrm>
-          <a:prstGeom prst="chevron">
-            <a:avLst>
-              <a:gd name="adj" fmla="val 35000"/>
-            </a:avLst>
-          </a:prstGeom>
-          <a:solidFill>
-            <a:srgbClr val="0063A6"/>
-          </a:solidFill>
-          <a:ln w="12700" cap="flat" cmpd="sng" algn="ctr">
-            <a:noFill/>
-            <a:prstDash val="solid"/>
-            <a:miter lim="800000"/>
-          </a:ln>
-          <a:effectLst/>
-          <a:extLst>
-            <a:ext uri="{91240B29-F687-4F45-9708-019B960494DF}">
-              <a14:hiddenLine xmlns:a14="http://schemas.microsoft.com/office/drawing/2010/main" w="12700" cap="flat" cmpd="sng" algn="ctr">
-                <a:solidFill>
-                  <a:schemeClr val="accent1">
-                    <a:shade val="15000"/>
-                  </a:schemeClr>
-                </a:solidFill>
-                <a:prstDash val="solid"/>
-                <a:miter lim="800000"/>
-              </a14:hiddenLine>
-            </a:ext>
-          </a:extLst>
-        </p:spPr>
-        <p:style>
-          <a:lnRef idx="2">
-            <a:schemeClr val="accent1">
-              <a:shade val="15000"/>
-            </a:schemeClr>
-          </a:lnRef>
-          <a:fillRef idx="1">
-            <a:schemeClr val="accent1"/>
-          </a:fillRef>
-          <a:effectRef idx="0">
-            <a:schemeClr val="accent1"/>
-          </a:effectRef>
-          <a:fontRef idx="minor">
-            <a:schemeClr val="lt1"/>
-          </a:fontRef>
-        </p:style>
-        <p:txBody>
-          <a:bodyPr wrap="none" lIns="25400" rIns="25400" rtlCol="0" anchor="ctr"/>
-          <a:lstStyle/>
-          <a:p>
-            <a:pPr algn="ctr"/>
-            <a:r>
-              <a:rPr lang="de-DE" sz="1500" b="1">
-                <a:solidFill>
-                  <a:srgbClr val="FFFFFF"/>
-                </a:solidFill>
-              </a:rPr>
-              <a:t>Runners</a:t>
-            </a:r>
-          </a:p>
-        </p:txBody>
-      </p:sp>
-      <p:sp>
-        <p:nvSpPr>
-          <p:cNvPr id="9" name="Textfeld 8">
-            <a:extLst>
-              <a:ext uri="{FF2B5EF4-FFF2-40B4-BE49-F238E27FC236}">
-                <a16:creationId xmlns:a16="http://schemas.microsoft.com/office/drawing/2014/main" id="{6759F4BE-5C2F-6760-FB92-60D1B92AE454}"/>
-              </a:ext>
-            </a:extLst>
-          </p:cNvPr>
-          <p:cNvSpPr txBox="1"/>
-          <p:nvPr/>
-        </p:nvSpPr>
-        <p:spPr>
-          <a:xfrm>
-            <a:off x="1965325" y="2057400"/>
-            <a:ext cx="1625600" cy="762000"/>
+        </p:nvPicPr>
+        <p:blipFill>
+          <a:blip r:embed="rId3" cstate="print">
+            <a:extLst>
+              <a:ext uri="{28A0092B-C50C-407E-A947-70E740481C1C}">
+                <a14:useLocalDpi xmlns:a14="http://schemas.microsoft.com/office/drawing/2010/main" val="0"/>
+              </a:ext>
+            </a:extLst>
+          </a:blip>
+          <a:stretch>
+            <a:fillRect/>
+          </a:stretch>
+        </p:blipFill>
+        <p:spPr>
+          <a:xfrm>
+            <a:off x="4962939" y="660400"/>
+            <a:ext cx="1656522" cy="1905000"/>
           </a:xfrm>
           <a:prstGeom prst="rect">
             <a:avLst/>
           </a:prstGeom>
         </p:spPr>
+      </p:pic>
+      <p:sp>
+        <p:nvSpPr>
+          <p:cNvPr id="11" name="Textfeld 10">
+            <a:extLst>
+              <a:ext uri="{FF2B5EF4-FFF2-40B4-BE49-F238E27FC236}">
+                <a16:creationId xmlns:a16="http://schemas.microsoft.com/office/drawing/2014/main" id="{ACDF5D6B-0873-6427-649E-600E1C4B16F4}"/>
+              </a:ext>
+            </a:extLst>
+          </p:cNvPr>
+          <p:cNvSpPr txBox="1"/>
+          <p:nvPr/>
+        </p:nvSpPr>
+        <p:spPr>
+          <a:xfrm>
+            <a:off x="4775200" y="2590800"/>
+            <a:ext cx="2032000" cy="381000"/>
+          </a:xfrm>
+          <a:prstGeom prst="rect">
+            <a:avLst/>
+          </a:prstGeom>
+        </p:spPr>
         <p:txBody>
           <a:bodyPr vert="horz" wrap="square" lIns="0" tIns="45720" rIns="0" bIns="45720" rtlCol="0" anchor="t">
             <a:normAutofit/>
@@ -8379,225 +8762,63 @@
           <a:p>
             <a:pPr algn="l"/>
             <a:r>
-              <a:rPr lang="en-US" sz="1200">
-                <a:solidFill>
-                  <a:srgbClr val="262626"/>
+              <a:rPr lang="en-US" sz="1100">
+                <a:solidFill>
+                  <a:srgbClr val="595959"/>
                 </a:solidFill>
               </a:rPr>
-              <a:t>one per system, any machine, container or ROS</a:t>
-            </a:r>
-            <a:endParaRPr lang="de-DE" sz="1200" dirty="0">
+              <a:t>Long corridor: hard for LiDAR</a:t>
+            </a:r>
+            <a:endParaRPr lang="de-DE" sz="1100" dirty="0">
               <a:solidFill>
-                <a:srgbClr val="262626"/>
+                <a:srgbClr val="595959"/>
               </a:solidFill>
             </a:endParaRPr>
           </a:p>
         </p:txBody>
       </p:sp>
-      <p:sp>
-        <p:nvSpPr>
-          <p:cNvPr id="10" name="Pfeil: Chevron 9">
-            <a:extLst>
-              <a:ext uri="{FF2B5EF4-FFF2-40B4-BE49-F238E27FC236}">
-                <a16:creationId xmlns:a16="http://schemas.microsoft.com/office/drawing/2014/main" id="{EAFE7CDB-9FEE-3AFF-8C73-2DD66399C2F1}"/>
-              </a:ext>
-            </a:extLst>
-          </p:cNvPr>
-          <p:cNvSpPr/>
+      <p:pic>
+        <p:nvPicPr>
+          <p:cNvPr id="13" name="Grafik 12" descr="Scene with strong backlight from M3DGR">
+            <a:extLst>
+              <a:ext uri="{FF2B5EF4-FFF2-40B4-BE49-F238E27FC236}">
+                <a16:creationId xmlns:a16="http://schemas.microsoft.com/office/drawing/2014/main" id="{01067E37-C0A5-19DE-43BF-2BD6678F1A0C}"/>
+              </a:ext>
+            </a:extLst>
+          </p:cNvPr>
+          <p:cNvPicPr>
+            <a:picLocks noChangeAspect="1"/>
+          </p:cNvPicPr>
           <p:nvPr/>
-        </p:nvSpPr>
-        <p:spPr>
-          <a:xfrm>
-            <a:off x="3752850" y="1143000"/>
-            <a:ext cx="1625600" cy="762000"/>
-          </a:xfrm>
-          <a:prstGeom prst="chevron">
-            <a:avLst>
-              <a:gd name="adj" fmla="val 35000"/>
-            </a:avLst>
-          </a:prstGeom>
-          <a:solidFill>
-            <a:srgbClr val="0063A6"/>
-          </a:solidFill>
-          <a:ln w="12700" cap="flat" cmpd="sng" algn="ctr">
-            <a:noFill/>
-            <a:prstDash val="solid"/>
-            <a:miter lim="800000"/>
-          </a:ln>
-          <a:effectLst/>
-          <a:extLst>
-            <a:ext uri="{91240B29-F687-4F45-9708-019B960494DF}">
-              <a14:hiddenLine xmlns:a14="http://schemas.microsoft.com/office/drawing/2010/main" w="12700" cap="flat" cmpd="sng" algn="ctr">
-                <a:solidFill>
-                  <a:schemeClr val="accent1">
-                    <a:shade val="15000"/>
-                  </a:schemeClr>
-                </a:solidFill>
-                <a:prstDash val="solid"/>
-                <a:miter lim="800000"/>
-              </a14:hiddenLine>
-            </a:ext>
-          </a:extLst>
-        </p:spPr>
-        <p:style>
-          <a:lnRef idx="2">
-            <a:schemeClr val="accent1">
-              <a:shade val="15000"/>
-            </a:schemeClr>
-          </a:lnRef>
-          <a:fillRef idx="1">
-            <a:schemeClr val="accent1"/>
-          </a:fillRef>
-          <a:effectRef idx="0">
-            <a:schemeClr val="accent1"/>
-          </a:effectRef>
-          <a:fontRef idx="minor">
-            <a:schemeClr val="lt1"/>
-          </a:fontRef>
-        </p:style>
-        <p:txBody>
-          <a:bodyPr wrap="none" lIns="25400" rIns="25400" rtlCol="0" anchor="ctr"/>
-          <a:lstStyle/>
-          <a:p>
-            <a:pPr algn="ctr"/>
-            <a:r>
-              <a:rPr lang="de-DE" sz="1500" b="1">
-                <a:solidFill>
-                  <a:srgbClr val="FFFFFF"/>
-                </a:solidFill>
-              </a:rPr>
-              <a:t>Results</a:t>
-            </a:r>
-          </a:p>
-        </p:txBody>
-      </p:sp>
-      <p:sp>
-        <p:nvSpPr>
-          <p:cNvPr id="11" name="Textfeld 10">
-            <a:extLst>
-              <a:ext uri="{FF2B5EF4-FFF2-40B4-BE49-F238E27FC236}">
-                <a16:creationId xmlns:a16="http://schemas.microsoft.com/office/drawing/2014/main" id="{DFF19B7A-3611-05ED-718E-4E1E5B065694}"/>
-              </a:ext>
-            </a:extLst>
-          </p:cNvPr>
-          <p:cNvSpPr txBox="1"/>
-          <p:nvPr/>
-        </p:nvSpPr>
-        <p:spPr>
-          <a:xfrm>
-            <a:off x="3752850" y="2057400"/>
-            <a:ext cx="1625600" cy="762000"/>
+        </p:nvPicPr>
+        <p:blipFill>
+          <a:blip r:embed="rId4" cstate="print">
+            <a:extLst>
+              <a:ext uri="{28A0092B-C50C-407E-A947-70E740481C1C}">
+                <a14:useLocalDpi xmlns:a14="http://schemas.microsoft.com/office/drawing/2010/main" val="0"/>
+              </a:ext>
+            </a:extLst>
+          </a:blip>
+          <a:stretch>
+            <a:fillRect/>
+          </a:stretch>
+        </p:blipFill>
+        <p:spPr>
+          <a:xfrm>
+            <a:off x="6934200" y="850900"/>
+            <a:ext cx="2032000" cy="1524000"/>
           </a:xfrm>
           <a:prstGeom prst="rect">
             <a:avLst/>
           </a:prstGeom>
         </p:spPr>
-        <p:txBody>
-          <a:bodyPr vert="horz" wrap="square" lIns="0" tIns="45720" rIns="0" bIns="45720" rtlCol="0" anchor="t">
-            <a:normAutofit/>
-          </a:bodyPr>
-          <a:lstStyle/>
-          <a:p>
-            <a:pPr algn="l"/>
-            <a:r>
-              <a:rPr lang="en-US" sz="1200">
-                <a:solidFill>
-                  <a:srgbClr val="262626"/>
-                </a:solidFill>
-              </a:rPr>
-              <a:t>trajectory, map, resources and metadata per run</a:t>
-            </a:r>
-            <a:endParaRPr lang="de-DE" sz="1200" dirty="0">
-              <a:solidFill>
-                <a:srgbClr val="262626"/>
-              </a:solidFill>
-            </a:endParaRPr>
-          </a:p>
-        </p:txBody>
-      </p:sp>
-      <p:sp>
-        <p:nvSpPr>
-          <p:cNvPr id="12" name="Pfeil: Chevron 11">
-            <a:extLst>
-              <a:ext uri="{FF2B5EF4-FFF2-40B4-BE49-F238E27FC236}">
-                <a16:creationId xmlns:a16="http://schemas.microsoft.com/office/drawing/2014/main" id="{2A55E6BD-1FDA-DEBF-A183-40E44282C2FB}"/>
-              </a:ext>
-            </a:extLst>
-          </p:cNvPr>
-          <p:cNvSpPr/>
-          <p:nvPr/>
-        </p:nvSpPr>
-        <p:spPr>
-          <a:xfrm>
-            <a:off x="5540375" y="1143000"/>
-            <a:ext cx="1625600" cy="762000"/>
-          </a:xfrm>
-          <a:prstGeom prst="chevron">
-            <a:avLst>
-              <a:gd name="adj" fmla="val 35000"/>
-            </a:avLst>
-          </a:prstGeom>
-          <a:solidFill>
-            <a:srgbClr val="0063A6"/>
-          </a:solidFill>
-          <a:ln w="12700" cap="flat" cmpd="sng" algn="ctr">
-            <a:noFill/>
-            <a:prstDash val="solid"/>
-            <a:miter lim="800000"/>
-          </a:ln>
-          <a:effectLst/>
-          <a:extLst>
-            <a:ext uri="{91240B29-F687-4F45-9708-019B960494DF}">
-              <a14:hiddenLine xmlns:a14="http://schemas.microsoft.com/office/drawing/2010/main" w="12700" cap="flat" cmpd="sng" algn="ctr">
-                <a:solidFill>
-                  <a:schemeClr val="accent1">
-                    <a:shade val="15000"/>
-                  </a:schemeClr>
-                </a:solidFill>
-                <a:prstDash val="solid"/>
-                <a:miter lim="800000"/>
-              </a14:hiddenLine>
-            </a:ext>
-          </a:extLst>
-        </p:spPr>
-        <p:style>
-          <a:lnRef idx="2">
-            <a:schemeClr val="accent1">
-              <a:shade val="15000"/>
-            </a:schemeClr>
-          </a:lnRef>
-          <a:fillRef idx="1">
-            <a:schemeClr val="accent1"/>
-          </a:fillRef>
-          <a:effectRef idx="0">
-            <a:schemeClr val="accent1"/>
-          </a:effectRef>
-          <a:fontRef idx="minor">
-            <a:schemeClr val="lt1"/>
-          </a:fontRef>
-        </p:style>
-        <p:txBody>
-          <a:bodyPr wrap="none" lIns="25400" rIns="25400" rtlCol="0" anchor="ctr"/>
-          <a:lstStyle/>
-          <a:p>
-            <a:pPr algn="ctr"/>
-            <a:r>
-              <a:rPr lang="de-DE" sz="1500" b="1">
-                <a:solidFill>
-                  <a:srgbClr val="FFFFFF"/>
-                </a:solidFill>
-              </a:rPr>
-              <a:t>Evaluation</a:t>
-            </a:r>
-          </a:p>
-        </p:txBody>
-      </p:sp>
-      <p:sp>
-        <p:nvSpPr>
-          <p:cNvPr id="13" name="Textfeld 12">
-            <a:extLst>
-              <a:ext uri="{FF2B5EF4-FFF2-40B4-BE49-F238E27FC236}">
-                <a16:creationId xmlns:a16="http://schemas.microsoft.com/office/drawing/2014/main" id="{E78CEEEB-7A0B-249A-E214-C99403A9C6BC}"/>
+      </p:pic>
+      <p:sp>
+        <p:nvSpPr>
+          <p:cNvPr id="14" name="Textfeld 13">
+            <a:extLst>
+              <a:ext uri="{FF2B5EF4-FFF2-40B4-BE49-F238E27FC236}">
+                <a16:creationId xmlns:a16="http://schemas.microsoft.com/office/drawing/2014/main" id="{2CFD7B86-0CE3-0001-C895-881F76D55E15}"/>
               </a:ext>
             </a:extLst>
           </p:cNvPr>
@@ -8606,8 +8827,8 @@
         </p:nvSpPr>
         <p:spPr>
           <a:xfrm>
-            <a:off x="5540375" y="2057400"/>
-            <a:ext cx="1625600" cy="762000"/>
+            <a:off x="6934200" y="2590800"/>
+            <a:ext cx="2032000" cy="381000"/>
           </a:xfrm>
           <a:prstGeom prst="rect">
             <a:avLst/>
@@ -8615,22 +8836,22 @@
         </p:spPr>
         <p:txBody>
           <a:bodyPr vert="horz" wrap="square" lIns="0" tIns="45720" rIns="0" bIns="45720" rtlCol="0" anchor="t">
-            <a:normAutofit/>
+            <a:noAutofit/>
           </a:bodyPr>
           <a:lstStyle/>
           <a:p>
             <a:pPr algn="l"/>
             <a:r>
-              <a:rPr lang="en-US" sz="1200">
-                <a:solidFill>
-                  <a:srgbClr val="262626"/>
+              <a:rPr lang="en-US" sz="1100">
+                <a:solidFill>
+                  <a:srgbClr val="595959"/>
                 </a:solidFill>
               </a:rPr>
-              <a:t>evaluate.py with evo: ATE, RPE, robustness</a:t>
-            </a:r>
-            <a:endParaRPr lang="de-DE" sz="1200" dirty="0">
+              <a:t>Strong backlight: hard for cameras</a:t>
+            </a:r>
+            <a:endParaRPr lang="de-DE" sz="1100" dirty="0">
               <a:solidFill>
-                <a:srgbClr val="262626"/>
+                <a:srgbClr val="595959"/>
               </a:solidFill>
             </a:endParaRPr>
           </a:p>
@@ -8638,87 +8859,10 @@
       </p:sp>
       <p:sp>
         <p:nvSpPr>
-          <p:cNvPr id="14" name="Pfeil: Chevron 13">
-            <a:extLst>
-              <a:ext uri="{FF2B5EF4-FFF2-40B4-BE49-F238E27FC236}">
-                <a16:creationId xmlns:a16="http://schemas.microsoft.com/office/drawing/2014/main" id="{827CBBD1-7646-1969-6FC8-BE407B519C29}"/>
-              </a:ext>
-            </a:extLst>
-          </p:cNvPr>
-          <p:cNvSpPr/>
-          <p:nvPr/>
-        </p:nvSpPr>
-        <p:spPr>
-          <a:xfrm>
-            <a:off x="7327900" y="1143000"/>
-            <a:ext cx="1625600" cy="762000"/>
-          </a:xfrm>
-          <a:prstGeom prst="chevron">
-            <a:avLst>
-              <a:gd name="adj" fmla="val 35000"/>
-            </a:avLst>
-          </a:prstGeom>
-          <a:solidFill>
-            <a:srgbClr val="0063A6"/>
-          </a:solidFill>
-          <a:ln w="12700" cap="flat" cmpd="sng" algn="ctr">
-            <a:noFill/>
-            <a:prstDash val="solid"/>
-            <a:miter lim="800000"/>
-          </a:ln>
-          <a:effectLst/>
-          <a:extLst>
-            <a:ext uri="{91240B29-F687-4F45-9708-019B960494DF}">
-              <a14:hiddenLine xmlns:a14="http://schemas.microsoft.com/office/drawing/2010/main" w="12700" cap="flat" cmpd="sng" algn="ctr">
-                <a:solidFill>
-                  <a:schemeClr val="accent1">
-                    <a:shade val="15000"/>
-                  </a:schemeClr>
-                </a:solidFill>
-                <a:prstDash val="solid"/>
-                <a:miter lim="800000"/>
-              </a14:hiddenLine>
-            </a:ext>
-          </a:extLst>
-        </p:spPr>
-        <p:style>
-          <a:lnRef idx="2">
-            <a:schemeClr val="accent1">
-              <a:shade val="15000"/>
-            </a:schemeClr>
-          </a:lnRef>
-          <a:fillRef idx="1">
-            <a:schemeClr val="accent1"/>
-          </a:fillRef>
-          <a:effectRef idx="0">
-            <a:schemeClr val="accent1"/>
-          </a:effectRef>
-          <a:fontRef idx="minor">
-            <a:schemeClr val="lt1"/>
-          </a:fontRef>
-        </p:style>
-        <p:txBody>
-          <a:bodyPr wrap="none" lIns="25400" rIns="25400" rtlCol="0" anchor="ctr"/>
-          <a:lstStyle/>
-          <a:p>
-            <a:pPr algn="ctr"/>
-            <a:r>
-              <a:rPr lang="de-DE" sz="1500" b="1">
-                <a:solidFill>
-                  <a:srgbClr val="FFFFFF"/>
-                </a:solidFill>
-              </a:rPr>
-              <a:t>Figures</a:t>
-            </a:r>
-          </a:p>
-        </p:txBody>
-      </p:sp>
-      <p:sp>
-        <p:nvSpPr>
           <p:cNvPr id="15" name="Textfeld 14">
             <a:extLst>
               <a:ext uri="{FF2B5EF4-FFF2-40B4-BE49-F238E27FC236}">
-                <a16:creationId xmlns:a16="http://schemas.microsoft.com/office/drawing/2014/main" id="{6F0B4016-893C-EBFC-213F-25037F453652}"/>
+                <a16:creationId xmlns:a16="http://schemas.microsoft.com/office/drawing/2014/main" id="{7EFB65CD-9EA0-F6CC-9E2B-71ACE119D8BF}"/>
               </a:ext>
             </a:extLst>
           </p:cNvPr>
@@ -8727,8 +8871,8 @@
         </p:nvSpPr>
         <p:spPr>
           <a:xfrm>
-            <a:off x="7327900" y="2057400"/>
-            <a:ext cx="1625600" cy="762000"/>
+            <a:off x="4775200" y="2997200"/>
+            <a:ext cx="4191000" cy="177800"/>
           </a:xfrm>
           <a:prstGeom prst="rect">
             <a:avLst/>
@@ -8736,22 +8880,22 @@
         </p:spPr>
         <p:txBody>
           <a:bodyPr vert="horz" wrap="square" lIns="0" tIns="45720" rIns="0" bIns="45720" rtlCol="0" anchor="t">
-            <a:normAutofit/>
+            <a:noAutofit/>
           </a:bodyPr>
           <a:lstStyle/>
           <a:p>
             <a:pPr algn="l"/>
             <a:r>
-              <a:rPr lang="en-US" sz="1200">
-                <a:solidFill>
-                  <a:srgbClr val="262626"/>
+              <a:rPr lang="fr-FR" sz="900" i="1">
+                <a:solidFill>
+                  <a:srgbClr val="595959"/>
                 </a:solidFill>
               </a:rPr>
-              <a:t>notebooks create the paper figures and tables</a:t>
-            </a:r>
-            <a:endParaRPr lang="de-DE" sz="1200" dirty="0">
+              <a:t>Images: M3DGR (Zhang et al., IROS 2025), unmodified.</a:t>
+            </a:r>
+            <a:endParaRPr lang="de-DE" sz="900" i="1" dirty="0">
               <a:solidFill>
-                <a:srgbClr val="262626"/>
+                <a:srgbClr val="595959"/>
               </a:solidFill>
             </a:endParaRPr>
           </a:p>
@@ -8762,7 +8906,7 @@
           <p:cNvPr id="16" name="Rechteck: abgerundete Ecken 15">
             <a:extLst>
               <a:ext uri="{FF2B5EF4-FFF2-40B4-BE49-F238E27FC236}">
-                <a16:creationId xmlns:a16="http://schemas.microsoft.com/office/drawing/2014/main" id="{E4793E0E-21DE-A46F-34E5-522E3608D3FB}"/>
+                <a16:creationId xmlns:a16="http://schemas.microsoft.com/office/drawing/2014/main" id="{EF5E5A81-90EE-E8C0-A63D-0115449AD320}"/>
               </a:ext>
             </a:extLst>
           </p:cNvPr>
@@ -8772,7 +8916,7 @@
         <p:spPr>
           <a:xfrm>
             <a:off x="177800" y="3327400"/>
-            <a:ext cx="8775700" cy="812800"/>
+            <a:ext cx="8775700" cy="1041400"/>
           </a:xfrm>
           <a:prstGeom prst="roundRect">
             <a:avLst>
@@ -8832,7 +8976,7 @@
           <p:cNvPr id="17" name="Textfeld 16">
             <a:extLst>
               <a:ext uri="{FF2B5EF4-FFF2-40B4-BE49-F238E27FC236}">
-                <a16:creationId xmlns:a16="http://schemas.microsoft.com/office/drawing/2014/main" id="{581B11EA-341C-B7A6-9DEB-0FEA9E4171BE}"/>
+                <a16:creationId xmlns:a16="http://schemas.microsoft.com/office/drawing/2014/main" id="{FC636037-7BC6-3992-5839-026FA7068AF4}"/>
               </a:ext>
             </a:extLst>
           </p:cNvPr>
@@ -8841,8 +8985,8 @@
         </p:nvSpPr>
         <p:spPr>
           <a:xfrm>
-            <a:off x="355600" y="3454400"/>
-            <a:ext cx="8420100" cy="635000"/>
+            <a:off x="355600" y="3403600"/>
+            <a:ext cx="8420100" cy="279400"/>
           </a:xfrm>
           <a:prstGeom prst="rect">
             <a:avLst/>
@@ -8850,31 +8994,75 @@
         </p:spPr>
         <p:txBody>
           <a:bodyPr vert="horz" wrap="square" lIns="0" tIns="45720" rIns="0" bIns="45720" rtlCol="0" anchor="t">
+            <a:noAutofit/>
+          </a:bodyPr>
+          <a:lstStyle/>
+          <a:p>
+            <a:pPr algn="l"/>
+            <a:r>
+              <a:rPr lang="de-DE" sz="1600" b="1">
+                <a:solidFill>
+                  <a:srgbClr val="0063A6"/>
+                </a:solidFill>
+              </a:rPr>
+              <a:t>Limitations of our study</a:t>
+            </a:r>
+            <a:endParaRPr lang="de-DE" sz="1600" b="1" dirty="0">
+              <a:solidFill>
+                <a:srgbClr val="0063A6"/>
+              </a:solidFill>
+            </a:endParaRPr>
+          </a:p>
+        </p:txBody>
+      </p:sp>
+      <p:sp>
+        <p:nvSpPr>
+          <p:cNvPr id="18" name="Textfeld 17">
+            <a:extLst>
+              <a:ext uri="{FF2B5EF4-FFF2-40B4-BE49-F238E27FC236}">
+                <a16:creationId xmlns:a16="http://schemas.microsoft.com/office/drawing/2014/main" id="{44EE9DCB-C987-306B-D09F-32BA8A0F7B2C}"/>
+              </a:ext>
+            </a:extLst>
+          </p:cNvPr>
+          <p:cNvSpPr txBox="1"/>
+          <p:nvPr/>
+        </p:nvSpPr>
+        <p:spPr>
+          <a:xfrm>
+            <a:off x="355600" y="3733800"/>
+            <a:ext cx="8420100" cy="584200"/>
+          </a:xfrm>
+          <a:prstGeom prst="rect">
+            <a:avLst/>
+          </a:prstGeom>
+        </p:spPr>
+        <p:txBody>
+          <a:bodyPr vert="horz" wrap="square" lIns="0" tIns="45720" rIns="0" bIns="45720" rtlCol="0" anchor="t">
             <a:normAutofit/>
           </a:bodyPr>
           <a:lstStyle/>
           <a:p>
             <a:pPr algn="l"/>
             <a:r>
-              <a:rPr lang="en-US" sz="1400">
+              <a:rPr lang="de-DE" sz="1300">
                 <a:solidFill>
                   <a:srgbClr val="262626"/>
                 </a:solidFill>
               </a:rPr>
-              <a:t>One command reproduces all figures from the raw results.</a:t>
+              <a:t>Software-synchronised sensors and rolling-shutter cameras | default parameters only</a:t>
             </a:r>
           </a:p>
           <a:p>
             <a:pPr algn="l"/>
             <a:r>
-              <a:rPr lang="en-US" sz="1400">
+              <a:rPr lang="de-DE" sz="1300">
                 <a:solidFill>
                   <a:srgbClr val="262626"/>
                 </a:solidFill>
               </a:rPr>
-              <a:t>Code and results: github.com/eliasbitsch/bEARL</a:t>
-            </a:r>
-            <a:endParaRPr lang="de-DE" sz="1400" dirty="0">
+              <a:t>small number of runs (N = 5) | different hardware per system</a:t>
+            </a:r>
+            <a:endParaRPr lang="de-DE" sz="1300" dirty="0">
               <a:solidFill>
                 <a:srgbClr val="262626"/>
               </a:solidFill>
@@ -8885,7 +9073,7 @@
     </p:spTree>
     <p:extLst>
       <p:ext uri="{BB962C8B-B14F-4D97-AF65-F5344CB8AC3E}">
-        <p14:creationId xmlns:p14="http://schemas.microsoft.com/office/powerpoint/2010/main" val="2295097614"/>
+        <p14:creationId xmlns:p14="http://schemas.microsoft.com/office/powerpoint/2010/main" val="4169480885"/>
       </p:ext>
     </p:extLst>
   </p:cSld>
@@ -8917,7 +9105,7 @@
           <p:cNvPr id="2" name="Titel 1">
             <a:extLst>
               <a:ext uri="{FF2B5EF4-FFF2-40B4-BE49-F238E27FC236}">
-                <a16:creationId xmlns:a16="http://schemas.microsoft.com/office/drawing/2014/main" id="{44D2EBF6-3481-91FD-48C6-F6855A5F8002}"/>
+                <a16:creationId xmlns:a16="http://schemas.microsoft.com/office/drawing/2014/main" id="{76929651-5986-140D-34B0-D07D84654DB1}"/>
               </a:ext>
             </a:extLst>
           </p:cNvPr>
@@ -8935,658 +9123,6 @@
           <a:p>
             <a:r>
               <a:rPr lang="de-DE"/>
-              <a:t>Expected challenges and limitations</a:t>
-            </a:r>
-          </a:p>
-        </p:txBody>
-      </p:sp>
-      <p:sp>
-        <p:nvSpPr>
-          <p:cNvPr id="5" name="Fußzeilenplatzhalter 4">
-            <a:extLst>
-              <a:ext uri="{FF2B5EF4-FFF2-40B4-BE49-F238E27FC236}">
-                <a16:creationId xmlns:a16="http://schemas.microsoft.com/office/drawing/2014/main" id="{F7BDB13A-35F6-6A50-D82C-FEFF52B7C785}"/>
-              </a:ext>
-            </a:extLst>
-          </p:cNvPr>
-          <p:cNvSpPr>
-            <a:spLocks noGrp="1"/>
-          </p:cNvSpPr>
-          <p:nvPr>
-            <p:ph type="ftr" sz="quarter" idx="13"/>
-          </p:nvPr>
-        </p:nvSpPr>
-        <p:spPr/>
-        <p:txBody>
-          <a:bodyPr/>
-          <a:lstStyle/>
-          <a:p>
-            <a:r>
-              <a:rPr lang="en-US"/>
-              <a:t>SLAM Comparison | Bitsch, Stix, Ovdiienko, Zhou | WS 2026/27</a:t>
-            </a:r>
-            <a:endParaRPr lang="en-GB" dirty="0"/>
-          </a:p>
-        </p:txBody>
-      </p:sp>
-      <p:sp>
-        <p:nvSpPr>
-          <p:cNvPr id="6" name="Foliennummernplatzhalter 5">
-            <a:extLst>
-              <a:ext uri="{FF2B5EF4-FFF2-40B4-BE49-F238E27FC236}">
-                <a16:creationId xmlns:a16="http://schemas.microsoft.com/office/drawing/2014/main" id="{B8089C5F-BD6E-5B6A-10D8-6EC1E15377EE}"/>
-              </a:ext>
-            </a:extLst>
-          </p:cNvPr>
-          <p:cNvSpPr>
-            <a:spLocks noGrp="1"/>
-          </p:cNvSpPr>
-          <p:nvPr>
-            <p:ph type="sldNum" sz="quarter" idx="14"/>
-          </p:nvPr>
-        </p:nvSpPr>
-        <p:spPr/>
-        <p:txBody>
-          <a:bodyPr/>
-          <a:lstStyle/>
-          <a:p>
-            <a:fld id="{9C057DB4-583E-41A7-BD94-987342018C17}" type="slidenum">
-              <a:rPr lang="en-GB" smtClean="0"/>
-              <a:pPr/>
-              <a:t>14</a:t>
-            </a:fld>
-            <a:endParaRPr lang="en-GB" dirty="0"/>
-          </a:p>
-        </p:txBody>
-      </p:sp>
-      <p:sp>
-        <p:nvSpPr>
-          <p:cNvPr id="7" name="Textfeld 6">
-            <a:extLst>
-              <a:ext uri="{FF2B5EF4-FFF2-40B4-BE49-F238E27FC236}">
-                <a16:creationId xmlns:a16="http://schemas.microsoft.com/office/drawing/2014/main" id="{E1C0A6EB-CE66-9342-74D3-6623394C599C}"/>
-              </a:ext>
-            </a:extLst>
-          </p:cNvPr>
-          <p:cNvSpPr txBox="1"/>
-          <p:nvPr/>
-        </p:nvSpPr>
-        <p:spPr>
-          <a:xfrm>
-            <a:off x="177800" y="660400"/>
-            <a:ext cx="4191000" cy="279400"/>
-          </a:xfrm>
-          <a:prstGeom prst="rect">
-            <a:avLst/>
-          </a:prstGeom>
-        </p:spPr>
-        <p:txBody>
-          <a:bodyPr vert="horz" wrap="square" lIns="0" tIns="45720" rIns="0" bIns="45720" rtlCol="0" anchor="t">
-            <a:noAutofit/>
-          </a:bodyPr>
-          <a:lstStyle/>
-          <a:p>
-            <a:pPr algn="l"/>
-            <a:r>
-              <a:rPr lang="en-US" sz="1600" b="1">
-                <a:solidFill>
-                  <a:srgbClr val="0063A6"/>
-                </a:solidFill>
-              </a:rPr>
-              <a:t>Failure modes predicted by theory</a:t>
-            </a:r>
-            <a:endParaRPr lang="de-DE" sz="1600" b="1" dirty="0">
-              <a:solidFill>
-                <a:srgbClr val="0063A6"/>
-              </a:solidFill>
-            </a:endParaRPr>
-          </a:p>
-        </p:txBody>
-      </p:sp>
-      <p:sp>
-        <p:nvSpPr>
-          <p:cNvPr id="8" name="Textfeld 7">
-            <a:extLst>
-              <a:ext uri="{FF2B5EF4-FFF2-40B4-BE49-F238E27FC236}">
-                <a16:creationId xmlns:a16="http://schemas.microsoft.com/office/drawing/2014/main" id="{D40A9481-A05F-CAFA-8A0B-1C1D36AAEE3E}"/>
-              </a:ext>
-            </a:extLst>
-          </p:cNvPr>
-          <p:cNvSpPr txBox="1"/>
-          <p:nvPr/>
-        </p:nvSpPr>
-        <p:spPr>
-          <a:xfrm>
-            <a:off x="177800" y="1016000"/>
-            <a:ext cx="4191000" cy="2286000"/>
-          </a:xfrm>
-          <a:prstGeom prst="rect">
-            <a:avLst/>
-          </a:prstGeom>
-        </p:spPr>
-        <p:txBody>
-          <a:bodyPr vert="horz" wrap="square" lIns="0" tIns="45720" rIns="91440" bIns="45720" rtlCol="0" anchor="t">
-            <a:normAutofit/>
-          </a:bodyPr>
-          <a:lstStyle/>
-          <a:p>
-            <a:pPr marL="177800" indent="-177800" algn="l">
-              <a:spcAft>
-                <a:spcPts val="400"/>
-              </a:spcAft>
-              <a:buFont typeface="+mj-lt"/>
-              <a:buChar char="•"/>
-            </a:pPr>
-            <a:r>
-              <a:rPr lang="de-DE" sz="1400">
-                <a:solidFill>
-                  <a:srgbClr val="262626"/>
-                </a:solidFill>
-              </a:rPr>
-              <a:t>Camera: needs light and texture (Dark03)</a:t>
-            </a:r>
-          </a:p>
-          <a:p>
-            <a:pPr marL="177800" indent="-177800" algn="l">
-              <a:spcAft>
-                <a:spcPts val="400"/>
-              </a:spcAft>
-              <a:buFont typeface="+mj-lt"/>
-              <a:buChar char="•"/>
-            </a:pPr>
-            <a:r>
-              <a:rPr lang="de-DE" sz="1400">
-                <a:solidFill>
-                  <a:srgbClr val="262626"/>
-                </a:solidFill>
-              </a:rPr>
-              <a:t>Monocular: metric scale is unobservable</a:t>
-            </a:r>
-          </a:p>
-          <a:p>
-            <a:pPr marL="177800" indent="-177800" algn="l">
-              <a:spcAft>
-                <a:spcPts val="400"/>
-              </a:spcAft>
-              <a:buFont typeface="+mj-lt"/>
-              <a:buChar char="•"/>
-            </a:pPr>
-            <a:r>
-              <a:rPr lang="de-DE" sz="1400">
-                <a:solidFill>
-                  <a:srgbClr val="262626"/>
-                </a:solidFill>
-              </a:rPr>
-              <a:t>LiDAR: degenerates in featureless geometry</a:t>
-            </a:r>
-          </a:p>
-          <a:p>
-            <a:pPr marL="177800" indent="-177800" algn="l">
-              <a:spcAft>
-                <a:spcPts val="400"/>
-              </a:spcAft>
-              <a:buFont typeface="+mj-lt"/>
-              <a:buChar char="•"/>
-            </a:pPr>
-            <a:r>
-              <a:rPr lang="de-DE" sz="1400">
-                <a:solidFill>
-                  <a:srgbClr val="262626"/>
-                </a:solidFill>
-              </a:rPr>
-              <a:t>Wheel odometry: assumes no wheel slip</a:t>
-            </a:r>
-          </a:p>
-          <a:p>
-            <a:pPr marL="177800" indent="-177800" algn="l">
-              <a:spcAft>
-                <a:spcPts val="400"/>
-              </a:spcAft>
-              <a:buFont typeface="+mj-lt"/>
-              <a:buChar char="•"/>
-            </a:pPr>
-            <a:r>
-              <a:rPr lang="de-DE" sz="1400">
-                <a:solidFill>
-                  <a:srgbClr val="262626"/>
-                </a:solidFill>
-              </a:rPr>
-              <a:t>No loop closure: drift accumulates</a:t>
-            </a:r>
-            <a:endParaRPr lang="de-DE" sz="1400" dirty="0">
-              <a:solidFill>
-                <a:srgbClr val="262626"/>
-              </a:solidFill>
-            </a:endParaRPr>
-          </a:p>
-        </p:txBody>
-      </p:sp>
-      <p:pic>
-        <p:nvPicPr>
-          <p:cNvPr id="10" name="Grafik 9" descr="Long featureless corridor from M3DGR">
-            <a:extLst>
-              <a:ext uri="{FF2B5EF4-FFF2-40B4-BE49-F238E27FC236}">
-                <a16:creationId xmlns:a16="http://schemas.microsoft.com/office/drawing/2014/main" id="{35AC5C5A-B9E4-22CE-3382-A1B3AA33818B}"/>
-              </a:ext>
-            </a:extLst>
-          </p:cNvPr>
-          <p:cNvPicPr>
-            <a:picLocks noChangeAspect="1"/>
-          </p:cNvPicPr>
-          <p:nvPr/>
-        </p:nvPicPr>
-        <p:blipFill>
-          <a:blip r:embed="rId3" cstate="print">
-            <a:extLst>
-              <a:ext uri="{28A0092B-C50C-407E-A947-70E740481C1C}">
-                <a14:useLocalDpi xmlns:a14="http://schemas.microsoft.com/office/drawing/2010/main" val="0"/>
-              </a:ext>
-            </a:extLst>
-          </a:blip>
-          <a:stretch>
-            <a:fillRect/>
-          </a:stretch>
-        </p:blipFill>
-        <p:spPr>
-          <a:xfrm>
-            <a:off x="4962939" y="660400"/>
-            <a:ext cx="1656522" cy="1905000"/>
-          </a:xfrm>
-          <a:prstGeom prst="rect">
-            <a:avLst/>
-          </a:prstGeom>
-        </p:spPr>
-      </p:pic>
-      <p:sp>
-        <p:nvSpPr>
-          <p:cNvPr id="11" name="Textfeld 10">
-            <a:extLst>
-              <a:ext uri="{FF2B5EF4-FFF2-40B4-BE49-F238E27FC236}">
-                <a16:creationId xmlns:a16="http://schemas.microsoft.com/office/drawing/2014/main" id="{DE12FB69-34B3-1360-2B38-AFD86720B4A8}"/>
-              </a:ext>
-            </a:extLst>
-          </p:cNvPr>
-          <p:cNvSpPr txBox="1"/>
-          <p:nvPr/>
-        </p:nvSpPr>
-        <p:spPr>
-          <a:xfrm>
-            <a:off x="4775200" y="2590800"/>
-            <a:ext cx="2032000" cy="381000"/>
-          </a:xfrm>
-          <a:prstGeom prst="rect">
-            <a:avLst/>
-          </a:prstGeom>
-        </p:spPr>
-        <p:txBody>
-          <a:bodyPr vert="horz" wrap="square" lIns="0" tIns="45720" rIns="0" bIns="45720" rtlCol="0" anchor="t">
-            <a:normAutofit/>
-          </a:bodyPr>
-          <a:lstStyle/>
-          <a:p>
-            <a:pPr algn="l"/>
-            <a:r>
-              <a:rPr lang="en-US" sz="1100">
-                <a:solidFill>
-                  <a:srgbClr val="595959"/>
-                </a:solidFill>
-              </a:rPr>
-              <a:t>Long corridor: hard for LiDAR</a:t>
-            </a:r>
-            <a:endParaRPr lang="de-DE" sz="1100" dirty="0">
-              <a:solidFill>
-                <a:srgbClr val="595959"/>
-              </a:solidFill>
-            </a:endParaRPr>
-          </a:p>
-        </p:txBody>
-      </p:sp>
-      <p:pic>
-        <p:nvPicPr>
-          <p:cNvPr id="13" name="Grafik 12" descr="Scene with strong backlight from M3DGR">
-            <a:extLst>
-              <a:ext uri="{FF2B5EF4-FFF2-40B4-BE49-F238E27FC236}">
-                <a16:creationId xmlns:a16="http://schemas.microsoft.com/office/drawing/2014/main" id="{C3B4D87A-4735-45BF-65D8-6FBA71905B0D}"/>
-              </a:ext>
-            </a:extLst>
-          </p:cNvPr>
-          <p:cNvPicPr>
-            <a:picLocks noChangeAspect="1"/>
-          </p:cNvPicPr>
-          <p:nvPr/>
-        </p:nvPicPr>
-        <p:blipFill>
-          <a:blip r:embed="rId4" cstate="print">
-            <a:extLst>
-              <a:ext uri="{28A0092B-C50C-407E-A947-70E740481C1C}">
-                <a14:useLocalDpi xmlns:a14="http://schemas.microsoft.com/office/drawing/2010/main" val="0"/>
-              </a:ext>
-            </a:extLst>
-          </a:blip>
-          <a:stretch>
-            <a:fillRect/>
-          </a:stretch>
-        </p:blipFill>
-        <p:spPr>
-          <a:xfrm>
-            <a:off x="6934200" y="850900"/>
-            <a:ext cx="2032000" cy="1524000"/>
-          </a:xfrm>
-          <a:prstGeom prst="rect">
-            <a:avLst/>
-          </a:prstGeom>
-        </p:spPr>
-      </p:pic>
-      <p:sp>
-        <p:nvSpPr>
-          <p:cNvPr id="14" name="Textfeld 13">
-            <a:extLst>
-              <a:ext uri="{FF2B5EF4-FFF2-40B4-BE49-F238E27FC236}">
-                <a16:creationId xmlns:a16="http://schemas.microsoft.com/office/drawing/2014/main" id="{14525793-8B85-2578-A14A-DE1F49DCF4FC}"/>
-              </a:ext>
-            </a:extLst>
-          </p:cNvPr>
-          <p:cNvSpPr txBox="1"/>
-          <p:nvPr/>
-        </p:nvSpPr>
-        <p:spPr>
-          <a:xfrm>
-            <a:off x="6934200" y="2590800"/>
-            <a:ext cx="2032000" cy="381000"/>
-          </a:xfrm>
-          <a:prstGeom prst="rect">
-            <a:avLst/>
-          </a:prstGeom>
-        </p:spPr>
-        <p:txBody>
-          <a:bodyPr vert="horz" wrap="square" lIns="0" tIns="45720" rIns="0" bIns="45720" rtlCol="0" anchor="t">
-            <a:noAutofit/>
-          </a:bodyPr>
-          <a:lstStyle/>
-          <a:p>
-            <a:pPr algn="l"/>
-            <a:r>
-              <a:rPr lang="en-US" sz="1100">
-                <a:solidFill>
-                  <a:srgbClr val="595959"/>
-                </a:solidFill>
-              </a:rPr>
-              <a:t>Strong backlight: hard for cameras</a:t>
-            </a:r>
-            <a:endParaRPr lang="de-DE" sz="1100" dirty="0">
-              <a:solidFill>
-                <a:srgbClr val="595959"/>
-              </a:solidFill>
-            </a:endParaRPr>
-          </a:p>
-        </p:txBody>
-      </p:sp>
-      <p:sp>
-        <p:nvSpPr>
-          <p:cNvPr id="15" name="Textfeld 14">
-            <a:extLst>
-              <a:ext uri="{FF2B5EF4-FFF2-40B4-BE49-F238E27FC236}">
-                <a16:creationId xmlns:a16="http://schemas.microsoft.com/office/drawing/2014/main" id="{ADC38851-01D2-BEF7-A1F8-FACEF36F7345}"/>
-              </a:ext>
-            </a:extLst>
-          </p:cNvPr>
-          <p:cNvSpPr txBox="1"/>
-          <p:nvPr/>
-        </p:nvSpPr>
-        <p:spPr>
-          <a:xfrm>
-            <a:off x="4775200" y="2997200"/>
-            <a:ext cx="4191000" cy="177800"/>
-          </a:xfrm>
-          <a:prstGeom prst="rect">
-            <a:avLst/>
-          </a:prstGeom>
-        </p:spPr>
-        <p:txBody>
-          <a:bodyPr vert="horz" wrap="square" lIns="0" tIns="45720" rIns="0" bIns="45720" rtlCol="0" anchor="t">
-            <a:noAutofit/>
-          </a:bodyPr>
-          <a:lstStyle/>
-          <a:p>
-            <a:pPr algn="l"/>
-            <a:r>
-              <a:rPr lang="fr-FR" sz="900" i="1">
-                <a:solidFill>
-                  <a:srgbClr val="595959"/>
-                </a:solidFill>
-              </a:rPr>
-              <a:t>Images: M3DGR (Zhang et al., IROS 2025), unmodified.</a:t>
-            </a:r>
-            <a:endParaRPr lang="de-DE" sz="900" i="1" dirty="0">
-              <a:solidFill>
-                <a:srgbClr val="595959"/>
-              </a:solidFill>
-            </a:endParaRPr>
-          </a:p>
-        </p:txBody>
-      </p:sp>
-      <p:sp>
-        <p:nvSpPr>
-          <p:cNvPr id="16" name="Rechteck: abgerundete Ecken 15">
-            <a:extLst>
-              <a:ext uri="{FF2B5EF4-FFF2-40B4-BE49-F238E27FC236}">
-                <a16:creationId xmlns:a16="http://schemas.microsoft.com/office/drawing/2014/main" id="{E8DC77B5-4544-F415-1CE7-85D4760163E8}"/>
-              </a:ext>
-            </a:extLst>
-          </p:cNvPr>
-          <p:cNvSpPr/>
-          <p:nvPr/>
-        </p:nvSpPr>
-        <p:spPr>
-          <a:xfrm>
-            <a:off x="177800" y="3327400"/>
-            <a:ext cx="8775700" cy="1041400"/>
-          </a:xfrm>
-          <a:prstGeom prst="roundRect">
-            <a:avLst>
-              <a:gd name="adj" fmla="val 6000"/>
-            </a:avLst>
-          </a:prstGeom>
-          <a:solidFill>
-            <a:srgbClr val="E6EFF7"/>
-          </a:solidFill>
-          <a:ln w="12700" cap="flat" cmpd="sng" algn="ctr">
-            <a:noFill/>
-            <a:prstDash val="solid"/>
-            <a:miter lim="800000"/>
-          </a:ln>
-          <a:effectLst/>
-          <a:extLst>
-            <a:ext uri="{91240B29-F687-4F45-9708-019B960494DF}">
-              <a14:hiddenLine xmlns:a14="http://schemas.microsoft.com/office/drawing/2010/main" w="12700" cap="flat" cmpd="sng" algn="ctr">
-                <a:solidFill>
-                  <a:schemeClr val="accent1">
-                    <a:shade val="15000"/>
-                  </a:schemeClr>
-                </a:solidFill>
-                <a:prstDash val="solid"/>
-                <a:miter lim="800000"/>
-              </a14:hiddenLine>
-            </a:ext>
-          </a:extLst>
-        </p:spPr>
-        <p:style>
-          <a:lnRef idx="2">
-            <a:schemeClr val="accent1">
-              <a:shade val="15000"/>
-            </a:schemeClr>
-          </a:lnRef>
-          <a:fillRef idx="1">
-            <a:schemeClr val="accent1"/>
-          </a:fillRef>
-          <a:effectRef idx="0">
-            <a:schemeClr val="accent1"/>
-          </a:effectRef>
-          <a:fontRef idx="minor">
-            <a:schemeClr val="lt1"/>
-          </a:fontRef>
-        </p:style>
-        <p:txBody>
-          <a:bodyPr rtlCol="0" anchor="ctr"/>
-          <a:lstStyle/>
-          <a:p>
-            <a:pPr algn="ctr"/>
-            <a:endParaRPr lang="de-DE"/>
-          </a:p>
-        </p:txBody>
-      </p:sp>
-      <p:sp>
-        <p:nvSpPr>
-          <p:cNvPr id="17" name="Textfeld 16">
-            <a:extLst>
-              <a:ext uri="{FF2B5EF4-FFF2-40B4-BE49-F238E27FC236}">
-                <a16:creationId xmlns:a16="http://schemas.microsoft.com/office/drawing/2014/main" id="{0C914BD6-1EE6-CA4C-E74E-B6C9721A7ECD}"/>
-              </a:ext>
-            </a:extLst>
-          </p:cNvPr>
-          <p:cNvSpPr txBox="1"/>
-          <p:nvPr/>
-        </p:nvSpPr>
-        <p:spPr>
-          <a:xfrm>
-            <a:off x="355600" y="3403600"/>
-            <a:ext cx="8420100" cy="279400"/>
-          </a:xfrm>
-          <a:prstGeom prst="rect">
-            <a:avLst/>
-          </a:prstGeom>
-        </p:spPr>
-        <p:txBody>
-          <a:bodyPr vert="horz" wrap="square" lIns="0" tIns="45720" rIns="0" bIns="45720" rtlCol="0" anchor="t">
-            <a:noAutofit/>
-          </a:bodyPr>
-          <a:lstStyle/>
-          <a:p>
-            <a:pPr algn="l"/>
-            <a:r>
-              <a:rPr lang="de-DE" sz="1600" b="1">
-                <a:solidFill>
-                  <a:srgbClr val="0063A6"/>
-                </a:solidFill>
-              </a:rPr>
-              <a:t>Limitations of our study</a:t>
-            </a:r>
-            <a:endParaRPr lang="de-DE" sz="1600" b="1" dirty="0">
-              <a:solidFill>
-                <a:srgbClr val="0063A6"/>
-              </a:solidFill>
-            </a:endParaRPr>
-          </a:p>
-        </p:txBody>
-      </p:sp>
-      <p:sp>
-        <p:nvSpPr>
-          <p:cNvPr id="18" name="Textfeld 17">
-            <a:extLst>
-              <a:ext uri="{FF2B5EF4-FFF2-40B4-BE49-F238E27FC236}">
-                <a16:creationId xmlns:a16="http://schemas.microsoft.com/office/drawing/2014/main" id="{219E3D78-C3D9-86BF-C631-22C9489D8A35}"/>
-              </a:ext>
-            </a:extLst>
-          </p:cNvPr>
-          <p:cNvSpPr txBox="1"/>
-          <p:nvPr/>
-        </p:nvSpPr>
-        <p:spPr>
-          <a:xfrm>
-            <a:off x="355600" y="3733800"/>
-            <a:ext cx="8420100" cy="584200"/>
-          </a:xfrm>
-          <a:prstGeom prst="rect">
-            <a:avLst/>
-          </a:prstGeom>
-        </p:spPr>
-        <p:txBody>
-          <a:bodyPr vert="horz" wrap="square" lIns="0" tIns="45720" rIns="0" bIns="45720" rtlCol="0" anchor="t">
-            <a:normAutofit/>
-          </a:bodyPr>
-          <a:lstStyle/>
-          <a:p>
-            <a:pPr algn="l"/>
-            <a:r>
-              <a:rPr lang="de-DE" sz="1300">
-                <a:solidFill>
-                  <a:srgbClr val="262626"/>
-                </a:solidFill>
-              </a:rPr>
-              <a:t>Software-synchronised sensors and rolling-shutter cameras | default parameters only</a:t>
-            </a:r>
-          </a:p>
-          <a:p>
-            <a:pPr algn="l"/>
-            <a:r>
-              <a:rPr lang="de-DE" sz="1300">
-                <a:solidFill>
-                  <a:srgbClr val="262626"/>
-                </a:solidFill>
-              </a:rPr>
-              <a:t>small number of runs (N = 5) | different hardware per system</a:t>
-            </a:r>
-            <a:endParaRPr lang="de-DE" sz="1300" dirty="0">
-              <a:solidFill>
-                <a:srgbClr val="262626"/>
-              </a:solidFill>
-            </a:endParaRPr>
-          </a:p>
-        </p:txBody>
-      </p:sp>
-    </p:spTree>
-    <p:extLst>
-      <p:ext uri="{BB962C8B-B14F-4D97-AF65-F5344CB8AC3E}">
-        <p14:creationId xmlns:p14="http://schemas.microsoft.com/office/powerpoint/2010/main" val="595537142"/>
-      </p:ext>
-    </p:extLst>
-  </p:cSld>
-  <p:clrMapOvr>
-    <a:masterClrMapping/>
-  </p:clrMapOvr>
-</p:sld>
-</file>
-
-<file path=ppt/slides/slide15.xml><?xml version="1.0" encoding="utf-8"?>
-<p:sld xmlns:a="http://schemas.openxmlformats.org/drawingml/2006/main" xmlns:r="http://schemas.openxmlformats.org/officeDocument/2006/relationships" xmlns:p="http://schemas.openxmlformats.org/presentationml/2006/main">
-  <p:cSld>
-    <p:spTree>
-      <p:nvGrpSpPr>
-        <p:cNvPr id="1" name=""/>
-        <p:cNvGrpSpPr/>
-        <p:nvPr/>
-      </p:nvGrpSpPr>
-      <p:grpSpPr>
-        <a:xfrm>
-          <a:off x="0" y="0"/>
-          <a:ext cx="0" cy="0"/>
-          <a:chOff x="0" y="0"/>
-          <a:chExt cx="0" cy="0"/>
-        </a:xfrm>
-      </p:grpSpPr>
-      <p:sp>
-        <p:nvSpPr>
-          <p:cNvPr id="2" name="Titel 1">
-            <a:extLst>
-              <a:ext uri="{FF2B5EF4-FFF2-40B4-BE49-F238E27FC236}">
-                <a16:creationId xmlns:a16="http://schemas.microsoft.com/office/drawing/2014/main" id="{EFE5188D-821D-5E92-BC7E-9D7CEC011372}"/>
-              </a:ext>
-            </a:extLst>
-          </p:cNvPr>
-          <p:cNvSpPr>
-            <a:spLocks noGrp="1"/>
-          </p:cNvSpPr>
-          <p:nvPr>
-            <p:ph type="title"/>
-          </p:nvPr>
-        </p:nvSpPr>
-        <p:spPr/>
-        <p:txBody>
-          <a:bodyPr/>
-          <a:lstStyle/>
-          <a:p>
-            <a:r>
-              <a:rPr lang="de-DE"/>
               <a:t>Thank you</a:t>
             </a:r>
           </a:p>
@@ -9597,7 +9133,7 @@
           <p:cNvPr id="3" name="Textplatzhalter 2">
             <a:extLst>
               <a:ext uri="{FF2B5EF4-FFF2-40B4-BE49-F238E27FC236}">
-                <a16:creationId xmlns:a16="http://schemas.microsoft.com/office/drawing/2014/main" id="{F109C2EF-8A61-D706-8FF1-5B73449D3CD0}"/>
+                <a16:creationId xmlns:a16="http://schemas.microsoft.com/office/drawing/2014/main" id="{E6D2E659-B5B2-3793-6F26-66EF5A4429A4}"/>
               </a:ext>
             </a:extLst>
           </p:cNvPr>
@@ -9624,7 +9160,7 @@
     </p:spTree>
     <p:extLst>
       <p:ext uri="{BB962C8B-B14F-4D97-AF65-F5344CB8AC3E}">
-        <p14:creationId xmlns:p14="http://schemas.microsoft.com/office/powerpoint/2010/main" val="874679685"/>
+        <p14:creationId xmlns:p14="http://schemas.microsoft.com/office/powerpoint/2010/main" val="3855228850"/>
       </p:ext>
     </p:extLst>
   </p:cSld>
@@ -9656,7 +9192,7 @@
           <p:cNvPr id="2" name="Titel 1">
             <a:extLst>
               <a:ext uri="{FF2B5EF4-FFF2-40B4-BE49-F238E27FC236}">
-                <a16:creationId xmlns:a16="http://schemas.microsoft.com/office/drawing/2014/main" id="{412D5942-8145-1D54-7B1C-600071C169B6}"/>
+                <a16:creationId xmlns:a16="http://schemas.microsoft.com/office/drawing/2014/main" id="{2B3EA193-8BFA-6410-F08F-9815E72BF713}"/>
               </a:ext>
             </a:extLst>
           </p:cNvPr>
@@ -9684,7 +9220,7 @@
           <p:cNvPr id="4" name="Fußzeilenplatzhalter 3">
             <a:extLst>
               <a:ext uri="{FF2B5EF4-FFF2-40B4-BE49-F238E27FC236}">
-                <a16:creationId xmlns:a16="http://schemas.microsoft.com/office/drawing/2014/main" id="{7BB64651-8E07-5ED4-0EC6-D2A6FFA2EDBC}"/>
+                <a16:creationId xmlns:a16="http://schemas.microsoft.com/office/drawing/2014/main" id="{E2FDCA8A-C0D2-99EF-92E5-3378DC8E4708}"/>
               </a:ext>
             </a:extLst>
           </p:cNvPr>
@@ -9713,7 +9249,7 @@
           <p:cNvPr id="5" name="Foliennummernplatzhalter 4">
             <a:extLst>
               <a:ext uri="{FF2B5EF4-FFF2-40B4-BE49-F238E27FC236}">
-                <a16:creationId xmlns:a16="http://schemas.microsoft.com/office/drawing/2014/main" id="{1042CD51-3851-A0D9-A56A-42944C2FC6DF}"/>
+                <a16:creationId xmlns:a16="http://schemas.microsoft.com/office/drawing/2014/main" id="{8CB97331-97B7-E335-74EB-FE976CD0ADFB}"/>
               </a:ext>
             </a:extLst>
           </p:cNvPr>
@@ -9743,7 +9279,7 @@
           <p:cNvPr id="7" name="Grafik 6" descr="Diagram: robot poses along a loop, observed landmarks and a loop-closure link">
             <a:extLst>
               <a:ext uri="{FF2B5EF4-FFF2-40B4-BE49-F238E27FC236}">
-                <a16:creationId xmlns:a16="http://schemas.microsoft.com/office/drawing/2014/main" id="{71D7A0B2-F9D7-EB73-29E1-8ECF27F3266C}"/>
+                <a16:creationId xmlns:a16="http://schemas.microsoft.com/office/drawing/2014/main" id="{D4A132A5-DD23-5612-3149-6BBB7D05647C}"/>
               </a:ext>
             </a:extLst>
           </p:cNvPr>
@@ -9779,7 +9315,7 @@
           <p:cNvPr id="8" name="Textfeld 7">
             <a:extLst>
               <a:ext uri="{FF2B5EF4-FFF2-40B4-BE49-F238E27FC236}">
-                <a16:creationId xmlns:a16="http://schemas.microsoft.com/office/drawing/2014/main" id="{115977A6-0E05-5E44-C665-59982023D65B}"/>
+                <a16:creationId xmlns:a16="http://schemas.microsoft.com/office/drawing/2014/main" id="{307D0FB7-2D42-C55C-FF2F-39F1F035D314}"/>
               </a:ext>
             </a:extLst>
           </p:cNvPr>
@@ -9823,7 +9359,7 @@
           <p:cNvPr id="9" name="Textfeld 8">
             <a:extLst>
               <a:ext uri="{FF2B5EF4-FFF2-40B4-BE49-F238E27FC236}">
-                <a16:creationId xmlns:a16="http://schemas.microsoft.com/office/drawing/2014/main" id="{1127A269-64F4-BF57-CBA4-F2C763967AFD}"/>
+                <a16:creationId xmlns:a16="http://schemas.microsoft.com/office/drawing/2014/main" id="{CACE48FB-9DE5-C2BB-AF38-4D815E07102B}"/>
               </a:ext>
             </a:extLst>
           </p:cNvPr>
@@ -9939,7 +9475,7 @@
     </p:spTree>
     <p:extLst>
       <p:ext uri="{BB962C8B-B14F-4D97-AF65-F5344CB8AC3E}">
-        <p14:creationId xmlns:p14="http://schemas.microsoft.com/office/powerpoint/2010/main" val="4163547457"/>
+        <p14:creationId xmlns:p14="http://schemas.microsoft.com/office/powerpoint/2010/main" val="1987339611"/>
       </p:ext>
     </p:extLst>
   </p:cSld>
@@ -9971,7 +9507,7 @@
           <p:cNvPr id="2" name="Titel 1">
             <a:extLst>
               <a:ext uri="{FF2B5EF4-FFF2-40B4-BE49-F238E27FC236}">
-                <a16:creationId xmlns:a16="http://schemas.microsoft.com/office/drawing/2014/main" id="{BBDAA1A8-9FC6-5FCD-B83F-610AA21BC015}"/>
+                <a16:creationId xmlns:a16="http://schemas.microsoft.com/office/drawing/2014/main" id="{FD06CAF6-DF67-8981-A443-5FAA89CAA7E6}"/>
               </a:ext>
             </a:extLst>
           </p:cNvPr>
@@ -9999,7 +9535,7 @@
           <p:cNvPr id="4" name="Fußzeilenplatzhalter 3">
             <a:extLst>
               <a:ext uri="{FF2B5EF4-FFF2-40B4-BE49-F238E27FC236}">
-                <a16:creationId xmlns:a16="http://schemas.microsoft.com/office/drawing/2014/main" id="{90C57F8F-3935-2B27-0640-D9B5BC150E42}"/>
+                <a16:creationId xmlns:a16="http://schemas.microsoft.com/office/drawing/2014/main" id="{E00B2E96-1EC5-CB83-04FF-02BE1761B77E}"/>
               </a:ext>
             </a:extLst>
           </p:cNvPr>
@@ -10028,7 +9564,7 @@
           <p:cNvPr id="5" name="Foliennummernplatzhalter 4">
             <a:extLst>
               <a:ext uri="{FF2B5EF4-FFF2-40B4-BE49-F238E27FC236}">
-                <a16:creationId xmlns:a16="http://schemas.microsoft.com/office/drawing/2014/main" id="{3B489ED0-EE20-1BE9-CEE7-BF5DC5769543}"/>
+                <a16:creationId xmlns:a16="http://schemas.microsoft.com/office/drawing/2014/main" id="{05FC0549-5AD3-BEB4-2C7E-7B5568650249}"/>
               </a:ext>
             </a:extLst>
           </p:cNvPr>
@@ -10058,7 +9594,7 @@
           <p:cNvPr id="6" name="Ellipse 5">
             <a:extLst>
               <a:ext uri="{FF2B5EF4-FFF2-40B4-BE49-F238E27FC236}">
-                <a16:creationId xmlns:a16="http://schemas.microsoft.com/office/drawing/2014/main" id="{87870811-1CF0-2990-13E7-8E49F521F874}"/>
+                <a16:creationId xmlns:a16="http://schemas.microsoft.com/office/drawing/2014/main" id="{9978A754-C0AA-28B3-F67D-E6304157172D}"/>
               </a:ext>
             </a:extLst>
           </p:cNvPr>
@@ -10133,7 +9669,7 @@
           <p:cNvPr id="7" name="Textfeld 6">
             <a:extLst>
               <a:ext uri="{FF2B5EF4-FFF2-40B4-BE49-F238E27FC236}">
-                <a16:creationId xmlns:a16="http://schemas.microsoft.com/office/drawing/2014/main" id="{DEC4D3E8-4150-96F6-60AD-A6FA11B1B338}"/>
+                <a16:creationId xmlns:a16="http://schemas.microsoft.com/office/drawing/2014/main" id="{5AF2AA42-7B2D-2C14-BB25-930BDD93B887}"/>
               </a:ext>
             </a:extLst>
           </p:cNvPr>
@@ -10177,7 +9713,7 @@
           <p:cNvPr id="8" name="Textfeld 7">
             <a:extLst>
               <a:ext uri="{FF2B5EF4-FFF2-40B4-BE49-F238E27FC236}">
-                <a16:creationId xmlns:a16="http://schemas.microsoft.com/office/drawing/2014/main" id="{D3B5ED83-FDF7-9E37-D0E2-7F4815DC7D04}"/>
+                <a16:creationId xmlns:a16="http://schemas.microsoft.com/office/drawing/2014/main" id="{5C13E565-2DB0-9450-3597-090EC7D67FEA}"/>
               </a:ext>
             </a:extLst>
           </p:cNvPr>
@@ -10221,7 +9757,7 @@
           <p:cNvPr id="9" name="Ellipse 8">
             <a:extLst>
               <a:ext uri="{FF2B5EF4-FFF2-40B4-BE49-F238E27FC236}">
-                <a16:creationId xmlns:a16="http://schemas.microsoft.com/office/drawing/2014/main" id="{CCD62B2E-0B73-F988-FB12-4719C81D39EB}"/>
+                <a16:creationId xmlns:a16="http://schemas.microsoft.com/office/drawing/2014/main" id="{E9FE1E6C-E697-FE85-B1C9-B59ECFF7DE59}"/>
               </a:ext>
             </a:extLst>
           </p:cNvPr>
@@ -10296,7 +9832,7 @@
           <p:cNvPr id="10" name="Textfeld 9">
             <a:extLst>
               <a:ext uri="{FF2B5EF4-FFF2-40B4-BE49-F238E27FC236}">
-                <a16:creationId xmlns:a16="http://schemas.microsoft.com/office/drawing/2014/main" id="{5347C36E-7657-5AD3-3FA7-EEC8B0094DB9}"/>
+                <a16:creationId xmlns:a16="http://schemas.microsoft.com/office/drawing/2014/main" id="{6A763A1B-1F93-DB9C-4C3B-9A831FBBA9A4}"/>
               </a:ext>
             </a:extLst>
           </p:cNvPr>
@@ -10340,7 +9876,7 @@
           <p:cNvPr id="11" name="Textfeld 10">
             <a:extLst>
               <a:ext uri="{FF2B5EF4-FFF2-40B4-BE49-F238E27FC236}">
-                <a16:creationId xmlns:a16="http://schemas.microsoft.com/office/drawing/2014/main" id="{B09A77E1-8211-5DEE-018F-A6A58E546956}"/>
+                <a16:creationId xmlns:a16="http://schemas.microsoft.com/office/drawing/2014/main" id="{CD633531-66FA-B630-790B-4C06C040C235}"/>
               </a:ext>
             </a:extLst>
           </p:cNvPr>
@@ -10384,7 +9920,7 @@
           <p:cNvPr id="12" name="Ellipse 11">
             <a:extLst>
               <a:ext uri="{FF2B5EF4-FFF2-40B4-BE49-F238E27FC236}">
-                <a16:creationId xmlns:a16="http://schemas.microsoft.com/office/drawing/2014/main" id="{6CDD6B95-A49B-D76A-2E45-16E317363798}"/>
+                <a16:creationId xmlns:a16="http://schemas.microsoft.com/office/drawing/2014/main" id="{DEB11744-E4CB-E949-4248-B0F2AE6169C9}"/>
               </a:ext>
             </a:extLst>
           </p:cNvPr>
@@ -10459,7 +9995,7 @@
           <p:cNvPr id="13" name="Textfeld 12">
             <a:extLst>
               <a:ext uri="{FF2B5EF4-FFF2-40B4-BE49-F238E27FC236}">
-                <a16:creationId xmlns:a16="http://schemas.microsoft.com/office/drawing/2014/main" id="{507F10C4-A9E0-B663-B834-460D6401E744}"/>
+                <a16:creationId xmlns:a16="http://schemas.microsoft.com/office/drawing/2014/main" id="{37C6F9C6-BE02-2A51-98B1-F3EC806FD3CB}"/>
               </a:ext>
             </a:extLst>
           </p:cNvPr>
@@ -10503,7 +10039,7 @@
           <p:cNvPr id="14" name="Textfeld 13">
             <a:extLst>
               <a:ext uri="{FF2B5EF4-FFF2-40B4-BE49-F238E27FC236}">
-                <a16:creationId xmlns:a16="http://schemas.microsoft.com/office/drawing/2014/main" id="{59CEDDC8-3FFF-9BF2-7412-A5DB9E2C1896}"/>
+                <a16:creationId xmlns:a16="http://schemas.microsoft.com/office/drawing/2014/main" id="{BCABCD70-0F62-F384-328B-8EF0E79996C5}"/>
               </a:ext>
             </a:extLst>
           </p:cNvPr>
@@ -10532,7 +10068,7 @@
                   <a:srgbClr val="262626"/>
                 </a:solidFill>
               </a:rPr>
-              <a:t>ATE and RPE with evo, N runs per system, one central evaluation pipeline</a:t>
+              <a:t>ATE with evo, N runs per system, one central evaluation pipeline</a:t>
             </a:r>
             <a:endParaRPr lang="de-DE" sz="1400" dirty="0">
               <a:solidFill>
@@ -10547,7 +10083,7 @@
           <p:cNvPr id="15" name="Rechteck: abgerundete Ecken 14">
             <a:extLst>
               <a:ext uri="{FF2B5EF4-FFF2-40B4-BE49-F238E27FC236}">
-                <a16:creationId xmlns:a16="http://schemas.microsoft.com/office/drawing/2014/main" id="{C172D027-E993-AAA3-F6B3-6DC97BF245AA}"/>
+                <a16:creationId xmlns:a16="http://schemas.microsoft.com/office/drawing/2014/main" id="{DF145B92-C576-0C58-2B2F-AD268F49E74F}"/>
               </a:ext>
             </a:extLst>
           </p:cNvPr>
@@ -10617,7 +10153,7 @@
           <p:cNvPr id="16" name="Textfeld 15">
             <a:extLst>
               <a:ext uri="{FF2B5EF4-FFF2-40B4-BE49-F238E27FC236}">
-                <a16:creationId xmlns:a16="http://schemas.microsoft.com/office/drawing/2014/main" id="{DB8BAC5A-60E7-5942-3101-B55FF5EE7634}"/>
+                <a16:creationId xmlns:a16="http://schemas.microsoft.com/office/drawing/2014/main" id="{832F050E-5B50-EEC9-02B2-E651EFB99C73}"/>
               </a:ext>
             </a:extLst>
           </p:cNvPr>
@@ -10659,7 +10195,7 @@
     </p:spTree>
     <p:extLst>
       <p:ext uri="{BB962C8B-B14F-4D97-AF65-F5344CB8AC3E}">
-        <p14:creationId xmlns:p14="http://schemas.microsoft.com/office/powerpoint/2010/main" val="4050215479"/>
+        <p14:creationId xmlns:p14="http://schemas.microsoft.com/office/powerpoint/2010/main" val="2144163832"/>
       </p:ext>
     </p:extLst>
   </p:cSld>
@@ -10691,7 +10227,7 @@
           <p:cNvPr id="2" name="Titel 1">
             <a:extLst>
               <a:ext uri="{FF2B5EF4-FFF2-40B4-BE49-F238E27FC236}">
-                <a16:creationId xmlns:a16="http://schemas.microsoft.com/office/drawing/2014/main" id="{C6523B18-753B-4A1C-BBFA-6A5F7F89FA26}"/>
+                <a16:creationId xmlns:a16="http://schemas.microsoft.com/office/drawing/2014/main" id="{D0A35C4A-B204-801E-C43C-74CCAB203660}"/>
               </a:ext>
             </a:extLst>
           </p:cNvPr>
@@ -10719,7 +10255,7 @@
           <p:cNvPr id="4" name="Fußzeilenplatzhalter 3">
             <a:extLst>
               <a:ext uri="{FF2B5EF4-FFF2-40B4-BE49-F238E27FC236}">
-                <a16:creationId xmlns:a16="http://schemas.microsoft.com/office/drawing/2014/main" id="{BF78C84C-BEE8-3900-93E4-16C00653E629}"/>
+                <a16:creationId xmlns:a16="http://schemas.microsoft.com/office/drawing/2014/main" id="{4314457F-5BFC-3A64-8CC2-CE03B8C00DA4}"/>
               </a:ext>
             </a:extLst>
           </p:cNvPr>
@@ -10748,7 +10284,7 @@
           <p:cNvPr id="5" name="Foliennummernplatzhalter 4">
             <a:extLst>
               <a:ext uri="{FF2B5EF4-FFF2-40B4-BE49-F238E27FC236}">
-                <a16:creationId xmlns:a16="http://schemas.microsoft.com/office/drawing/2014/main" id="{B50254AD-4EF3-07F0-6C31-198147ABC1D6}"/>
+                <a16:creationId xmlns:a16="http://schemas.microsoft.com/office/drawing/2014/main" id="{63B73505-631B-4716-6306-3F2976C05EFA}"/>
               </a:ext>
             </a:extLst>
           </p:cNvPr>
@@ -10778,7 +10314,7 @@
           <p:cNvPr id="7" name="Grafik 6" descr="M3DGR robot platform with labelled sensors">
             <a:extLst>
               <a:ext uri="{FF2B5EF4-FFF2-40B4-BE49-F238E27FC236}">
-                <a16:creationId xmlns:a16="http://schemas.microsoft.com/office/drawing/2014/main" id="{000624B9-956F-8F8C-7FE4-62C38D9E5AE1}"/>
+                <a16:creationId xmlns:a16="http://schemas.microsoft.com/office/drawing/2014/main" id="{416F9591-DCC5-CDFB-F78E-530FE610E84F}"/>
               </a:ext>
             </a:extLst>
           </p:cNvPr>
@@ -10814,7 +10350,7 @@
           <p:cNvPr id="8" name="Textfeld 7">
             <a:extLst>
               <a:ext uri="{FF2B5EF4-FFF2-40B4-BE49-F238E27FC236}">
-                <a16:creationId xmlns:a16="http://schemas.microsoft.com/office/drawing/2014/main" id="{36448243-4311-2A18-5F33-DA1ADD534C6A}"/>
+                <a16:creationId xmlns:a16="http://schemas.microsoft.com/office/drawing/2014/main" id="{3C4B9E21-913D-6F56-1D95-7F98B1A1C05C}"/>
               </a:ext>
             </a:extLst>
           </p:cNvPr>
@@ -10858,7 +10394,7 @@
           <p:cNvPr id="9" name="Textfeld 8">
             <a:extLst>
               <a:ext uri="{FF2B5EF4-FFF2-40B4-BE49-F238E27FC236}">
-                <a16:creationId xmlns:a16="http://schemas.microsoft.com/office/drawing/2014/main" id="{20CF6BEB-335B-CAD9-4EB7-3FF8AF71E7B9}"/>
+                <a16:creationId xmlns:a16="http://schemas.microsoft.com/office/drawing/2014/main" id="{C5393051-5DBB-8B5F-F1F5-A0FECBC408FD}"/>
               </a:ext>
             </a:extLst>
           </p:cNvPr>
@@ -10925,7 +10461,7 @@
           <p:cNvPr id="10" name="Textfeld 9">
             <a:extLst>
               <a:ext uri="{FF2B5EF4-FFF2-40B4-BE49-F238E27FC236}">
-                <a16:creationId xmlns:a16="http://schemas.microsoft.com/office/drawing/2014/main" id="{CED5C1D1-60FF-C419-AB22-F2648F8D1599}"/>
+                <a16:creationId xmlns:a16="http://schemas.microsoft.com/office/drawing/2014/main" id="{520DF186-9CBD-8583-9D75-F75C15B12B40}"/>
               </a:ext>
             </a:extLst>
           </p:cNvPr>
@@ -10990,7 +10526,7 @@
     </p:spTree>
     <p:extLst>
       <p:ext uri="{BB962C8B-B14F-4D97-AF65-F5344CB8AC3E}">
-        <p14:creationId xmlns:p14="http://schemas.microsoft.com/office/powerpoint/2010/main" val="1121553725"/>
+        <p14:creationId xmlns:p14="http://schemas.microsoft.com/office/powerpoint/2010/main" val="432487383"/>
       </p:ext>
     </p:extLst>
   </p:cSld>
@@ -11022,7 +10558,7 @@
           <p:cNvPr id="2" name="Titel 1">
             <a:extLst>
               <a:ext uri="{FF2B5EF4-FFF2-40B4-BE49-F238E27FC236}">
-                <a16:creationId xmlns:a16="http://schemas.microsoft.com/office/drawing/2014/main" id="{F8984362-87B8-E8AE-CFE6-2CB6D5B43E89}"/>
+                <a16:creationId xmlns:a16="http://schemas.microsoft.com/office/drawing/2014/main" id="{526468FF-BA4D-6BFF-20C8-19B5445A4062}"/>
               </a:ext>
             </a:extLst>
           </p:cNvPr>
@@ -11051,7 +10587,7 @@
           <p:cNvPr id="4" name="Fußzeilenplatzhalter 3">
             <a:extLst>
               <a:ext uri="{FF2B5EF4-FFF2-40B4-BE49-F238E27FC236}">
-                <a16:creationId xmlns:a16="http://schemas.microsoft.com/office/drawing/2014/main" id="{0631A61A-6C33-A056-FFBE-9A59BC108063}"/>
+                <a16:creationId xmlns:a16="http://schemas.microsoft.com/office/drawing/2014/main" id="{6099355E-5D44-9BCC-F2CB-9A31D3CD6E58}"/>
               </a:ext>
             </a:extLst>
           </p:cNvPr>
@@ -11080,7 +10616,7 @@
           <p:cNvPr id="5" name="Foliennummernplatzhalter 4">
             <a:extLst>
               <a:ext uri="{FF2B5EF4-FFF2-40B4-BE49-F238E27FC236}">
-                <a16:creationId xmlns:a16="http://schemas.microsoft.com/office/drawing/2014/main" id="{2701CC5B-6E5E-30FB-82D0-03ECF26464A3}"/>
+                <a16:creationId xmlns:a16="http://schemas.microsoft.com/office/drawing/2014/main" id="{A0A08246-CBA9-1741-D165-71DE79F78045}"/>
               </a:ext>
             </a:extLst>
           </p:cNvPr>
@@ -11110,7 +10646,7 @@
           <p:cNvPr id="6" name="Textfeld 5">
             <a:extLst>
               <a:ext uri="{FF2B5EF4-FFF2-40B4-BE49-F238E27FC236}">
-                <a16:creationId xmlns:a16="http://schemas.microsoft.com/office/drawing/2014/main" id="{E5DCE6A9-4944-4B40-D8F1-ED2D91020BBE}"/>
+                <a16:creationId xmlns:a16="http://schemas.microsoft.com/office/drawing/2014/main" id="{0D4E0856-AB63-E451-98D3-25FC966008D8}"/>
               </a:ext>
             </a:extLst>
           </p:cNvPr>
@@ -11154,7 +10690,7 @@
           <p:cNvPr id="7" name="Tabelle 6">
             <a:extLst>
               <a:ext uri="{FF2B5EF4-FFF2-40B4-BE49-F238E27FC236}">
-                <a16:creationId xmlns:a16="http://schemas.microsoft.com/office/drawing/2014/main" id="{84A2B458-741D-60A7-C4F8-F25CEAE8DE3A}"/>
+                <a16:creationId xmlns:a16="http://schemas.microsoft.com/office/drawing/2014/main" id="{6CD656BD-A00F-38E5-85A9-E110E4E833C5}"/>
               </a:ext>
             </a:extLst>
           </p:cNvPr>
@@ -11164,7 +10700,7 @@
           <p:nvPr>
             <p:extLst>
               <p:ext uri="{D42A27DB-BD31-4B8C-83A1-F6EECF244321}">
-                <p14:modId xmlns:p14="http://schemas.microsoft.com/office/powerpoint/2010/main" val="2875202972"/>
+                <p14:modId xmlns:p14="http://schemas.microsoft.com/office/powerpoint/2010/main" val="3246561268"/>
               </p:ext>
             </p:extLst>
           </p:nvPr>
@@ -11183,21 +10719,21 @@
                 <a:gridCol w="1524000">
                   <a:extLst>
                     <a:ext uri="{9D8B030D-6E8A-4147-A177-3AD203B41FA5}">
-                      <a16:colId xmlns:a16="http://schemas.microsoft.com/office/drawing/2014/main" val="3240705883"/>
+                      <a16:colId xmlns:a16="http://schemas.microsoft.com/office/drawing/2014/main" val="225427603"/>
                     </a:ext>
                   </a:extLst>
                 </a:gridCol>
                 <a:gridCol w="889000">
                   <a:extLst>
                     <a:ext uri="{9D8B030D-6E8A-4147-A177-3AD203B41FA5}">
-                      <a16:colId xmlns:a16="http://schemas.microsoft.com/office/drawing/2014/main" val="821476051"/>
+                      <a16:colId xmlns:a16="http://schemas.microsoft.com/office/drawing/2014/main" val="3619722725"/>
                     </a:ext>
                   </a:extLst>
                 </a:gridCol>
                 <a:gridCol w="1778000">
                   <a:extLst>
                     <a:ext uri="{9D8B030D-6E8A-4147-A177-3AD203B41FA5}">
-                      <a16:colId xmlns:a16="http://schemas.microsoft.com/office/drawing/2014/main" val="3145550592"/>
+                      <a16:colId xmlns:a16="http://schemas.microsoft.com/office/drawing/2014/main" val="1042980071"/>
                     </a:ext>
                   </a:extLst>
                 </a:gridCol>
@@ -11244,7 +10780,7 @@
                 </a:tc>
                 <a:extLst>
                   <a:ext uri="{0D108BD9-81ED-4DB2-BD59-A6C34878D82A}">
-                    <a16:rowId xmlns:a16="http://schemas.microsoft.com/office/drawing/2014/main" val="1031359761"/>
+                    <a16:rowId xmlns:a16="http://schemas.microsoft.com/office/drawing/2014/main" val="554551718"/>
                   </a:ext>
                 </a:extLst>
               </a:tr>
@@ -11290,7 +10826,7 @@
                 </a:tc>
                 <a:extLst>
                   <a:ext uri="{0D108BD9-81ED-4DB2-BD59-A6C34878D82A}">
-                    <a16:rowId xmlns:a16="http://schemas.microsoft.com/office/drawing/2014/main" val="3618201821"/>
+                    <a16:rowId xmlns:a16="http://schemas.microsoft.com/office/drawing/2014/main" val="2977703562"/>
                   </a:ext>
                 </a:extLst>
               </a:tr>
@@ -11336,7 +10872,7 @@
                 </a:tc>
                 <a:extLst>
                   <a:ext uri="{0D108BD9-81ED-4DB2-BD59-A6C34878D82A}">
-                    <a16:rowId xmlns:a16="http://schemas.microsoft.com/office/drawing/2014/main" val="508212925"/>
+                    <a16:rowId xmlns:a16="http://schemas.microsoft.com/office/drawing/2014/main" val="3553944989"/>
                   </a:ext>
                 </a:extLst>
               </a:tr>
@@ -11382,7 +10918,7 @@
                 </a:tc>
                 <a:extLst>
                   <a:ext uri="{0D108BD9-81ED-4DB2-BD59-A6C34878D82A}">
-                    <a16:rowId xmlns:a16="http://schemas.microsoft.com/office/drawing/2014/main" val="3286451193"/>
+                    <a16:rowId xmlns:a16="http://schemas.microsoft.com/office/drawing/2014/main" val="3934310240"/>
                   </a:ext>
                 </a:extLst>
               </a:tr>
@@ -11395,7 +10931,7 @@
           <p:cNvPr id="8" name="Textfeld 7">
             <a:extLst>
               <a:ext uri="{FF2B5EF4-FFF2-40B4-BE49-F238E27FC236}">
-                <a16:creationId xmlns:a16="http://schemas.microsoft.com/office/drawing/2014/main" id="{078DC322-CD28-10F2-1C12-5C25E0D38CCA}"/>
+                <a16:creationId xmlns:a16="http://schemas.microsoft.com/office/drawing/2014/main" id="{1B588F48-1A0A-7D87-084B-4B80CAF7A4AE}"/>
               </a:ext>
             </a:extLst>
           </p:cNvPr>
@@ -11439,7 +10975,7 @@
           <p:cNvPr id="9" name="Tabelle 8">
             <a:extLst>
               <a:ext uri="{FF2B5EF4-FFF2-40B4-BE49-F238E27FC236}">
-                <a16:creationId xmlns:a16="http://schemas.microsoft.com/office/drawing/2014/main" id="{B024958E-408C-64CB-EE4C-794EAB6AFC4F}"/>
+                <a16:creationId xmlns:a16="http://schemas.microsoft.com/office/drawing/2014/main" id="{88B7593C-CFEE-D7A5-77C3-009AF1DB3739}"/>
               </a:ext>
             </a:extLst>
           </p:cNvPr>
@@ -11449,7 +10985,7 @@
           <p:nvPr>
             <p:extLst>
               <p:ext uri="{D42A27DB-BD31-4B8C-83A1-F6EECF244321}">
-                <p14:modId xmlns:p14="http://schemas.microsoft.com/office/powerpoint/2010/main" val="985997452"/>
+                <p14:modId xmlns:p14="http://schemas.microsoft.com/office/powerpoint/2010/main" val="449914670"/>
               </p:ext>
             </p:extLst>
           </p:nvPr>
@@ -11468,21 +11004,21 @@
                 <a:gridCol w="1016000">
                   <a:extLst>
                     <a:ext uri="{9D8B030D-6E8A-4147-A177-3AD203B41FA5}">
-                      <a16:colId xmlns:a16="http://schemas.microsoft.com/office/drawing/2014/main" val="3060361495"/>
+                      <a16:colId xmlns:a16="http://schemas.microsoft.com/office/drawing/2014/main" val="4016318286"/>
                     </a:ext>
                   </a:extLst>
                 </a:gridCol>
                 <a:gridCol w="1651000">
                   <a:extLst>
                     <a:ext uri="{9D8B030D-6E8A-4147-A177-3AD203B41FA5}">
-                      <a16:colId xmlns:a16="http://schemas.microsoft.com/office/drawing/2014/main" val="1587960435"/>
+                      <a16:colId xmlns:a16="http://schemas.microsoft.com/office/drawing/2014/main" val="1894084405"/>
                     </a:ext>
                   </a:extLst>
                 </a:gridCol>
                 <a:gridCol w="1524000">
                   <a:extLst>
                     <a:ext uri="{9D8B030D-6E8A-4147-A177-3AD203B41FA5}">
-                      <a16:colId xmlns:a16="http://schemas.microsoft.com/office/drawing/2014/main" val="3159415188"/>
+                      <a16:colId xmlns:a16="http://schemas.microsoft.com/office/drawing/2014/main" val="1711635298"/>
                     </a:ext>
                   </a:extLst>
                 </a:gridCol>
@@ -11526,7 +11062,7 @@
                 </a:tc>
                 <a:extLst>
                   <a:ext uri="{0D108BD9-81ED-4DB2-BD59-A6C34878D82A}">
-                    <a16:rowId xmlns:a16="http://schemas.microsoft.com/office/drawing/2014/main" val="1720647174"/>
+                    <a16:rowId xmlns:a16="http://schemas.microsoft.com/office/drawing/2014/main" val="1383865573"/>
                   </a:ext>
                 </a:extLst>
               </a:tr>
@@ -11572,7 +11108,7 @@
                 </a:tc>
                 <a:extLst>
                   <a:ext uri="{0D108BD9-81ED-4DB2-BD59-A6C34878D82A}">
-                    <a16:rowId xmlns:a16="http://schemas.microsoft.com/office/drawing/2014/main" val="829912823"/>
+                    <a16:rowId xmlns:a16="http://schemas.microsoft.com/office/drawing/2014/main" val="2149988667"/>
                   </a:ext>
                 </a:extLst>
               </a:tr>
@@ -11618,7 +11154,7 @@
                 </a:tc>
                 <a:extLst>
                   <a:ext uri="{0D108BD9-81ED-4DB2-BD59-A6C34878D82A}">
-                    <a16:rowId xmlns:a16="http://schemas.microsoft.com/office/drawing/2014/main" val="558440416"/>
+                    <a16:rowId xmlns:a16="http://schemas.microsoft.com/office/drawing/2014/main" val="4236893103"/>
                   </a:ext>
                 </a:extLst>
               </a:tr>
@@ -11664,7 +11200,7 @@
                 </a:tc>
                 <a:extLst>
                   <a:ext uri="{0D108BD9-81ED-4DB2-BD59-A6C34878D82A}">
-                    <a16:rowId xmlns:a16="http://schemas.microsoft.com/office/drawing/2014/main" val="4132057588"/>
+                    <a16:rowId xmlns:a16="http://schemas.microsoft.com/office/drawing/2014/main" val="88291801"/>
                   </a:ext>
                 </a:extLst>
               </a:tr>
@@ -11710,7 +11246,7 @@
                 </a:tc>
                 <a:extLst>
                   <a:ext uri="{0D108BD9-81ED-4DB2-BD59-A6C34878D82A}">
-                    <a16:rowId xmlns:a16="http://schemas.microsoft.com/office/drawing/2014/main" val="1735186595"/>
+                    <a16:rowId xmlns:a16="http://schemas.microsoft.com/office/drawing/2014/main" val="2001663474"/>
                   </a:ext>
                 </a:extLst>
               </a:tr>
@@ -11723,7 +11259,7 @@
           <p:cNvPr id="10" name="Rechteck: abgerundete Ecken 9">
             <a:extLst>
               <a:ext uri="{FF2B5EF4-FFF2-40B4-BE49-F238E27FC236}">
-                <a16:creationId xmlns:a16="http://schemas.microsoft.com/office/drawing/2014/main" id="{3A75C9BF-AAF3-6B5F-D782-0179810F001B}"/>
+                <a16:creationId xmlns:a16="http://schemas.microsoft.com/office/drawing/2014/main" id="{0988CB01-AE33-62D4-03EA-80EC91976146}"/>
               </a:ext>
             </a:extLst>
           </p:cNvPr>
@@ -11793,7 +11329,7 @@
           <p:cNvPr id="11" name="Textfeld 10">
             <a:extLst>
               <a:ext uri="{FF2B5EF4-FFF2-40B4-BE49-F238E27FC236}">
-                <a16:creationId xmlns:a16="http://schemas.microsoft.com/office/drawing/2014/main" id="{D55DB9DD-74C2-7F1D-F401-DED86AB09EC6}"/>
+                <a16:creationId xmlns:a16="http://schemas.microsoft.com/office/drawing/2014/main" id="{BCC953EF-D368-251A-C07A-B9C5F8443B20}"/>
               </a:ext>
             </a:extLst>
           </p:cNvPr>
@@ -11835,7 +11371,7 @@
     </p:spTree>
     <p:extLst>
       <p:ext uri="{BB962C8B-B14F-4D97-AF65-F5344CB8AC3E}">
-        <p14:creationId xmlns:p14="http://schemas.microsoft.com/office/powerpoint/2010/main" val="987481916"/>
+        <p14:creationId xmlns:p14="http://schemas.microsoft.com/office/powerpoint/2010/main" val="2241790725"/>
       </p:ext>
     </p:extLst>
   </p:cSld>
@@ -11867,7 +11403,7 @@
           <p:cNvPr id="2" name="Titel 1">
             <a:extLst>
               <a:ext uri="{FF2B5EF4-FFF2-40B4-BE49-F238E27FC236}">
-                <a16:creationId xmlns:a16="http://schemas.microsoft.com/office/drawing/2014/main" id="{54800830-FC93-5767-E36A-3070E01DEC63}"/>
+                <a16:creationId xmlns:a16="http://schemas.microsoft.com/office/drawing/2014/main" id="{46AA7C8D-61C1-A2FA-4D9D-FDE7CA78F9B4}"/>
               </a:ext>
             </a:extLst>
           </p:cNvPr>
@@ -11895,7 +11431,7 @@
           <p:cNvPr id="4" name="Fußzeilenplatzhalter 3">
             <a:extLst>
               <a:ext uri="{FF2B5EF4-FFF2-40B4-BE49-F238E27FC236}">
-                <a16:creationId xmlns:a16="http://schemas.microsoft.com/office/drawing/2014/main" id="{C863DE2C-E6BC-41DC-CE1A-5B368DEA49F2}"/>
+                <a16:creationId xmlns:a16="http://schemas.microsoft.com/office/drawing/2014/main" id="{03885353-DB7D-79AE-967A-9BF83EB07F15}"/>
               </a:ext>
             </a:extLst>
           </p:cNvPr>
@@ -11924,7 +11460,7 @@
           <p:cNvPr id="5" name="Foliennummernplatzhalter 4">
             <a:extLst>
               <a:ext uri="{FF2B5EF4-FFF2-40B4-BE49-F238E27FC236}">
-                <a16:creationId xmlns:a16="http://schemas.microsoft.com/office/drawing/2014/main" id="{67C77FCD-AF7C-2660-CC51-E86A6F0423F3}"/>
+                <a16:creationId xmlns:a16="http://schemas.microsoft.com/office/drawing/2014/main" id="{70B2E04F-B3EE-FB73-C2C0-57BF14EAE9A2}"/>
               </a:ext>
             </a:extLst>
           </p:cNvPr>
@@ -11954,7 +11490,7 @@
           <p:cNvPr id="6" name="Tabelle 5">
             <a:extLst>
               <a:ext uri="{FF2B5EF4-FFF2-40B4-BE49-F238E27FC236}">
-                <a16:creationId xmlns:a16="http://schemas.microsoft.com/office/drawing/2014/main" id="{C1E437EF-289E-9382-DDCF-48E34D464EA2}"/>
+                <a16:creationId xmlns:a16="http://schemas.microsoft.com/office/drawing/2014/main" id="{F85735C2-5338-CC3C-CCB1-5DA177D1A712}"/>
               </a:ext>
             </a:extLst>
           </p:cNvPr>
@@ -11964,7 +11500,7 @@
           <p:nvPr>
             <p:extLst>
               <p:ext uri="{D42A27DB-BD31-4B8C-83A1-F6EECF244321}">
-                <p14:modId xmlns:p14="http://schemas.microsoft.com/office/powerpoint/2010/main" val="96208867"/>
+                <p14:modId xmlns:p14="http://schemas.microsoft.com/office/powerpoint/2010/main" val="2506437666"/>
               </p:ext>
             </p:extLst>
           </p:nvPr>
@@ -11983,35 +11519,35 @@
                 <a:gridCol w="1905000">
                   <a:extLst>
                     <a:ext uri="{9D8B030D-6E8A-4147-A177-3AD203B41FA5}">
-                      <a16:colId xmlns:a16="http://schemas.microsoft.com/office/drawing/2014/main" val="2914626148"/>
+                      <a16:colId xmlns:a16="http://schemas.microsoft.com/office/drawing/2014/main" val="2218127414"/>
                     </a:ext>
                   </a:extLst>
                 </a:gridCol>
                 <a:gridCol w="1651000">
                   <a:extLst>
                     <a:ext uri="{9D8B030D-6E8A-4147-A177-3AD203B41FA5}">
-                      <a16:colId xmlns:a16="http://schemas.microsoft.com/office/drawing/2014/main" val="1021012499"/>
+                      <a16:colId xmlns:a16="http://schemas.microsoft.com/office/drawing/2014/main" val="1262365581"/>
                     </a:ext>
                   </a:extLst>
                 </a:gridCol>
                 <a:gridCol w="1651000">
                   <a:extLst>
                     <a:ext uri="{9D8B030D-6E8A-4147-A177-3AD203B41FA5}">
-                      <a16:colId xmlns:a16="http://schemas.microsoft.com/office/drawing/2014/main" val="1120600975"/>
+                      <a16:colId xmlns:a16="http://schemas.microsoft.com/office/drawing/2014/main" val="1312446260"/>
                     </a:ext>
                   </a:extLst>
                 </a:gridCol>
                 <a:gridCol w="2298700">
                   <a:extLst>
                     <a:ext uri="{9D8B030D-6E8A-4147-A177-3AD203B41FA5}">
-                      <a16:colId xmlns:a16="http://schemas.microsoft.com/office/drawing/2014/main" val="644077207"/>
+                      <a16:colId xmlns:a16="http://schemas.microsoft.com/office/drawing/2014/main" val="851012193"/>
                     </a:ext>
                   </a:extLst>
                 </a:gridCol>
                 <a:gridCol w="1270000">
                   <a:extLst>
                     <a:ext uri="{9D8B030D-6E8A-4147-A177-3AD203B41FA5}">
-                      <a16:colId xmlns:a16="http://schemas.microsoft.com/office/drawing/2014/main" val="574121893"/>
+                      <a16:colId xmlns:a16="http://schemas.microsoft.com/office/drawing/2014/main" val="3382964703"/>
                     </a:ext>
                   </a:extLst>
                 </a:gridCol>
@@ -12084,7 +11620,7 @@
                 </a:tc>
                 <a:extLst>
                   <a:ext uri="{0D108BD9-81ED-4DB2-BD59-A6C34878D82A}">
-                    <a16:rowId xmlns:a16="http://schemas.microsoft.com/office/drawing/2014/main" val="95751035"/>
+                    <a16:rowId xmlns:a16="http://schemas.microsoft.com/office/drawing/2014/main" val="466826643"/>
                   </a:ext>
                 </a:extLst>
               </a:tr>
@@ -12156,7 +11692,7 @@
                 </a:tc>
                 <a:extLst>
                   <a:ext uri="{0D108BD9-81ED-4DB2-BD59-A6C34878D82A}">
-                    <a16:rowId xmlns:a16="http://schemas.microsoft.com/office/drawing/2014/main" val="3532497693"/>
+                    <a16:rowId xmlns:a16="http://schemas.microsoft.com/office/drawing/2014/main" val="870981283"/>
                   </a:ext>
                 </a:extLst>
               </a:tr>
@@ -12228,7 +11764,7 @@
                 </a:tc>
                 <a:extLst>
                   <a:ext uri="{0D108BD9-81ED-4DB2-BD59-A6C34878D82A}">
-                    <a16:rowId xmlns:a16="http://schemas.microsoft.com/office/drawing/2014/main" val="1196881416"/>
+                    <a16:rowId xmlns:a16="http://schemas.microsoft.com/office/drawing/2014/main" val="3141415199"/>
                   </a:ext>
                 </a:extLst>
               </a:tr>
@@ -12300,7 +11836,7 @@
                 </a:tc>
                 <a:extLst>
                   <a:ext uri="{0D108BD9-81ED-4DB2-BD59-A6C34878D82A}">
-                    <a16:rowId xmlns:a16="http://schemas.microsoft.com/office/drawing/2014/main" val="3144082216"/>
+                    <a16:rowId xmlns:a16="http://schemas.microsoft.com/office/drawing/2014/main" val="192756842"/>
                   </a:ext>
                 </a:extLst>
               </a:tr>
@@ -12372,7 +11908,7 @@
                 </a:tc>
                 <a:extLst>
                   <a:ext uri="{0D108BD9-81ED-4DB2-BD59-A6C34878D82A}">
-                    <a16:rowId xmlns:a16="http://schemas.microsoft.com/office/drawing/2014/main" val="4147519050"/>
+                    <a16:rowId xmlns:a16="http://schemas.microsoft.com/office/drawing/2014/main" val="1885317645"/>
                   </a:ext>
                 </a:extLst>
               </a:tr>
@@ -12385,7 +11921,7 @@
           <p:cNvPr id="7" name="Rechteck: abgerundete Ecken 6">
             <a:extLst>
               <a:ext uri="{FF2B5EF4-FFF2-40B4-BE49-F238E27FC236}">
-                <a16:creationId xmlns:a16="http://schemas.microsoft.com/office/drawing/2014/main" id="{75A41A3D-2D8A-9AF3-F793-09B1194CBC40}"/>
+                <a16:creationId xmlns:a16="http://schemas.microsoft.com/office/drawing/2014/main" id="{7EFC29D8-A315-EAE2-0191-73A241FF1527}"/>
               </a:ext>
             </a:extLst>
           </p:cNvPr>
@@ -12455,7 +11991,7 @@
           <p:cNvPr id="8" name="Textfeld 7">
             <a:extLst>
               <a:ext uri="{FF2B5EF4-FFF2-40B4-BE49-F238E27FC236}">
-                <a16:creationId xmlns:a16="http://schemas.microsoft.com/office/drawing/2014/main" id="{28F4686F-21A8-35EE-F1CB-B9F16A989C59}"/>
+                <a16:creationId xmlns:a16="http://schemas.microsoft.com/office/drawing/2014/main" id="{387A5A2A-AE3B-68B2-565E-5A067D07CA57}"/>
               </a:ext>
             </a:extLst>
           </p:cNvPr>
@@ -12497,7 +12033,7 @@
     </p:spTree>
     <p:extLst>
       <p:ext uri="{BB962C8B-B14F-4D97-AF65-F5344CB8AC3E}">
-        <p14:creationId xmlns:p14="http://schemas.microsoft.com/office/powerpoint/2010/main" val="2485333405"/>
+        <p14:creationId xmlns:p14="http://schemas.microsoft.com/office/powerpoint/2010/main" val="2683936689"/>
       </p:ext>
     </p:extLst>
   </p:cSld>
@@ -12529,7 +12065,7 @@
           <p:cNvPr id="2" name="Titel 1">
             <a:extLst>
               <a:ext uri="{FF2B5EF4-FFF2-40B4-BE49-F238E27FC236}">
-                <a16:creationId xmlns:a16="http://schemas.microsoft.com/office/drawing/2014/main" id="{9CA1B709-6037-04A1-D9CF-6F351E937233}"/>
+                <a16:creationId xmlns:a16="http://schemas.microsoft.com/office/drawing/2014/main" id="{7E0288AE-ECCB-AA99-627F-06323C617CE1}"/>
               </a:ext>
             </a:extLst>
           </p:cNvPr>
@@ -12557,7 +12093,7 @@
           <p:cNvPr id="4" name="Fußzeilenplatzhalter 3">
             <a:extLst>
               <a:ext uri="{FF2B5EF4-FFF2-40B4-BE49-F238E27FC236}">
-                <a16:creationId xmlns:a16="http://schemas.microsoft.com/office/drawing/2014/main" id="{BE4F160A-3075-ECE9-CE63-EB526A818C35}"/>
+                <a16:creationId xmlns:a16="http://schemas.microsoft.com/office/drawing/2014/main" id="{5B31DA9E-BF70-613C-792C-A4E84A0C690C}"/>
               </a:ext>
             </a:extLst>
           </p:cNvPr>
@@ -12586,7 +12122,7 @@
           <p:cNvPr id="5" name="Foliennummernplatzhalter 4">
             <a:extLst>
               <a:ext uri="{FF2B5EF4-FFF2-40B4-BE49-F238E27FC236}">
-                <a16:creationId xmlns:a16="http://schemas.microsoft.com/office/drawing/2014/main" id="{7FB4F2AB-7636-EC89-1DF1-11608AF4BB38}"/>
+                <a16:creationId xmlns:a16="http://schemas.microsoft.com/office/drawing/2014/main" id="{7826B7F8-7844-B499-3AB1-55766EFA1A25}"/>
               </a:ext>
             </a:extLst>
           </p:cNvPr>
@@ -12616,7 +12152,7 @@
           <p:cNvPr id="7" name="Grafik 6" descr="MASt3R-SLAM dense reconstruction of an office with camera poses">
             <a:extLst>
               <a:ext uri="{FF2B5EF4-FFF2-40B4-BE49-F238E27FC236}">
-                <a16:creationId xmlns:a16="http://schemas.microsoft.com/office/drawing/2014/main" id="{44219621-BD5E-AC24-7B80-5C67B65ADB56}"/>
+                <a16:creationId xmlns:a16="http://schemas.microsoft.com/office/drawing/2014/main" id="{FFE9BBAF-EC00-E2F7-D33F-012AF101B814}"/>
               </a:ext>
             </a:extLst>
           </p:cNvPr>
@@ -12652,7 +12188,7 @@
           <p:cNvPr id="8" name="Textfeld 7">
             <a:extLst>
               <a:ext uri="{FF2B5EF4-FFF2-40B4-BE49-F238E27FC236}">
-                <a16:creationId xmlns:a16="http://schemas.microsoft.com/office/drawing/2014/main" id="{48340991-F8F0-252A-DF61-87ECBF1D2420}"/>
+                <a16:creationId xmlns:a16="http://schemas.microsoft.com/office/drawing/2014/main" id="{8D4E5926-00A5-0778-6442-AF89F8447423}"/>
               </a:ext>
             </a:extLst>
           </p:cNvPr>
@@ -12696,7 +12232,7 @@
           <p:cNvPr id="9" name="Textfeld 8">
             <a:extLst>
               <a:ext uri="{FF2B5EF4-FFF2-40B4-BE49-F238E27FC236}">
-                <a16:creationId xmlns:a16="http://schemas.microsoft.com/office/drawing/2014/main" id="{B517570D-FFBC-25FA-08A5-4F64DBDAB0BB}"/>
+                <a16:creationId xmlns:a16="http://schemas.microsoft.com/office/drawing/2014/main" id="{F3B89583-2A48-3131-34FD-0096139FC44C}"/>
               </a:ext>
             </a:extLst>
           </p:cNvPr>
@@ -12740,7 +12276,7 @@
           <p:cNvPr id="10" name="Textfeld 9">
             <a:extLst>
               <a:ext uri="{FF2B5EF4-FFF2-40B4-BE49-F238E27FC236}">
-                <a16:creationId xmlns:a16="http://schemas.microsoft.com/office/drawing/2014/main" id="{E89DA43D-B28A-F43F-F9A2-C0C2926D535B}"/>
+                <a16:creationId xmlns:a16="http://schemas.microsoft.com/office/drawing/2014/main" id="{A9501A55-7675-8491-2DA5-98F42A3C3C7C}"/>
               </a:ext>
             </a:extLst>
           </p:cNvPr>
@@ -12856,7 +12392,7 @@
     </p:spTree>
     <p:extLst>
       <p:ext uri="{BB962C8B-B14F-4D97-AF65-F5344CB8AC3E}">
-        <p14:creationId xmlns:p14="http://schemas.microsoft.com/office/powerpoint/2010/main" val="579315154"/>
+        <p14:creationId xmlns:p14="http://schemas.microsoft.com/office/powerpoint/2010/main" val="1038355533"/>
       </p:ext>
     </p:extLst>
   </p:cSld>
@@ -12888,7 +12424,7 @@
           <p:cNvPr id="2" name="Titel 1">
             <a:extLst>
               <a:ext uri="{FF2B5EF4-FFF2-40B4-BE49-F238E27FC236}">
-                <a16:creationId xmlns:a16="http://schemas.microsoft.com/office/drawing/2014/main" id="{C4181EC3-2FEB-0AC2-5904-AB6A1A32AA09}"/>
+                <a16:creationId xmlns:a16="http://schemas.microsoft.com/office/drawing/2014/main" id="{6C06C028-FC87-7061-6DC3-528434E5FAE7}"/>
               </a:ext>
             </a:extLst>
           </p:cNvPr>
@@ -12906,7 +12442,7 @@
           <a:p>
             <a:r>
               <a:rPr lang="de-DE"/>
-              <a:t>Metric 1: Absolute Trajectory Error (ATE)</a:t>
+              <a:t>Metric: Absolute Trajectory Error (ATE)</a:t>
             </a:r>
           </a:p>
         </p:txBody>
@@ -12916,7 +12452,7 @@
           <p:cNvPr id="4" name="Fußzeilenplatzhalter 3">
             <a:extLst>
               <a:ext uri="{FF2B5EF4-FFF2-40B4-BE49-F238E27FC236}">
-                <a16:creationId xmlns:a16="http://schemas.microsoft.com/office/drawing/2014/main" id="{8B41BBC3-2E7F-0DA7-3155-64CDFF2E1C2F}"/>
+                <a16:creationId xmlns:a16="http://schemas.microsoft.com/office/drawing/2014/main" id="{FB3021DF-6378-405D-7D51-FBC85BC76BC8}"/>
               </a:ext>
             </a:extLst>
           </p:cNvPr>
@@ -12945,7 +12481,7 @@
           <p:cNvPr id="5" name="Foliennummernplatzhalter 4">
             <a:extLst>
               <a:ext uri="{FF2B5EF4-FFF2-40B4-BE49-F238E27FC236}">
-                <a16:creationId xmlns:a16="http://schemas.microsoft.com/office/drawing/2014/main" id="{94899412-351B-7E8B-5A54-2CC0F5B08275}"/>
+                <a16:creationId xmlns:a16="http://schemas.microsoft.com/office/drawing/2014/main" id="{98023A98-EF10-1BDC-59C6-8739BAE4AB8F}"/>
               </a:ext>
             </a:extLst>
           </p:cNvPr>
@@ -12975,7 +12511,7 @@
           <p:cNvPr id="7" name="Grafik 6" descr="Ground truth and aligned estimate with per-timestep position errors">
             <a:extLst>
               <a:ext uri="{FF2B5EF4-FFF2-40B4-BE49-F238E27FC236}">
-                <a16:creationId xmlns:a16="http://schemas.microsoft.com/office/drawing/2014/main" id="{881116BC-3E78-C000-337A-064F8B94B509}"/>
+                <a16:creationId xmlns:a16="http://schemas.microsoft.com/office/drawing/2014/main" id="{7AC06FC5-D208-7CDE-C766-5D183C9DE127}"/>
               </a:ext>
             </a:extLst>
           </p:cNvPr>
@@ -13011,7 +12547,7 @@
           <p:cNvPr id="8" name="Textfeld 7">
             <a:extLst>
               <a:ext uri="{FF2B5EF4-FFF2-40B4-BE49-F238E27FC236}">
-                <a16:creationId xmlns:a16="http://schemas.microsoft.com/office/drawing/2014/main" id="{205E1796-A558-7669-5B64-81639D944B2F}"/>
+                <a16:creationId xmlns:a16="http://schemas.microsoft.com/office/drawing/2014/main" id="{2CA96DFE-7B2E-45CB-F025-806A07CC9B15}"/>
               </a:ext>
             </a:extLst>
           </p:cNvPr>
@@ -13055,7 +12591,7 @@
           <p:cNvPr id="9" name="Textfeld 8">
             <a:extLst>
               <a:ext uri="{FF2B5EF4-FFF2-40B4-BE49-F238E27FC236}">
-                <a16:creationId xmlns:a16="http://schemas.microsoft.com/office/drawing/2014/main" id="{A3C9DA86-4A43-765D-0FCC-96D9B7ADAD62}"/>
+                <a16:creationId xmlns:a16="http://schemas.microsoft.com/office/drawing/2014/main" id="{CAA5C6FE-05E5-3320-FCA9-FA9E7C88A69D}"/>
               </a:ext>
             </a:extLst>
           </p:cNvPr>
@@ -13156,7 +12692,7 @@
           <p:cNvPr id="11" name="Grafik 10" descr="ATE RMSE formula">
             <a:extLst>
               <a:ext uri="{FF2B5EF4-FFF2-40B4-BE49-F238E27FC236}">
-                <a16:creationId xmlns:a16="http://schemas.microsoft.com/office/drawing/2014/main" id="{2391503D-5248-C015-569B-E151F6C24628}"/>
+                <a16:creationId xmlns:a16="http://schemas.microsoft.com/office/drawing/2014/main" id="{B87617A8-63E2-797B-5470-61F0B7136808}"/>
               </a:ext>
             </a:extLst>
           </p:cNvPr>
@@ -13192,7 +12728,7 @@
           <p:cNvPr id="12" name="Textfeld 11">
             <a:extLst>
               <a:ext uri="{FF2B5EF4-FFF2-40B4-BE49-F238E27FC236}">
-                <a16:creationId xmlns:a16="http://schemas.microsoft.com/office/drawing/2014/main" id="{EEB8720D-F986-9688-45BD-D2DBA9A81DD9}"/>
+                <a16:creationId xmlns:a16="http://schemas.microsoft.com/office/drawing/2014/main" id="{C867F1F4-06F5-C1D0-93EA-578F9E3AF4C8}"/>
               </a:ext>
             </a:extLst>
           </p:cNvPr>
@@ -13234,7 +12770,7 @@
     </p:spTree>
     <p:extLst>
       <p:ext uri="{BB962C8B-B14F-4D97-AF65-F5344CB8AC3E}">
-        <p14:creationId xmlns:p14="http://schemas.microsoft.com/office/powerpoint/2010/main" val="2709251909"/>
+        <p14:creationId xmlns:p14="http://schemas.microsoft.com/office/powerpoint/2010/main" val="4054667461"/>
       </p:ext>
     </p:extLst>
   </p:cSld>
@@ -13266,7 +12802,7 @@
           <p:cNvPr id="2" name="Titel 1">
             <a:extLst>
               <a:ext uri="{FF2B5EF4-FFF2-40B4-BE49-F238E27FC236}">
-                <a16:creationId xmlns:a16="http://schemas.microsoft.com/office/drawing/2014/main" id="{D03B0698-3ECD-7814-3CEE-FCC90D38F61E}"/>
+                <a16:creationId xmlns:a16="http://schemas.microsoft.com/office/drawing/2014/main" id="{F4F38819-38B6-DD12-4D0C-826FCDEEF628}"/>
               </a:ext>
             </a:extLst>
           </p:cNvPr>
@@ -13284,7 +12820,7 @@
           <a:p>
             <a:r>
               <a:rPr lang="de-DE"/>
-              <a:t>Metric 2: Relative Pose Error (RPE)</a:t>
+              <a:t>Alignment and robustness</a:t>
             </a:r>
           </a:p>
         </p:txBody>
@@ -13294,7 +12830,7 @@
           <p:cNvPr id="4" name="Fußzeilenplatzhalter 3">
             <a:extLst>
               <a:ext uri="{FF2B5EF4-FFF2-40B4-BE49-F238E27FC236}">
-                <a16:creationId xmlns:a16="http://schemas.microsoft.com/office/drawing/2014/main" id="{9E04698D-FE17-C53E-228E-E605CAAF5B26}"/>
+                <a16:creationId xmlns:a16="http://schemas.microsoft.com/office/drawing/2014/main" id="{A10BC97E-B877-8BB1-BA4C-71D2BB8BF0A6}"/>
               </a:ext>
             </a:extLst>
           </p:cNvPr>
@@ -13323,7 +12859,7 @@
           <p:cNvPr id="5" name="Foliennummernplatzhalter 4">
             <a:extLst>
               <a:ext uri="{FF2B5EF4-FFF2-40B4-BE49-F238E27FC236}">
-                <a16:creationId xmlns:a16="http://schemas.microsoft.com/office/drawing/2014/main" id="{B0EBD0E1-EB6E-C6CE-4FA7-14F5A2BDD466}"/>
+                <a16:creationId xmlns:a16="http://schemas.microsoft.com/office/drawing/2014/main" id="{E618387C-055F-25DD-C1E1-98B1BB542FFE}"/>
               </a:ext>
             </a:extLst>
           </p:cNvPr>
@@ -13350,10 +12886,10 @@
       </p:sp>
       <p:pic>
         <p:nvPicPr>
-          <p:cNvPr id="7" name="Grafik 6" descr="Estimate drifting away from ground truth while relative motions stay similar">
-            <a:extLst>
-              <a:ext uri="{FF2B5EF4-FFF2-40B4-BE49-F238E27FC236}">
-                <a16:creationId xmlns:a16="http://schemas.microsoft.com/office/drawing/2014/main" id="{E95E1051-2EC1-EBA8-3AC0-5F355D3BE8CC}"/>
+          <p:cNvPr id="7" name="Grafik 6" descr="Raw estimate, SE(3) aligned estimate and Sim(3) aligned estimate">
+            <a:extLst>
+              <a:ext uri="{FF2B5EF4-FFF2-40B4-BE49-F238E27FC236}">
+                <a16:creationId xmlns:a16="http://schemas.microsoft.com/office/drawing/2014/main" id="{2FAB4355-1604-58EC-48A9-3EECFF129349}"/>
               </a:ext>
             </a:extLst>
           </p:cNvPr>
@@ -13376,8 +12912,8 @@
         </p:blipFill>
         <p:spPr>
           <a:xfrm>
-            <a:off x="316178" y="660400"/>
-            <a:ext cx="8498945" cy="2222500"/>
+            <a:off x="177800" y="681362"/>
+            <a:ext cx="8775700" cy="2574275"/>
           </a:xfrm>
           <a:prstGeom prst="rect">
             <a:avLst/>
@@ -13389,7 +12925,7 @@
           <p:cNvPr id="8" name="Textfeld 7">
             <a:extLst>
               <a:ext uri="{FF2B5EF4-FFF2-40B4-BE49-F238E27FC236}">
-                <a16:creationId xmlns:a16="http://schemas.microsoft.com/office/drawing/2014/main" id="{0C1E22FF-0D8F-EFC5-8FD0-0004C869006D}"/>
+                <a16:creationId xmlns:a16="http://schemas.microsoft.com/office/drawing/2014/main" id="{06EF2BBB-63E0-CEB5-1DD6-F62BD35993B3}"/>
               </a:ext>
             </a:extLst>
           </p:cNvPr>
@@ -13398,8 +12934,52 @@
         </p:nvSpPr>
         <p:spPr>
           <a:xfrm>
-            <a:off x="177800" y="3022600"/>
-            <a:ext cx="4318000" cy="1397000"/>
+            <a:off x="177800" y="3403600"/>
+            <a:ext cx="4318000" cy="279400"/>
+          </a:xfrm>
+          <a:prstGeom prst="rect">
+            <a:avLst/>
+          </a:prstGeom>
+        </p:spPr>
+        <p:txBody>
+          <a:bodyPr vert="horz" wrap="square" lIns="0" tIns="45720" rIns="0" bIns="45720" rtlCol="0" anchor="t">
+            <a:noAutofit/>
+          </a:bodyPr>
+          <a:lstStyle/>
+          <a:p>
+            <a:pPr algn="l"/>
+            <a:r>
+              <a:rPr lang="en-US" sz="1600" b="1">
+                <a:solidFill>
+                  <a:srgbClr val="0063A6"/>
+                </a:solidFill>
+              </a:rPr>
+              <a:t>Alignment (Zhang and Scaramuzza 2018)</a:t>
+            </a:r>
+            <a:endParaRPr lang="de-DE" sz="1600" b="1" dirty="0">
+              <a:solidFill>
+                <a:srgbClr val="0063A6"/>
+              </a:solidFill>
+            </a:endParaRPr>
+          </a:p>
+        </p:txBody>
+      </p:sp>
+      <p:sp>
+        <p:nvSpPr>
+          <p:cNvPr id="9" name="Textfeld 8">
+            <a:extLst>
+              <a:ext uri="{FF2B5EF4-FFF2-40B4-BE49-F238E27FC236}">
+                <a16:creationId xmlns:a16="http://schemas.microsoft.com/office/drawing/2014/main" id="{815CFFE4-CCA8-2C07-7251-F2C5DEC93A78}"/>
+              </a:ext>
+            </a:extLst>
+          </p:cNvPr>
+          <p:cNvSpPr txBox="1"/>
+          <p:nvPr/>
+        </p:nvSpPr>
+        <p:spPr>
+          <a:xfrm>
+            <a:off x="177800" y="3708400"/>
+            <a:ext cx="4318000" cy="762000"/>
           </a:xfrm>
           <a:prstGeom prst="rect">
             <a:avLst/>
@@ -13419,12 +12999,12 @@
               <a:buChar char="•"/>
             </a:pPr>
             <a:r>
-              <a:rPr lang="en-US" sz="1300">
+              <a:rPr lang="pt-BR" sz="1300">
                 <a:solidFill>
                   <a:srgbClr val="262626"/>
                 </a:solidFill>
               </a:rPr>
-              <a:t>Compares relative motion over a fixed distance (1 m)</a:t>
+              <a:t>Metric sensors (LiDAR, RGB-D): SE(3)</a:t>
             </a:r>
           </a:p>
           <a:p>
@@ -13436,14 +13016,91 @@
               <a:buChar char="•"/>
             </a:pPr>
             <a:r>
-              <a:rPr lang="en-US" sz="1300">
+              <a:rPr lang="pt-BR" sz="1300">
                 <a:solidFill>
                   <a:srgbClr val="262626"/>
                 </a:solidFill>
               </a:rPr>
-              <a:t>Measures local drift: translation [m] and rotation [deg]</a:t>
-            </a:r>
-          </a:p>
+              <a:t>Monocular camera: Sim(3), scale factor reported</a:t>
+            </a:r>
+            <a:endParaRPr lang="de-DE" sz="1300" dirty="0">
+              <a:solidFill>
+                <a:srgbClr val="262626"/>
+              </a:solidFill>
+            </a:endParaRPr>
+          </a:p>
+        </p:txBody>
+      </p:sp>
+      <p:sp>
+        <p:nvSpPr>
+          <p:cNvPr id="10" name="Textfeld 9">
+            <a:extLst>
+              <a:ext uri="{FF2B5EF4-FFF2-40B4-BE49-F238E27FC236}">
+                <a16:creationId xmlns:a16="http://schemas.microsoft.com/office/drawing/2014/main" id="{74260852-CD71-6D9D-CC51-A2A3199C86EB}"/>
+              </a:ext>
+            </a:extLst>
+          </p:cNvPr>
+          <p:cNvSpPr txBox="1"/>
+          <p:nvPr/>
+        </p:nvSpPr>
+        <p:spPr>
+          <a:xfrm>
+            <a:off x="4648200" y="3403600"/>
+            <a:ext cx="4318000" cy="279400"/>
+          </a:xfrm>
+          <a:prstGeom prst="rect">
+            <a:avLst/>
+          </a:prstGeom>
+        </p:spPr>
+        <p:txBody>
+          <a:bodyPr vert="horz" wrap="square" lIns="0" tIns="45720" rIns="0" bIns="45720" rtlCol="0" anchor="t">
+            <a:noAutofit/>
+          </a:bodyPr>
+          <a:lstStyle/>
+          <a:p>
+            <a:pPr algn="l"/>
+            <a:r>
+              <a:rPr lang="de-DE" sz="1600" b="1">
+                <a:solidFill>
+                  <a:srgbClr val="0063A6"/>
+                </a:solidFill>
+              </a:rPr>
+              <a:t>Robustness (as in ORB-SLAM3)</a:t>
+            </a:r>
+            <a:endParaRPr lang="de-DE" sz="1600" b="1" dirty="0">
+              <a:solidFill>
+                <a:srgbClr val="0063A6"/>
+              </a:solidFill>
+            </a:endParaRPr>
+          </a:p>
+        </p:txBody>
+      </p:sp>
+      <p:sp>
+        <p:nvSpPr>
+          <p:cNvPr id="11" name="Textfeld 10">
+            <a:extLst>
+              <a:ext uri="{FF2B5EF4-FFF2-40B4-BE49-F238E27FC236}">
+                <a16:creationId xmlns:a16="http://schemas.microsoft.com/office/drawing/2014/main" id="{3C2799DB-8633-B26C-A0A6-57E896412DFE}"/>
+              </a:ext>
+            </a:extLst>
+          </p:cNvPr>
+          <p:cNvSpPr txBox="1"/>
+          <p:nvPr/>
+        </p:nvSpPr>
+        <p:spPr>
+          <a:xfrm>
+            <a:off x="4648200" y="3708400"/>
+            <a:ext cx="4318000" cy="762000"/>
+          </a:xfrm>
+          <a:prstGeom prst="rect">
+            <a:avLst/>
+          </a:prstGeom>
+        </p:spPr>
+        <p:txBody>
+          <a:bodyPr vert="horz" wrap="square" lIns="0" tIns="45720" rIns="91440" bIns="45720" rtlCol="0" anchor="t">
+            <a:normAutofit/>
+          </a:bodyPr>
+          <a:lstStyle/>
           <a:p>
             <a:pPr marL="177800" indent="-177800" algn="l">
               <a:spcAft>
@@ -13458,7 +13115,24 @@
                   <a:srgbClr val="262626"/>
                 </a:solidFill>
               </a:rPr>
-              <a:t>Independent of where the error happened</a:t>
+              <a:t>Success rate k of N runs, failures never dropped</a:t>
+            </a:r>
+          </a:p>
+          <a:p>
+            <a:pPr marL="177800" indent="-177800" algn="l">
+              <a:spcAft>
+                <a:spcPts val="400"/>
+              </a:spcAft>
+              <a:buFont typeface="+mj-lt"/>
+              <a:buChar char="•"/>
+            </a:pPr>
+            <a:r>
+              <a:rPr lang="en-US" sz="1300">
+                <a:solidFill>
+                  <a:srgbClr val="262626"/>
+                </a:solidFill>
+              </a:rPr>
+              <a:t>Fraction of the trajectory that was tracked</a:t>
             </a:r>
             <a:endParaRPr lang="de-DE" sz="1300" dirty="0">
               <a:solidFill>
@@ -13468,146 +13142,10 @@
           </a:p>
         </p:txBody>
       </p:sp>
-      <p:sp>
-        <p:nvSpPr>
-          <p:cNvPr id="9" name="Rechteck: abgerundete Ecken 8">
-            <a:extLst>
-              <a:ext uri="{FF2B5EF4-FFF2-40B4-BE49-F238E27FC236}">
-                <a16:creationId xmlns:a16="http://schemas.microsoft.com/office/drawing/2014/main" id="{05E09DA2-6FC9-5CD1-9F10-D5FEF2A2957D}"/>
-              </a:ext>
-            </a:extLst>
-          </p:cNvPr>
-          <p:cNvSpPr/>
-          <p:nvPr/>
-        </p:nvSpPr>
-        <p:spPr>
-          <a:xfrm>
-            <a:off x="4648200" y="3022600"/>
-            <a:ext cx="4318000" cy="1270000"/>
-          </a:xfrm>
-          <a:prstGeom prst="roundRect">
-            <a:avLst>
-              <a:gd name="adj" fmla="val 6000"/>
-            </a:avLst>
-          </a:prstGeom>
-          <a:solidFill>
-            <a:srgbClr val="E6EFF7"/>
-          </a:solidFill>
-          <a:ln w="12700" cap="flat" cmpd="sng" algn="ctr">
-            <a:noFill/>
-            <a:prstDash val="solid"/>
-            <a:miter lim="800000"/>
-          </a:ln>
-          <a:effectLst/>
-          <a:extLst>
-            <a:ext uri="{91240B29-F687-4F45-9708-019B960494DF}">
-              <a14:hiddenLine xmlns:a14="http://schemas.microsoft.com/office/drawing/2010/main" w="12700" cap="flat" cmpd="sng" algn="ctr">
-                <a:solidFill>
-                  <a:schemeClr val="accent1">
-                    <a:shade val="15000"/>
-                  </a:schemeClr>
-                </a:solidFill>
-                <a:prstDash val="solid"/>
-                <a:miter lim="800000"/>
-              </a14:hiddenLine>
-            </a:ext>
-          </a:extLst>
-        </p:spPr>
-        <p:style>
-          <a:lnRef idx="2">
-            <a:schemeClr val="accent1">
-              <a:shade val="15000"/>
-            </a:schemeClr>
-          </a:lnRef>
-          <a:fillRef idx="1">
-            <a:schemeClr val="accent1"/>
-          </a:fillRef>
-          <a:effectRef idx="0">
-            <a:schemeClr val="accent1"/>
-          </a:effectRef>
-          <a:fontRef idx="minor">
-            <a:schemeClr val="lt1"/>
-          </a:fontRef>
-        </p:style>
-        <p:txBody>
-          <a:bodyPr rtlCol="0" anchor="ctr"/>
-          <a:lstStyle/>
-          <a:p>
-            <a:pPr algn="ctr"/>
-            <a:endParaRPr lang="de-DE"/>
-          </a:p>
-        </p:txBody>
-      </p:sp>
-      <p:sp>
-        <p:nvSpPr>
-          <p:cNvPr id="10" name="Textfeld 9">
-            <a:extLst>
-              <a:ext uri="{FF2B5EF4-FFF2-40B4-BE49-F238E27FC236}">
-                <a16:creationId xmlns:a16="http://schemas.microsoft.com/office/drawing/2014/main" id="{4F28C02B-D6F0-65FA-B51C-D5EEED30A298}"/>
-              </a:ext>
-            </a:extLst>
-          </p:cNvPr>
-          <p:cNvSpPr txBox="1"/>
-          <p:nvPr/>
-        </p:nvSpPr>
-        <p:spPr>
-          <a:xfrm>
-            <a:off x="4800600" y="3124200"/>
-            <a:ext cx="4013200" cy="1092200"/>
-          </a:xfrm>
-          <a:prstGeom prst="rect">
-            <a:avLst/>
-          </a:prstGeom>
-        </p:spPr>
-        <p:txBody>
-          <a:bodyPr vert="horz" wrap="square" lIns="0" tIns="45720" rIns="0" bIns="45720" rtlCol="0" anchor="t">
-            <a:normAutofit/>
-          </a:bodyPr>
-          <a:lstStyle/>
-          <a:p>
-            <a:pPr algn="l"/>
-            <a:r>
-              <a:rPr lang="en-US" sz="1400">
-                <a:solidFill>
-                  <a:srgbClr val="262626"/>
-                </a:solidFill>
-              </a:rPr>
-              <a:t>ATE = how far off overall?</a:t>
-            </a:r>
-          </a:p>
-          <a:p>
-            <a:pPr algn="l"/>
-            <a:r>
-              <a:rPr lang="en-US" sz="1400">
-                <a:solidFill>
-                  <a:srgbClr val="262626"/>
-                </a:solidFill>
-              </a:rPr>
-              <a:t>RPE = how much drift per metre?</a:t>
-            </a:r>
-          </a:p>
-          <a:p>
-            <a:pPr algn="l"/>
-            <a:r>
-              <a:rPr lang="en-US" sz="1400">
-                <a:solidFill>
-                  <a:srgbClr val="262626"/>
-                </a:solidFill>
-              </a:rPr>
-              <a:t>We report both (Sturm 2012; Kümmerle 2009).</a:t>
-            </a:r>
-            <a:endParaRPr lang="de-DE" sz="1400" dirty="0">
-              <a:solidFill>
-                <a:srgbClr val="262626"/>
-              </a:solidFill>
-            </a:endParaRPr>
-          </a:p>
-        </p:txBody>
-      </p:sp>
     </p:spTree>
     <p:extLst>
       <p:ext uri="{BB962C8B-B14F-4D97-AF65-F5344CB8AC3E}">
-        <p14:creationId xmlns:p14="http://schemas.microsoft.com/office/powerpoint/2010/main" val="2026211787"/>
+        <p14:creationId xmlns:p14="http://schemas.microsoft.com/office/powerpoint/2010/main" val="3954099534"/>
       </p:ext>
     </p:extLst>
   </p:cSld>
